--- a/esitlus/tuleva-kogum-pitch.pptx
+++ b/esitlus/tuleva-kogum-pitch.pptx
@@ -15,9 +15,11 @@
     <p:sldId id="263" r:id="rId9"/>
     <p:sldId id="264" r:id="rId10"/>
     <p:sldId id="265" r:id="rId11"/>
+    <p:sldId id="266" r:id="rId12"/>
+    <p:sldId id="267" r:id="rId13"/>
   </p:sldIdLst>
   <p:notesMasterIdLst>
-    <p:notesMasterId r:id="rId12"/>
+    <p:notesMasterId r:id="rId14"/>
   </p:notesMasterIdLst>
   <p:sldSz cx="12192000" cy="6858000"/>
   <p:notesSz cx="6858000" cy="12192000"/>
@@ -511,7 +513,7 @@
           <a:p>
             <a:r>
               <a:rPr lang="en-US" dirty="0"/>
-              <a:t>0:00–0:20 · Konks. Tõstke käsi, kes teab, mida ta oma telefonipaketi eest kuus maksab. (paus) Teie liikmete küsitluses ütles 83%, et püsikulud on probleem. Kõige teravam valu: head hinda saab ainult siis, kui ähvardad lahkuda. Ja iga kahe aasta tagant algab sama ring uuesti.</a:t>
+              <a:t>0:00–0:15 · Mida me ehitasime? Tõstke käsi, kes teab, mida ta oma telefonipaketi eest kuus maksab. (paus) Tuleva Kogum on mobiilside ühishange: Tuleva küsib kord aastas kõigilt operaatoritelt ühe hinna ja liige vahetab paketi ühe allkirjaga.</a:t>
             </a:r>
             <a:endParaRPr lang="en-US" dirty="0"/>
           </a:p>
@@ -599,7 +601,7 @@
           <a:p>
             <a:r>
               <a:rPr lang="en-US" dirty="0"/>
-              <a:t>Lõpp. Tuleva tegi nähtavaks pensionifondide tasud. Nüüd teeme sama telefoniarvega. Üksi pole sul läbirääkimisjõudu. Tuhandel inimesel on.</a:t>
+              <a:t>Varu: kui küsitakse, kas keegi on seda teinud. Hispaania tarbijaühing OCU tegi kolm mobiilside ühishanget. Registreerunuid oli 92 500, siis 50 261 ja siis 17 400. Iga hange oli eraldi kampaania: uus registreerimine ja ühekordne tasu lepingu eest, püsivat suhet osalejaga polnud. Pakkumine nõrgenes: 2018. aastal ainult 8% soodustus võitja tavahinnast. Võitja oli kõik kolm korda MásMóvil, nii et varem vahetanutel polnud uuest hankest midagi võita (hinnang). Tasu tekitas vaidlusi ja osa pakkujaid jäi eemale. Vahetajate arvu OCU ei avaldanud, energiahankes vahetas umbes 10%. Itaalias võitis väljakutsuja Tiscali, 9 eurot kuus. Suurbritannias oli Which? ühisostu ajal turul sama hea pakkumine olemas. Eestis seovad operaatorite soodushinnad 24 kuuks, näiteks Tele2 kampaania 15,50 eurot, ja siis tuleb tavahind. Meie vastus: püsiv konto ja igakuine tasu seni, kuni liige on klient, tasu on avalik ja kõigile sama ning avaldame vahetajate arvu.</a:t>
             </a:r>
             <a:endParaRPr lang="en-US" dirty="0"/>
           </a:p>
@@ -623,6 +625,182 @@
             <a:fld id="{F7021451-1387-4CA6-816F-3879F97B5CBC}" type="slidenum">
               <a:rPr lang="en-US"/>
               <a:t>10</a:t>
+            </a:fld>
+            <a:endParaRPr lang="en-US"/>
+          </a:p>
+        </p:txBody>
+      </p:sp>
+    </p:spTree>
+    <p:extLst>
+      <p:ext uri="{BB962C8B-B14F-4D97-AF65-F5344CB8AC3E}">
+        <p14:creationId xmlns:p14="http://schemas.microsoft.com/office/powerpoint/2010/main" val="1024086991"/>
+      </p:ext>
+    </p:extLst>
+  </p:cSld>
+  <p:clrMapOvr>
+    <a:masterClrMapping/>
+  </p:clrMapOvr>
+</p:notes>
+</file>
+
+<file path=ppt/notesSlides/notesSlide11.xml><?xml version="1.0" encoding="utf-8"?>
+<p:notes xmlns:a="http://schemas.openxmlformats.org/drawingml/2006/main" xmlns:r="http://schemas.openxmlformats.org/officeDocument/2006/relationships" xmlns:p="http://schemas.openxmlformats.org/presentationml/2006/main">
+  <p:cSld>
+    <p:spTree>
+      <p:nvGrpSpPr>
+        <p:cNvPr id="1" name=""/>
+        <p:cNvGrpSpPr/>
+        <p:nvPr/>
+      </p:nvGrpSpPr>
+      <p:grpSpPr>
+        <a:xfrm>
+          <a:off x="0" y="0"/>
+          <a:ext cx="0" cy="0"/>
+          <a:chOff x="0" y="0"/>
+          <a:chExt cx="0" cy="0"/>
+        </a:xfrm>
+      </p:grpSpPr>
+      <p:sp>
+        <p:nvSpPr>
+          <p:cNvPr id="2" name="Slide Image Placeholder 1"/>
+          <p:cNvSpPr>
+            <a:spLocks noGrp="1" noRot="1" noChangeAspect="1"/>
+          </p:cNvSpPr>
+          <p:nvPr>
+            <p:ph type="sldImg"/>
+          </p:nvPr>
+        </p:nvSpPr>
+        <p:spPr/>
+      </p:sp>
+      <p:sp>
+        <p:nvSpPr>
+          <p:cNvPr id="3" name="Notes Placeholder 2"/>
+          <p:cNvSpPr>
+            <a:spLocks noGrp="1"/>
+          </p:cNvSpPr>
+          <p:nvPr>
+            <p:ph type="body" idx="1"/>
+          </p:nvPr>
+        </p:nvSpPr>
+        <p:spPr/>
+        <p:txBody>
+          <a:bodyPr/>
+          <a:lstStyle/>
+          <a:p>
+            <a:r>
+              <a:rPr lang="en-US" dirty="0"/>
+              <a:t>Varu: kui küsitakse riskide kohta. Suurim teadmatus on see, kas operaator üldse pakub piisavalt head hinda. Selle saame teada hankepäringuga, enne seda küsime ühelt-kahelt müügijuhilt hinda 1 000 liinile. Teine on vahetajate osakaal: mudel eeldab 45%, OCU kogemus oli umbes 10%. Selle mõõdab registreerumisvorm ja esimene hange. Kolmandaks peab operaator nõustuma meie tasu ja vahendusrolliga. Tele2 üldtingimused keelavad teenuse vahendamise ilma nõusolekuta, seega on see hanke tingimus. Isikutuvastuse lepime kokku SLA-s, tagavara on suunata liige operaatori lehele. Andmekaitse kohta küsime mentorilt ja siis Tuleva juristilt.</a:t>
+            </a:r>
+            <a:endParaRPr lang="en-US" dirty="0"/>
+          </a:p>
+        </p:txBody>
+      </p:sp>
+      <p:sp>
+        <p:nvSpPr>
+          <p:cNvPr id="4" name="Slide Number Placeholder 3"/>
+          <p:cNvSpPr>
+            <a:spLocks noGrp="1"/>
+          </p:cNvSpPr>
+          <p:nvPr>
+            <p:ph type="sldNum" sz="quarter" idx="10"/>
+          </p:nvPr>
+        </p:nvSpPr>
+        <p:spPr/>
+        <p:txBody>
+          <a:bodyPr/>
+          <a:lstStyle/>
+          <a:p>
+            <a:fld id="{F7021451-1387-4CA6-816F-3879F97B5CBC}" type="slidenum">
+              <a:rPr lang="en-US"/>
+              <a:t>11</a:t>
+            </a:fld>
+            <a:endParaRPr lang="en-US"/>
+          </a:p>
+        </p:txBody>
+      </p:sp>
+    </p:spTree>
+    <p:extLst>
+      <p:ext uri="{BB962C8B-B14F-4D97-AF65-F5344CB8AC3E}">
+        <p14:creationId xmlns:p14="http://schemas.microsoft.com/office/powerpoint/2010/main" val="1024086991"/>
+      </p:ext>
+    </p:extLst>
+  </p:cSld>
+  <p:clrMapOvr>
+    <a:masterClrMapping/>
+  </p:clrMapOvr>
+</p:notes>
+</file>
+
+<file path=ppt/notesSlides/notesSlide12.xml><?xml version="1.0" encoding="utf-8"?>
+<p:notes xmlns:a="http://schemas.openxmlformats.org/drawingml/2006/main" xmlns:r="http://schemas.openxmlformats.org/officeDocument/2006/relationships" xmlns:p="http://schemas.openxmlformats.org/presentationml/2006/main">
+  <p:cSld>
+    <p:spTree>
+      <p:nvGrpSpPr>
+        <p:cNvPr id="1" name=""/>
+        <p:cNvGrpSpPr/>
+        <p:nvPr/>
+      </p:nvGrpSpPr>
+      <p:grpSpPr>
+        <a:xfrm>
+          <a:off x="0" y="0"/>
+          <a:ext cx="0" cy="0"/>
+          <a:chOff x="0" y="0"/>
+          <a:chExt cx="0" cy="0"/>
+        </a:xfrm>
+      </p:grpSpPr>
+      <p:sp>
+        <p:nvSpPr>
+          <p:cNvPr id="2" name="Slide Image Placeholder 1"/>
+          <p:cNvSpPr>
+            <a:spLocks noGrp="1" noRot="1" noChangeAspect="1"/>
+          </p:cNvSpPr>
+          <p:nvPr>
+            <p:ph type="sldImg"/>
+          </p:nvPr>
+        </p:nvSpPr>
+        <p:spPr/>
+      </p:sp>
+      <p:sp>
+        <p:nvSpPr>
+          <p:cNvPr id="3" name="Notes Placeholder 2"/>
+          <p:cNvSpPr>
+            <a:spLocks noGrp="1"/>
+          </p:cNvSpPr>
+          <p:nvPr>
+            <p:ph type="body" idx="1"/>
+          </p:nvPr>
+        </p:nvSpPr>
+        <p:spPr/>
+        <p:txBody>
+          <a:bodyPr/>
+          <a:lstStyle/>
+          <a:p>
+            <a:r>
+              <a:rPr lang="en-US" dirty="0"/>
+              <a:t>Varu: lõpukaart, kui aega jääb. Tuleva tegi nähtavaks pensionifondide tasud. Nüüd teeme sama telefoniarvega. Üksi pole sul läbirääkimisjõudu. Tuhandel inimesel on.</a:t>
+            </a:r>
+            <a:endParaRPr lang="en-US" dirty="0"/>
+          </a:p>
+        </p:txBody>
+      </p:sp>
+      <p:sp>
+        <p:nvSpPr>
+          <p:cNvPr id="4" name="Slide Number Placeholder 3"/>
+          <p:cNvSpPr>
+            <a:spLocks noGrp="1"/>
+          </p:cNvSpPr>
+          <p:nvPr>
+            <p:ph type="sldNum" sz="quarter" idx="10"/>
+          </p:nvPr>
+        </p:nvSpPr>
+        <p:spPr/>
+        <p:txBody>
+          <a:bodyPr/>
+          <a:lstStyle/>
+          <a:p>
+            <a:fld id="{F7021451-1387-4CA6-816F-3879F97B5CBC}" type="slidenum">
+              <a:rPr lang="en-US"/>
+              <a:t>12</a:t>
             </a:fld>
             <a:endParaRPr lang="en-US"/>
           </a:p>
@@ -687,7 +865,7 @@
           <a:p>
             <a:r>
               <a:rPr lang="en-US" dirty="0"/>
-              <a:t>0:20–0:45 · Probleem. Sama piiramatu mobiilipakett maksab tavahinnaga 35–44 eurot kuus: Tele2 34,99, Telia 41,65, Elisa 43,99. Soodsama hinna saab see, kes oskab küsida ja seob end kaheks aastaks. Kampaania lõpeb, tavahind jääb. Võrdlusportaal ei aita, sest teenib operaatori vahendustasust. Üksi pole sul läbirääkimisjõudu. Tuhandel inimesel on.</a:t>
+              <a:t>0:15–0:40 · Kelle mure ja kui paljusid puudutab? Tuleva liikmeküsitluses ütles 83% vastanutest, et püsikulud, näiteks side ja elekter, on probleem. Eestis on 1,8 miljonit lepingulist mobiilikasutajat. Sama piiramatu internetiga pakett maksab tavahinnaga 35–44 eurot kuus. Soodsamat hinda saab ainult see, kes kaupleb ja seob end kaheks aastaks. Meie eesmärk on alla 10 euro, ilma sidumiseta. Allikad: liikmeküsitlus 13.04–03.05.2026, 5 014 vastajat; TTJA side aastaraamat 2025. Paketid: Tele2 Piiramatu Eesti, Telia Piiramatu, Elisa Võimas 5G+.</a:t>
             </a:r>
             <a:endParaRPr lang="en-US" dirty="0"/>
           </a:p>
@@ -775,7 +953,7 @@
           <a:p>
             <a:r>
               <a:rPr lang="en-US" dirty="0"/>
-              <a:t>See on Tuleva Kogum. Inimene annab nõusoleku ja e-posti, rohkem mitte midagi: ei paketti, ei hinda, ei isikukoodi. Osaleda saavad kõik, ka ettevõtted. Novembris küsib Tuleva kõigilt operaatoritelt ühe hinna piiramatule paketile. Võidab madalaim. Kui pakkumine on käes, otsustab liige ise ja allkirjastab eeltäidetud lepingu. Number jääb samaks.</a:t>
+              <a:t>0:40–1:45 · Kuidas see töötab ja mida testimine näitas? 65 sekundit. Lülita prototüübile. Tee: 1 → 2 → 3 → 4c → 5 → 11. [1] Kadri annab nõusoleku ja e-posti, rohkem mitte midagi. [„Demo: pakkumised on käes” → 3] Kolme operaatori tavahind ja meie ühishind kõrvuti. 6,50 eurot on sihthind, mitte veel operaatori pakkumine. Tavahinna vastu säästab Kadri kuni 405 eurot aastas, sidumist pole. [„Võtan pakkumise” → 4c] Leping on valmis, Kadri ja operaatori vahel. Kadri allkirjastab ja saadab. Number jääb samaks, 14 päeva saab taganeda. [„Aasta” → 11] Tuleva vaade: 560 lepingut, sääst kuni 227 000 eurot aastas. Testimine näitas: [LISA: mida häkatonil testisite ja mis selgus, nt mitu osalejat registreeruks või kui paljud ei teadnud oma kuutasu]. Varuplaan: kui demo jookseb kokku, jäta see slaid ette, räägi Kadri lugu sõnadega ja jätka slaidiga 4.</a:t>
             </a:r>
             <a:endParaRPr lang="en-US" dirty="0"/>
           </a:p>
@@ -863,7 +1041,7 @@
           <a:p>
             <a:r>
               <a:rPr lang="en-US" dirty="0"/>
-              <a:t>0:45–2:10 · Demo. Lülita prototüübile. Kõne tee: 1 → 2 → 3 → 4 → 4c → 5 → 8 → 11. [1] Kadri annab nõusoleku ja e-posti. [„Jah, soovin osaleda” → 2] Kadri on kirjas ja näeb kontol, mis edasi saab. [„Demo: pakkumised on käes” → 3] Kolme operaatori tavahind ja meie ühishind kõrvuti. Ütlen ausalt: 6,50 eurot on meie sihthind, mitte veel operaatori pakkumine. Tavahinna vastu säästab Kadri hinnanguliselt kuni 405 eurot aastas. Sidumist pole. All on kirjas ka see, mida Tuleva teenib: 1 euro kuus, kõigilt pakkujatelt sama. [„Võtan pakkumise” → 4] Kadri lisab ainult nime, isikukoodi ja numbri. [„Koosta leping” → 4c] Leping on Kadri ja operaatori vahel, Tuleva ei ole pool. Kadri loeb, allkirjastab ja saadab. Number jääb samaks, vana lepingu lõpetab uus operaator, 14 päeva saab taganeda. [„Vaata kogu gruppi” → 8] Tuhat registreerunut, neist 620 pole veel Tuleva kogujad. Operaatorile läheb ainult osalejate arv. [„Aasta” → 11] 560 lepingut, sääst kuni 227 000 eurot aastas. Varuplaan: kui demo jookseb kokku, jätka järgmise kahe slaidiga.</a:t>
+              <a:t>1:45–2:10 · Miks just Tuleva? Esiteks: Tuleva tegi nähtavaks pensionifondide tasud, nüüd teeme sama telefoniarvega. Teiseks: Tuleva on ühistu. Meie tasu on fikseeritud, 1 euro kuus kõigilt operaatoritelt, seega pole meil põhjust kedagi kallima paketi poole lükata. Kolmandaks: 85 745 kogujat usaldavad Tulevat juba oma rahaga. Hange kordub igal aastal ja leping on valmis. Null infomüra, usaldus, järjekindlus. Küsimuseks: Hispaania tarbijaühing OCU tegi mobiilside ühishanget 2014–2015.</a:t>
             </a:r>
             <a:endParaRPr lang="en-US" dirty="0"/>
           </a:p>
@@ -951,7 +1129,7 @@
           <a:p>
             <a:r>
               <a:rPr lang="en-US" dirty="0"/>
-              <a:t>Kui demo töötas, klõpsa siit kiiresti edasi: numbrid olid juba ekraanil. Kui demo ei töötanud, räägi siit. Ütlen ausalt: 6,50 eurot on meie sihthind, mitte veel operaatori pakkumine. Tavahinna vastu säästab liige hinnanguliselt kuni 405 eurot aastas. Sidumist pole. Kui grupp kasvab, langeb hind kõigil, ka varem liitunutel.</a:t>
+              <a:t>2:10–2:35 · Kuidas see end ära tasub? Operaator maksab Tulevale 1 euro kuus lepingu kohta, liikmele on teenus tasuta. Kulud on kaetud, kui lepinguid on umbes 5 750: 5 750 × 1 € × 12 = 69 000 eurot aastas, see on ühe täiskohaga töötaja kulu. Siis säästavad liikmed kuni 2,3 miljonit eurot aastas. Kui hind pole vähemalt 2 eurot alla turu parima, hanget ei toimu. Küsimuseks: Marju baasprognoosis jõuab lepingute arv 5 750-ni umbes 5. aastal ja tulu katab siis 96% kuludest (hinnang, fail 13). Graafik on varuslaidil 8.</a:t>
             </a:r>
             <a:endParaRPr lang="en-US" dirty="0"/>
           </a:p>
@@ -1039,7 +1217,7 @@
           <a:p>
             <a:r>
               <a:rPr lang="en-US" dirty="0"/>
-              <a:t>Kui demo töötas, klõpsa edasi. Muidu: Tuhat registreerunut, neist 620 pole veel Tuleva kogujad. Operaatorile läheb ainult osalejate arv, mitte isikuandmed. Aasta pärast on 560 lepingut ja osalejate sääst on hinnanguliselt kuni 227 000 eurot aastas (560 × 405 €). Kui grupp kasvab 5 000-ni, langeb hind kõigil.</a:t>
+              <a:t>2:35–2:45 · Mobiilside on alles algus. Sama ühist ostujõudu saab kasutada elektris, kindlustuses ja ühistellimustes. Küsimuseks: iga valdkond vajab eraldi analüüsi. Kindlustuses on vaja vahendaja tegevusluba, elektris on sääst pigem õiges paketis kui grupihinnas.</a:t>
             </a:r>
             <a:endParaRPr lang="en-US" dirty="0"/>
           </a:p>
@@ -1127,7 +1305,7 @@
           <a:p>
             <a:r>
               <a:rPr lang="en-US" dirty="0"/>
-              <a:t>2:10–2:40 · Ühishange pole uus: Hispaania tarbijaühing OCU tegi seda mobiilsides juba 2014. Uus on kolm asja. Hange kordub igal aastal, nii et keegi ei pea enam ähvardama. Leping on valmis, inimene ainult allkirjastab. Ja Tuleva tasu on fikseeritud, 1 euro kuus ja kõigilt sama, seega pole meil põhjust kedagi kallima paketi poole lükata. Null infomüra: üks pakkumine, üks number, üks allkiri. Usaldus: liige otsustab ise ja näeb meie tasu enne liitumist. Järjekindlus: sama hange igal sügisel.</a:t>
+              <a:t>2:45–3:00 · Mis on esimene samm ja mida vajame? Avame registreerumise Tuleva kogukonnas ja saadame hankepäringu kõigile operaatoritele. Esimese hanke teeme käsitsi. Selleks vajame Tuleva otsust, ühte inimest ning õigus- ja andmekaitseanalüüsi. Üksi pole sul läbirääkimisjõudu. Tuhandel inimesel on. Jäta see slaid küsimuste ajaks ekraanile.</a:t>
             </a:r>
             <a:endParaRPr lang="en-US" dirty="0"/>
           </a:p>
@@ -1215,7 +1393,7 @@
           <a:p>
             <a:r>
               <a:rPr lang="en-US" dirty="0"/>
-              <a:t>2:40–3:00 · Kui hind ei ole vähemalt 2 eurot alla turu parima, hanget ei toimu ja keegi ei kaota midagi. Operaator maksab Tulevale 1 euro kuus iga lepingu eest, liikmele on teenus tasuta. Esimesel aastal on kulu suurem kui tulu. Umbes 2 900 aktiivset lepingut katab jooksvad kulud, baasprognoosis juhtub see teisel aastal (15. kuul). Kumulatiivselt jõuame nulli 4. aastal ja 5 aastaga on tulemus umbes +37 000 eurot (hinnang, Marju prognoos). Suurem väärtus on 620 uut inimest, kelle esimene kogemus Tulevaga on sääst. Andmed: 1. ja 5. aasta tulu Marju tundlikkuse tabelist (1 €), 3. aasta tulu = 2 × 0,50 € stsenaariumi 27,1k.</a:t>
+              <a:t>Varu: küsimusteks, kui küsitakse tasuvuse kohta. Operaator maksab Tulevale 1 euro kuus lepingu kohta, liikmele on teenus tasuta. Ühe täiskohaga töötaja kulu on umbes 69 000 eurot aastas, selle katmiseks on vaja 5 750 lepingut. Baasprognoosis katab tulu 5. aastal 96% kuludest. Kui hind pole vähemalt 2 eurot alla turu parima, hanget ei toimu. Märkus: Marju prognoos (fail 13) arvestab alates 2. aastast mobiilile 50% töötaja kulust. Siis piisab umbes 2 900 lepingust ja jooksev kulu on kaetud 2. aastal. Slaididel arvestame kogu kulu mobiilile.</a:t>
             </a:r>
             <a:endParaRPr lang="en-US" dirty="0"/>
           </a:p>
@@ -1303,7 +1481,7 @@
           <a:p>
             <a:r>
               <a:rPr lang="en-US" dirty="0"/>
-              <a:t>Tulevik. Mobiilside on alles algus. Sama mudel töötab igal pool, kus inimesed maksavad sama teenuse eest eri hinda: kogume huvilised, küsime kõigilt pakkujatelt ühe hinna ja liige otsustab ise. Järgmisena vaatame elektrit, kindlustust ning uudiste ja muid tellimusi. Eesmärk on kasutada ühist ostujõudu võimalikult paljudes valdkondades. Iga valdkond vajab eraldi analüüsi: näiteks kindlustuses on vaja vahendaja tegevusluba ja elektris on sääst pigem õiges paketis kui grupihinnas.</a:t>
+              <a:t>Varu: kui küsitakse, kust numbrid tulevad. Baasstsenaariumis registreerub 20% Tuleva 9 560 liikmest ja neist 45% vahetab: 860 vahetajat. Iga liige toob keskmiselt 1,8 numbrit, 40% leibkondadest võtab internetti või telepaketti ja lisaks tuleb 143 ettevõtet 4 numbriga. Kokku 2 670 lepingut 1. aasta lõpus. Tuleva saab 1 euro kuus lepingu kohta. Ühe töötaja kulu 69 000 eurot katab 5 750 lepingut. Pessimistlik stsenaarium (10% registreerub, 30% vahetab) ei tasu end ära. Optimistlikus (30% ja 56%) on 1. aasta lõpus 5 450 lepingut. OCU kogemus: vahetas umbes 10% registreerunutest, see on mudeli suurim risk.</a:t>
             </a:r>
             <a:endParaRPr lang="en-US" dirty="0"/>
           </a:p>
@@ -1908,15 +2086,38 @@
           <a:chExt cx="0" cy="0"/>
         </a:xfrm>
       </p:grpSpPr>
-      <p:sp>
-        <p:nvSpPr>
-          <p:cNvPr id="2" name="Shape 0"/>
-          <p:cNvSpPr/>
-          <p:nvPr/>
-        </p:nvSpPr>
-        <p:spPr>
-          <a:xfrm>
-            <a:off x="812800" y="2459980"/>
+      <p:pic>
+        <p:nvPicPr>
+          <p:cNvPr id="2" name="Image 0" descr="Tuleva">    </p:cNvPr>
+          <p:cNvPicPr>
+            <a:picLocks noChangeAspect="1"/>
+          </p:cNvPicPr>
+          <p:nvPr/>
+        </p:nvPicPr>
+        <p:blipFill>
+          <a:blip r:embed="rId1"/>
+          <a:srcRect l="-510" r="-510" t="0" b="0"/>
+          <a:stretch/>
+        </p:blipFill>
+        <p:spPr>
+          <a:xfrm>
+            <a:off x="812800" y="609600"/>
+            <a:ext cx="1390650" cy="622300"/>
+          </a:xfrm>
+          <a:prstGeom prst="rect">
+            <a:avLst/>
+          </a:prstGeom>
+        </p:spPr>
+      </p:pic>
+      <p:sp>
+        <p:nvSpPr>
+          <p:cNvPr id="3" name="Shape 0"/>
+          <p:cNvSpPr/>
+          <p:nvPr/>
+        </p:nvSpPr>
+        <p:spPr>
+          <a:xfrm>
+            <a:off x="812800" y="2278410"/>
             <a:ext cx="762000" cy="50800"/>
           </a:xfrm>
           <a:prstGeom prst="roundRect">
@@ -1932,7 +2133,7 @@
       </p:sp>
       <p:sp>
         <p:nvSpPr>
-          <p:cNvPr id="3" name="Text 1"/>
+          <p:cNvPr id="4" name="Text 1"/>
           <p:cNvSpPr/>
           <p:nvPr>
             <p:ph type="title"/>
@@ -1940,7 +2141,7 @@
         </p:nvSpPr>
         <p:spPr>
           <a:xfrm>
-            <a:off x="812800" y="2713980"/>
+            <a:off x="812800" y="2532410"/>
             <a:ext cx="10883392" cy="1143000"/>
           </a:xfrm>
           <a:prstGeom prst="rect">
@@ -1978,14 +2179,14 @@
       </p:sp>
       <p:sp>
         <p:nvSpPr>
-          <p:cNvPr id="4" name="Text 2"/>
-          <p:cNvSpPr/>
-          <p:nvPr/>
-        </p:nvSpPr>
-        <p:spPr>
-          <a:xfrm>
-            <a:off x="812800" y="4034780"/>
-            <a:ext cx="10883392" cy="388590"/>
+          <p:cNvPr id="5" name="Text 2"/>
+          <p:cNvSpPr/>
+          <p:nvPr/>
+        </p:nvSpPr>
+        <p:spPr>
+          <a:xfrm>
+            <a:off x="812800" y="3853210"/>
+            <a:ext cx="9810750" cy="751780"/>
           </a:xfrm>
           <a:prstGeom prst="rect">
             <a:avLst/>
@@ -2014,7 +2215,7 @@
                 <a:ea typeface="Roboto Flex" pitchFamily="34" charset="-122"/>
                 <a:cs typeface="Roboto Flex" pitchFamily="34" charset="-120"/>
               </a:rPr>
-              <a:t>Mobiilside ühishange</a:t>
+              <a:t>Tuleva küsib kord aastas kõigilt operaatoritelt ühe hinna ja liige vahetab paketi ühe allkirjaga.</a:t>
             </a:r>
             <a:endParaRPr lang="en-US" sz="2200" dirty="0"/>
           </a:p>
@@ -2022,7 +2223,7 @@
       </p:sp>
       <p:sp>
         <p:nvSpPr>
-          <p:cNvPr id="5" name="Text 3"/>
+          <p:cNvPr id="6" name="Text 3"/>
           <p:cNvSpPr/>
           <p:nvPr/>
         </p:nvSpPr>
@@ -2075,6 +2276,2357 @@
 <file path=ppt/slides/slide10.xml><?xml version="1.0" encoding="utf-8"?>
 <p:sld xmlns:a="http://schemas.openxmlformats.org/drawingml/2006/main" xmlns:r="http://schemas.openxmlformats.org/officeDocument/2006/relationships" xmlns:p="http://schemas.openxmlformats.org/presentationml/2006/main">
   <p:cSld name="Slide 10">
+    <p:bg>
+      <p:bgPr>
+        <a:solidFill>
+          <a:srgbClr val="FFFFFF"/>
+        </a:solidFill>
+      </p:bgPr>
+    </p:bg>
+    <p:spTree>
+      <p:nvGrpSpPr>
+        <p:cNvPr id="1" name=""/>
+        <p:cNvGrpSpPr/>
+        <p:nvPr/>
+      </p:nvGrpSpPr>
+      <p:grpSpPr>
+        <a:xfrm>
+          <a:off x="0" y="0"/>
+          <a:ext cx="0" cy="0"/>
+          <a:chOff x="0" y="0"/>
+          <a:chExt cx="0" cy="0"/>
+        </a:xfrm>
+      </p:grpSpPr>
+      <p:sp>
+        <p:nvSpPr>
+          <p:cNvPr id="2" name="Text 0"/>
+          <p:cNvSpPr/>
+          <p:nvPr>
+            <p:ph type="title"/>
+          </p:nvPr>
+        </p:nvSpPr>
+        <p:spPr>
+          <a:xfrm>
+            <a:off x="812800" y="812800"/>
+            <a:ext cx="10883392" cy="574030"/>
+          </a:xfrm>
+          <a:prstGeom prst="rect">
+            <a:avLst/>
+          </a:prstGeom>
+          <a:noFill/>
+          <a:ln/>
+        </p:spPr>
+        <p:txBody>
+          <a:bodyPr wrap="square" lIns="0" tIns="0" rIns="0" bIns="0" rtlCol="0" anchor="t">
+            <a:normAutofit/>
+          </a:bodyPr>
+          <a:lstStyle/>
+          <a:p>
+            <a:pPr algn="l" indent="0" marL="0">
+              <a:lnSpc>
+                <a:spcPts val="4320"/>
+              </a:lnSpc>
+              <a:buNone/>
+            </a:pPr>
+            <a:r>
+              <a:rPr lang="en-US" sz="3600" b="1" i="0" dirty="0">
+                <a:solidFill>
+                  <a:srgbClr val="002F63"/>
+                </a:solidFill>
+                <a:latin typeface="Merriweather" pitchFamily="18" charset="0"/>
+                <a:ea typeface="Merriweather" pitchFamily="18" charset="-122"/>
+                <a:cs typeface="Merriweather" pitchFamily="18" charset="-120"/>
+              </a:rPr>
+              <a:t>Kes on seda teinud</a:t>
+            </a:r>
+            <a:endParaRPr lang="en-US" sz="3600" dirty="0"/>
+          </a:p>
+        </p:txBody>
+      </p:sp>
+      <p:graphicFrame>
+        <p:nvGraphicFramePr>
+          <p:cNvPr id="3" name="Table 0"/>
+          <p:cNvGraphicFramePr>
+            <a:graphicFrameLocks noGrp="1"/>
+          </p:cNvGraphicFramePr>
+          <p:nvPr>
+            <p:extLst>
+              <p:ext uri="{D42A27DB-BD31-4B8C-83A1-F6EECF244321}">
+                <p14:modId xmlns:p14="http://schemas.microsoft.com/office/powerpoint/2010/main" val="1579011935"/>
+              </p:ext>
+            </p:extLst>
+          </p:nvPr>
+        </p:nvGraphicFramePr>
+        <p:xfrm>
+          <a:off x="825500" y="1577330"/>
+          <a:ext cx="10553700" cy="2339280"/>
+        </p:xfrm>
+        <a:graphic>
+          <a:graphicData uri="http://schemas.openxmlformats.org/drawingml/2006/table">
+            <a:tbl>
+              <a:tblPr/>
+              <a:tblGrid>
+                <a:gridCol w="2743962"/>
+                <a:gridCol w="3799332"/>
+                <a:gridCol w="4010406"/>
+              </a:tblGrid>
+              <a:tr h="421630">
+                <a:tc>
+                  <a:txBody>
+                    <a:bodyPr/>
+                    <a:lstStyle/>
+                    <a:p>
+                      <a:pPr indent="0" marL="0">
+                        <a:lnSpc>
+                          <a:spcPts val="1820"/>
+                        </a:lnSpc>
+                        <a:buNone/>
+                      </a:pPr>
+                      <a:r>
+                        <a:rPr lang="en-US" sz="1300" b="1" dirty="0">
+                          <a:solidFill>
+                            <a:srgbClr val="FFFFFF"/>
+                          </a:solidFill>
+                          <a:latin typeface="Roboto Flex" pitchFamily="34" charset="0"/>
+                          <a:ea typeface="Roboto Flex" pitchFamily="34" charset="-122"/>
+                          <a:cs typeface="Roboto Flex" pitchFamily="34" charset="-120"/>
+                        </a:rPr>
+                        <a:t>Kes</a:t>
+                      </a:r>
+                      <a:endParaRPr lang="en-US" sz="1300" dirty="0">
+                        <a:latin typeface="Roboto Flex" charset="0"/>
+                        <a:ea typeface="Roboto Flex" charset="0"/>
+                        <a:cs typeface="Roboto Flex" charset="0"/>
+                      </a:endParaRPr>
+                    </a:p>
+                  </a:txBody>
+                  <a:tcPr marL="127000" marR="127000" marT="88900" marB="88900" anchor="t">
+                    <a:lnL w="12700" cap="flat" cmpd="sng" algn="ctr">
+                      <a:solidFill>
+                        <a:srgbClr val="CBCBCB"/>
+                      </a:solidFill>
+                      <a:prstDash val="solid"/>
+                      <a:round/>
+                      <a:headEnd type="none" w="med" len="med"/>
+                      <a:tailEnd type="none" w="med" len="med"/>
+                    </a:lnL>
+                    <a:lnR w="12700" cap="flat" cmpd="sng" algn="ctr">
+                      <a:solidFill>
+                        <a:srgbClr val="042951"/>
+                      </a:solidFill>
+                      <a:prstDash val="solid"/>
+                      <a:round/>
+                      <a:headEnd type="none" w="med" len="med"/>
+                      <a:tailEnd type="none" w="med" len="med"/>
+                    </a:lnR>
+                    <a:lnT w="12700" cap="flat" cmpd="sng" algn="ctr">
+                      <a:solidFill>
+                        <a:srgbClr val="CBCBCB"/>
+                      </a:solidFill>
+                      <a:prstDash val="solid"/>
+                      <a:round/>
+                      <a:headEnd type="none" w="med" len="med"/>
+                      <a:tailEnd type="none" w="med" len="med"/>
+                    </a:lnT>
+                    <a:lnB w="12700" cap="flat" cmpd="sng" algn="ctr">
+                      <a:solidFill>
+                        <a:srgbClr val="042951"/>
+                      </a:solidFill>
+                      <a:prstDash val="solid"/>
+                      <a:round/>
+                      <a:headEnd type="none" w="med" len="med"/>
+                      <a:tailEnd type="none" w="med" len="med"/>
+                    </a:lnB>
+                    <a:solidFill>
+                      <a:srgbClr val="002F63"/>
+                    </a:solidFill>
+                  </a:tcPr>
+                </a:tc>
+                <a:tc>
+                  <a:txBody>
+                    <a:bodyPr/>
+                    <a:lstStyle/>
+                    <a:p>
+                      <a:pPr indent="0" marL="0">
+                        <a:lnSpc>
+                          <a:spcPts val="1820"/>
+                        </a:lnSpc>
+                        <a:buNone/>
+                      </a:pPr>
+                      <a:r>
+                        <a:rPr lang="en-US" sz="1300" b="1" dirty="0">
+                          <a:solidFill>
+                            <a:srgbClr val="FFFFFF"/>
+                          </a:solidFill>
+                          <a:latin typeface="Roboto Flex" pitchFamily="34" charset="0"/>
+                          <a:ea typeface="Roboto Flex" pitchFamily="34" charset="-122"/>
+                          <a:cs typeface="Roboto Flex" pitchFamily="34" charset="-120"/>
+                        </a:rPr>
+                        <a:t>Mis</a:t>
+                      </a:r>
+                      <a:endParaRPr lang="en-US" sz="1300" dirty="0">
+                        <a:latin typeface="Roboto Flex" charset="0"/>
+                        <a:ea typeface="Roboto Flex" charset="0"/>
+                        <a:cs typeface="Roboto Flex" charset="0"/>
+                      </a:endParaRPr>
+                    </a:p>
+                  </a:txBody>
+                  <a:tcPr marL="127000" marR="127000" marT="88900" marB="88900" anchor="t">
+                    <a:lnL w="12700" cap="flat" cmpd="sng" algn="ctr">
+                      <a:solidFill>
+                        <a:srgbClr val="042951"/>
+                      </a:solidFill>
+                      <a:prstDash val="solid"/>
+                      <a:round/>
+                      <a:headEnd type="none" w="med" len="med"/>
+                      <a:tailEnd type="none" w="med" len="med"/>
+                    </a:lnL>
+                    <a:lnR w="12700" cap="flat" cmpd="sng" algn="ctr">
+                      <a:solidFill>
+                        <a:srgbClr val="042951"/>
+                      </a:solidFill>
+                      <a:prstDash val="solid"/>
+                      <a:round/>
+                      <a:headEnd type="none" w="med" len="med"/>
+                      <a:tailEnd type="none" w="med" len="med"/>
+                    </a:lnR>
+                    <a:lnT w="12700" cap="flat" cmpd="sng" algn="ctr">
+                      <a:solidFill>
+                        <a:srgbClr val="CBCBCB"/>
+                      </a:solidFill>
+                      <a:prstDash val="solid"/>
+                      <a:round/>
+                      <a:headEnd type="none" w="med" len="med"/>
+                      <a:tailEnd type="none" w="med" len="med"/>
+                    </a:lnT>
+                    <a:lnB w="12700" cap="flat" cmpd="sng" algn="ctr">
+                      <a:solidFill>
+                        <a:srgbClr val="042951"/>
+                      </a:solidFill>
+                      <a:prstDash val="solid"/>
+                      <a:round/>
+                      <a:headEnd type="none" w="med" len="med"/>
+                      <a:tailEnd type="none" w="med" len="med"/>
+                    </a:lnB>
+                    <a:solidFill>
+                      <a:srgbClr val="002F63"/>
+                    </a:solidFill>
+                  </a:tcPr>
+                </a:tc>
+                <a:tc>
+                  <a:txBody>
+                    <a:bodyPr/>
+                    <a:lstStyle/>
+                    <a:p>
+                      <a:pPr indent="0" marL="0">
+                        <a:lnSpc>
+                          <a:spcPts val="1820"/>
+                        </a:lnSpc>
+                        <a:buNone/>
+                      </a:pPr>
+                      <a:r>
+                        <a:rPr lang="en-US" sz="1300" b="1" dirty="0">
+                          <a:solidFill>
+                            <a:srgbClr val="FFFFFF"/>
+                          </a:solidFill>
+                          <a:latin typeface="Roboto Flex" pitchFamily="34" charset="0"/>
+                          <a:ea typeface="Roboto Flex" pitchFamily="34" charset="-122"/>
+                          <a:cs typeface="Roboto Flex" pitchFamily="34" charset="-120"/>
+                        </a:rPr>
+                        <a:t>Õppetund</a:t>
+                      </a:r>
+                      <a:endParaRPr lang="en-US" sz="1300" dirty="0">
+                        <a:latin typeface="Roboto Flex" charset="0"/>
+                        <a:ea typeface="Roboto Flex" charset="0"/>
+                        <a:cs typeface="Roboto Flex" charset="0"/>
+                      </a:endParaRPr>
+                    </a:p>
+                  </a:txBody>
+                  <a:tcPr marL="127000" marR="127000" marT="88900" marB="88900" anchor="t">
+                    <a:lnL w="12700" cap="flat" cmpd="sng" algn="ctr">
+                      <a:solidFill>
+                        <a:srgbClr val="042951"/>
+                      </a:solidFill>
+                      <a:prstDash val="solid"/>
+                      <a:round/>
+                      <a:headEnd type="none" w="med" len="med"/>
+                      <a:tailEnd type="none" w="med" len="med"/>
+                    </a:lnL>
+                    <a:lnR w="12700" cap="flat" cmpd="sng" algn="ctr">
+                      <a:solidFill>
+                        <a:srgbClr val="042951"/>
+                      </a:solidFill>
+                      <a:prstDash val="solid"/>
+                      <a:round/>
+                      <a:headEnd type="none" w="med" len="med"/>
+                      <a:tailEnd type="none" w="med" len="med"/>
+                    </a:lnR>
+                    <a:lnT w="12700" cap="flat" cmpd="sng" algn="ctr">
+                      <a:solidFill>
+                        <a:srgbClr val="CBCBCB"/>
+                      </a:solidFill>
+                      <a:prstDash val="solid"/>
+                      <a:round/>
+                      <a:headEnd type="none" w="med" len="med"/>
+                      <a:tailEnd type="none" w="med" len="med"/>
+                    </a:lnT>
+                    <a:lnB w="12700" cap="flat" cmpd="sng" algn="ctr">
+                      <a:solidFill>
+                        <a:srgbClr val="042951"/>
+                      </a:solidFill>
+                      <a:prstDash val="solid"/>
+                      <a:round/>
+                      <a:headEnd type="none" w="med" len="med"/>
+                      <a:tailEnd type="none" w="med" len="med"/>
+                    </a:lnB>
+                    <a:solidFill>
+                      <a:srgbClr val="002F63"/>
+                    </a:solidFill>
+                  </a:tcPr>
+                </a:tc>
+              </a:tr>
+              <a:tr h="652760">
+                <a:tc>
+                  <a:txBody>
+                    <a:bodyPr/>
+                    <a:lstStyle/>
+                    <a:p>
+                      <a:pPr indent="0" marL="0">
+                        <a:lnSpc>
+                          <a:spcPts val="1820"/>
+                        </a:lnSpc>
+                        <a:buNone/>
+                      </a:pPr>
+                      <a:r>
+                        <a:rPr lang="en-US" sz="1300" dirty="0">
+                          <a:solidFill>
+                            <a:srgbClr val="293036"/>
+                          </a:solidFill>
+                          <a:latin typeface="Roboto Flex" pitchFamily="34" charset="0"/>
+                          <a:ea typeface="Roboto Flex" pitchFamily="34" charset="-122"/>
+                          <a:cs typeface="Roboto Flex" pitchFamily="34" charset="-120"/>
+                        </a:rPr>
+                        <a:t>OCU, Hispaania 2014–2018</a:t>
+                      </a:r>
+                      <a:endParaRPr lang="en-US" sz="1300" dirty="0">
+                        <a:latin typeface="Roboto Flex" charset="0"/>
+                        <a:ea typeface="Roboto Flex" charset="0"/>
+                        <a:cs typeface="Roboto Flex" charset="0"/>
+                      </a:endParaRPr>
+                    </a:p>
+                  </a:txBody>
+                  <a:tcPr marL="127000" marR="127000" marT="88900" marB="88900" anchor="t">
+                    <a:lnL w="12700" cap="flat" cmpd="sng" algn="ctr">
+                      <a:solidFill>
+                        <a:srgbClr val="CBCBCB"/>
+                      </a:solidFill>
+                      <a:prstDash val="solid"/>
+                      <a:round/>
+                      <a:headEnd type="none" w="med" len="med"/>
+                      <a:tailEnd type="none" w="med" len="med"/>
+                    </a:lnL>
+                    <a:lnR w="12700" cap="flat" cmpd="sng" algn="ctr">
+                      <a:solidFill>
+                        <a:srgbClr val="CBCBCB"/>
+                      </a:solidFill>
+                      <a:prstDash val="solid"/>
+                      <a:round/>
+                      <a:headEnd type="none" w="med" len="med"/>
+                      <a:tailEnd type="none" w="med" len="med"/>
+                    </a:lnR>
+                    <a:lnT w="12700" cap="flat" cmpd="sng" algn="ctr">
+                      <a:solidFill>
+                        <a:srgbClr val="042951"/>
+                      </a:solidFill>
+                      <a:prstDash val="solid"/>
+                      <a:round/>
+                      <a:headEnd type="none" w="med" len="med"/>
+                      <a:tailEnd type="none" w="med" len="med"/>
+                    </a:lnT>
+                    <a:lnB w="12700" cap="flat" cmpd="sng" algn="ctr">
+                      <a:solidFill>
+                        <a:srgbClr val="CBCBCB"/>
+                      </a:solidFill>
+                      <a:prstDash val="solid"/>
+                      <a:round/>
+                      <a:headEnd type="none" w="med" len="med"/>
+                      <a:tailEnd type="none" w="med" len="med"/>
+                    </a:lnB>
+                  </a:tcPr>
+                </a:tc>
+                <a:tc>
+                  <a:txBody>
+                    <a:bodyPr/>
+                    <a:lstStyle/>
+                    <a:p>
+                      <a:pPr indent="0" marL="0">
+                        <a:lnSpc>
+                          <a:spcPts val="1820"/>
+                        </a:lnSpc>
+                        <a:buNone/>
+                      </a:pPr>
+                      <a:r>
+                        <a:rPr lang="en-US" sz="1300" dirty="0">
+                          <a:solidFill>
+                            <a:srgbClr val="293036"/>
+                          </a:solidFill>
+                          <a:latin typeface="Roboto Flex" pitchFamily="34" charset="0"/>
+                          <a:ea typeface="Roboto Flex" pitchFamily="34" charset="-122"/>
+                          <a:cs typeface="Roboto Flex" pitchFamily="34" charset="-120"/>
+                        </a:rPr>
+                        <a:t>3 mobiilihanget, 92 500 → 17 400 registreerunut</a:t>
+                      </a:r>
+                      <a:endParaRPr lang="en-US" sz="1300" dirty="0">
+                        <a:latin typeface="Roboto Flex" charset="0"/>
+                        <a:ea typeface="Roboto Flex" charset="0"/>
+                        <a:cs typeface="Roboto Flex" charset="0"/>
+                      </a:endParaRPr>
+                    </a:p>
+                  </a:txBody>
+                  <a:tcPr marL="127000" marR="127000" marT="88900" marB="88900" anchor="t">
+                    <a:lnL w="12700" cap="flat" cmpd="sng" algn="ctr">
+                      <a:solidFill>
+                        <a:srgbClr val="CBCBCB"/>
+                      </a:solidFill>
+                      <a:prstDash val="solid"/>
+                      <a:round/>
+                      <a:headEnd type="none" w="med" len="med"/>
+                      <a:tailEnd type="none" w="med" len="med"/>
+                    </a:lnL>
+                    <a:lnR w="12700" cap="flat" cmpd="sng" algn="ctr">
+                      <a:solidFill>
+                        <a:srgbClr val="CBCBCB"/>
+                      </a:solidFill>
+                      <a:prstDash val="solid"/>
+                      <a:round/>
+                      <a:headEnd type="none" w="med" len="med"/>
+                      <a:tailEnd type="none" w="med" len="med"/>
+                    </a:lnR>
+                    <a:lnT w="12700" cap="flat" cmpd="sng" algn="ctr">
+                      <a:solidFill>
+                        <a:srgbClr val="042951"/>
+                      </a:solidFill>
+                      <a:prstDash val="solid"/>
+                      <a:round/>
+                      <a:headEnd type="none" w="med" len="med"/>
+                      <a:tailEnd type="none" w="med" len="med"/>
+                    </a:lnT>
+                    <a:lnB w="12700" cap="flat" cmpd="sng" algn="ctr">
+                      <a:solidFill>
+                        <a:srgbClr val="CBCBCB"/>
+                      </a:solidFill>
+                      <a:prstDash val="solid"/>
+                      <a:round/>
+                      <a:headEnd type="none" w="med" len="med"/>
+                      <a:tailEnd type="none" w="med" len="med"/>
+                    </a:lnB>
+                  </a:tcPr>
+                </a:tc>
+                <a:tc>
+                  <a:txBody>
+                    <a:bodyPr/>
+                    <a:lstStyle/>
+                    <a:p>
+                      <a:pPr indent="0" marL="0">
+                        <a:lnSpc>
+                          <a:spcPts val="1820"/>
+                        </a:lnSpc>
+                        <a:buNone/>
+                      </a:pPr>
+                      <a:r>
+                        <a:rPr lang="en-US" sz="1300" dirty="0">
+                          <a:solidFill>
+                            <a:srgbClr val="293036"/>
+                          </a:solidFill>
+                          <a:latin typeface="Roboto Flex" pitchFamily="34" charset="0"/>
+                          <a:ea typeface="Roboto Flex" pitchFamily="34" charset="-122"/>
+                          <a:cs typeface="Roboto Flex" pitchFamily="34" charset="-120"/>
+                        </a:rPr>
+                        <a:t>Iga kord uus kampaania ja ühekordne tasu, püsivat suhet polnud. Soodustus kahanes 8%-ni</a:t>
+                      </a:r>
+                      <a:endParaRPr lang="en-US" sz="1300" dirty="0">
+                        <a:latin typeface="Roboto Flex" charset="0"/>
+                        <a:ea typeface="Roboto Flex" charset="0"/>
+                        <a:cs typeface="Roboto Flex" charset="0"/>
+                      </a:endParaRPr>
+                    </a:p>
+                  </a:txBody>
+                  <a:tcPr marL="127000" marR="127000" marT="88900" marB="88900" anchor="t">
+                    <a:lnL w="12700" cap="flat" cmpd="sng" algn="ctr">
+                      <a:solidFill>
+                        <a:srgbClr val="CBCBCB"/>
+                      </a:solidFill>
+                      <a:prstDash val="solid"/>
+                      <a:round/>
+                      <a:headEnd type="none" w="med" len="med"/>
+                      <a:tailEnd type="none" w="med" len="med"/>
+                    </a:lnL>
+                    <a:lnR w="12700" cap="flat" cmpd="sng" algn="ctr">
+                      <a:solidFill>
+                        <a:srgbClr val="CBCBCB"/>
+                      </a:solidFill>
+                      <a:prstDash val="solid"/>
+                      <a:round/>
+                      <a:headEnd type="none" w="med" len="med"/>
+                      <a:tailEnd type="none" w="med" len="med"/>
+                    </a:lnR>
+                    <a:lnT w="12700" cap="flat" cmpd="sng" algn="ctr">
+                      <a:solidFill>
+                        <a:srgbClr val="042951"/>
+                      </a:solidFill>
+                      <a:prstDash val="solid"/>
+                      <a:round/>
+                      <a:headEnd type="none" w="med" len="med"/>
+                      <a:tailEnd type="none" w="med" len="med"/>
+                    </a:lnT>
+                    <a:lnB w="12700" cap="flat" cmpd="sng" algn="ctr">
+                      <a:solidFill>
+                        <a:srgbClr val="CBCBCB"/>
+                      </a:solidFill>
+                      <a:prstDash val="solid"/>
+                      <a:round/>
+                      <a:headEnd type="none" w="med" len="med"/>
+                      <a:tailEnd type="none" w="med" len="med"/>
+                    </a:lnB>
+                  </a:tcPr>
+                </a:tc>
+              </a:tr>
+              <a:tr h="421630">
+                <a:tc>
+                  <a:txBody>
+                    <a:bodyPr/>
+                    <a:lstStyle/>
+                    <a:p>
+                      <a:pPr indent="0" marL="0">
+                        <a:lnSpc>
+                          <a:spcPts val="1820"/>
+                        </a:lnSpc>
+                        <a:buNone/>
+                      </a:pPr>
+                      <a:r>
+                        <a:rPr lang="en-US" sz="1300" dirty="0">
+                          <a:solidFill>
+                            <a:srgbClr val="293036"/>
+                          </a:solidFill>
+                          <a:latin typeface="Roboto Flex" pitchFamily="34" charset="0"/>
+                          <a:ea typeface="Roboto Flex" pitchFamily="34" charset="-122"/>
+                          <a:cs typeface="Roboto Flex" pitchFamily="34" charset="-120"/>
+                        </a:rPr>
+                        <a:t>Altroconsumo, Itaalia 2015</a:t>
+                      </a:r>
+                      <a:endParaRPr lang="en-US" sz="1300" dirty="0">
+                        <a:latin typeface="Roboto Flex" charset="0"/>
+                        <a:ea typeface="Roboto Flex" charset="0"/>
+                        <a:cs typeface="Roboto Flex" charset="0"/>
+                      </a:endParaRPr>
+                    </a:p>
+                  </a:txBody>
+                  <a:tcPr marL="127000" marR="127000" marT="88900" marB="88900" anchor="t">
+                    <a:lnL w="12700" cap="flat" cmpd="sng" algn="ctr">
+                      <a:solidFill>
+                        <a:srgbClr val="CBCBCB"/>
+                      </a:solidFill>
+                      <a:prstDash val="solid"/>
+                      <a:round/>
+                      <a:headEnd type="none" w="med" len="med"/>
+                      <a:tailEnd type="none" w="med" len="med"/>
+                    </a:lnL>
+                    <a:lnR w="12700" cap="flat" cmpd="sng" algn="ctr">
+                      <a:solidFill>
+                        <a:srgbClr val="C4C5C6"/>
+                      </a:solidFill>
+                      <a:prstDash val="solid"/>
+                      <a:round/>
+                      <a:headEnd type="none" w="med" len="med"/>
+                      <a:tailEnd type="none" w="med" len="med"/>
+                    </a:lnR>
+                    <a:lnT w="12700" cap="flat" cmpd="sng" algn="ctr">
+                      <a:solidFill>
+                        <a:srgbClr val="CBCBCB"/>
+                      </a:solidFill>
+                      <a:prstDash val="solid"/>
+                      <a:round/>
+                      <a:headEnd type="none" w="med" len="med"/>
+                      <a:tailEnd type="none" w="med" len="med"/>
+                    </a:lnT>
+                    <a:lnB w="12700" cap="flat" cmpd="sng" algn="ctr">
+                      <a:solidFill>
+                        <a:srgbClr val="C4C5C6"/>
+                      </a:solidFill>
+                      <a:prstDash val="solid"/>
+                      <a:round/>
+                      <a:headEnd type="none" w="med" len="med"/>
+                      <a:tailEnd type="none" w="med" len="med"/>
+                    </a:lnB>
+                    <a:solidFill>
+                      <a:srgbClr val="F5F7F9"/>
+                    </a:solidFill>
+                  </a:tcPr>
+                </a:tc>
+                <a:tc>
+                  <a:txBody>
+                    <a:bodyPr/>
+                    <a:lstStyle/>
+                    <a:p>
+                      <a:pPr indent="0" marL="0">
+                        <a:lnSpc>
+                          <a:spcPts val="1820"/>
+                        </a:lnSpc>
+                        <a:buNone/>
+                      </a:pPr>
+                      <a:r>
+                        <a:rPr lang="en-US" sz="1300" dirty="0">
+                          <a:solidFill>
+                            <a:srgbClr val="293036"/>
+                          </a:solidFill>
+                          <a:latin typeface="Roboto Flex" pitchFamily="34" charset="0"/>
+                          <a:ea typeface="Roboto Flex" pitchFamily="34" charset="-122"/>
+                          <a:cs typeface="Roboto Flex" pitchFamily="34" charset="-120"/>
+                        </a:rPr>
+                        <a:t>Mobiilihange, 86 000 osalejat, võitja 9 € kuus</a:t>
+                      </a:r>
+                      <a:endParaRPr lang="en-US" sz="1300" dirty="0">
+                        <a:latin typeface="Roboto Flex" charset="0"/>
+                        <a:ea typeface="Roboto Flex" charset="0"/>
+                        <a:cs typeface="Roboto Flex" charset="0"/>
+                      </a:endParaRPr>
+                    </a:p>
+                  </a:txBody>
+                  <a:tcPr marL="127000" marR="127000" marT="88900" marB="88900" anchor="t">
+                    <a:lnL w="12700" cap="flat" cmpd="sng" algn="ctr">
+                      <a:solidFill>
+                        <a:srgbClr val="C4C5C6"/>
+                      </a:solidFill>
+                      <a:prstDash val="solid"/>
+                      <a:round/>
+                      <a:headEnd type="none" w="med" len="med"/>
+                      <a:tailEnd type="none" w="med" len="med"/>
+                    </a:lnL>
+                    <a:lnR w="12700" cap="flat" cmpd="sng" algn="ctr">
+                      <a:solidFill>
+                        <a:srgbClr val="C4C5C6"/>
+                      </a:solidFill>
+                      <a:prstDash val="solid"/>
+                      <a:round/>
+                      <a:headEnd type="none" w="med" len="med"/>
+                      <a:tailEnd type="none" w="med" len="med"/>
+                    </a:lnR>
+                    <a:lnT w="12700" cap="flat" cmpd="sng" algn="ctr">
+                      <a:solidFill>
+                        <a:srgbClr val="CBCBCB"/>
+                      </a:solidFill>
+                      <a:prstDash val="solid"/>
+                      <a:round/>
+                      <a:headEnd type="none" w="med" len="med"/>
+                      <a:tailEnd type="none" w="med" len="med"/>
+                    </a:lnT>
+                    <a:lnB w="12700" cap="flat" cmpd="sng" algn="ctr">
+                      <a:solidFill>
+                        <a:srgbClr val="C4C5C6"/>
+                      </a:solidFill>
+                      <a:prstDash val="solid"/>
+                      <a:round/>
+                      <a:headEnd type="none" w="med" len="med"/>
+                      <a:tailEnd type="none" w="med" len="med"/>
+                    </a:lnB>
+                    <a:solidFill>
+                      <a:srgbClr val="F5F7F9"/>
+                    </a:solidFill>
+                  </a:tcPr>
+                </a:tc>
+                <a:tc>
+                  <a:txBody>
+                    <a:bodyPr/>
+                    <a:lstStyle/>
+                    <a:p>
+                      <a:pPr indent="0" marL="0">
+                        <a:lnSpc>
+                          <a:spcPts val="1820"/>
+                        </a:lnSpc>
+                        <a:buNone/>
+                      </a:pPr>
+                      <a:r>
+                        <a:rPr lang="en-US" sz="1300" dirty="0">
+                          <a:solidFill>
+                            <a:srgbClr val="293036"/>
+                          </a:solidFill>
+                          <a:latin typeface="Roboto Flex" pitchFamily="34" charset="0"/>
+                          <a:ea typeface="Roboto Flex" pitchFamily="34" charset="-122"/>
+                          <a:cs typeface="Roboto Flex" pitchFamily="34" charset="-120"/>
+                        </a:rPr>
+                        <a:t>Võidab väljakutsuja, mitte turuliider</a:t>
+                      </a:r>
+                      <a:endParaRPr lang="en-US" sz="1300" dirty="0">
+                        <a:latin typeface="Roboto Flex" charset="0"/>
+                        <a:ea typeface="Roboto Flex" charset="0"/>
+                        <a:cs typeface="Roboto Flex" charset="0"/>
+                      </a:endParaRPr>
+                    </a:p>
+                  </a:txBody>
+                  <a:tcPr marL="127000" marR="127000" marT="88900" marB="88900" anchor="t">
+                    <a:lnL w="12700" cap="flat" cmpd="sng" algn="ctr">
+                      <a:solidFill>
+                        <a:srgbClr val="C4C5C6"/>
+                      </a:solidFill>
+                      <a:prstDash val="solid"/>
+                      <a:round/>
+                      <a:headEnd type="none" w="med" len="med"/>
+                      <a:tailEnd type="none" w="med" len="med"/>
+                    </a:lnL>
+                    <a:lnR w="12700" cap="flat" cmpd="sng" algn="ctr">
+                      <a:solidFill>
+                        <a:srgbClr val="C4C5C6"/>
+                      </a:solidFill>
+                      <a:prstDash val="solid"/>
+                      <a:round/>
+                      <a:headEnd type="none" w="med" len="med"/>
+                      <a:tailEnd type="none" w="med" len="med"/>
+                    </a:lnR>
+                    <a:lnT w="12700" cap="flat" cmpd="sng" algn="ctr">
+                      <a:solidFill>
+                        <a:srgbClr val="CBCBCB"/>
+                      </a:solidFill>
+                      <a:prstDash val="solid"/>
+                      <a:round/>
+                      <a:headEnd type="none" w="med" len="med"/>
+                      <a:tailEnd type="none" w="med" len="med"/>
+                    </a:lnT>
+                    <a:lnB w="12700" cap="flat" cmpd="sng" algn="ctr">
+                      <a:solidFill>
+                        <a:srgbClr val="C4C5C6"/>
+                      </a:solidFill>
+                      <a:prstDash val="solid"/>
+                      <a:round/>
+                      <a:headEnd type="none" w="med" len="med"/>
+                      <a:tailEnd type="none" w="med" len="med"/>
+                    </a:lnB>
+                    <a:solidFill>
+                      <a:srgbClr val="F5F7F9"/>
+                    </a:solidFill>
+                  </a:tcPr>
+                </a:tc>
+              </a:tr>
+              <a:tr h="421630">
+                <a:tc>
+                  <a:txBody>
+                    <a:bodyPr/>
+                    <a:lstStyle/>
+                    <a:p>
+                      <a:pPr indent="0" marL="0">
+                        <a:lnSpc>
+                          <a:spcPts val="1820"/>
+                        </a:lnSpc>
+                        <a:buNone/>
+                      </a:pPr>
+                      <a:r>
+                        <a:rPr lang="en-US" sz="1300" dirty="0">
+                          <a:solidFill>
+                            <a:srgbClr val="293036"/>
+                          </a:solidFill>
+                          <a:latin typeface="Roboto Flex" pitchFamily="34" charset="0"/>
+                          <a:ea typeface="Roboto Flex" pitchFamily="34" charset="-122"/>
+                          <a:cs typeface="Roboto Flex" pitchFamily="34" charset="-120"/>
+                        </a:rPr>
+                        <a:t>Which?, Suurbritannia 2012</a:t>
+                      </a:r>
+                      <a:endParaRPr lang="en-US" sz="1300" dirty="0">
+                        <a:latin typeface="Roboto Flex" charset="0"/>
+                        <a:ea typeface="Roboto Flex" charset="0"/>
+                        <a:cs typeface="Roboto Flex" charset="0"/>
+                      </a:endParaRPr>
+                    </a:p>
+                  </a:txBody>
+                  <a:tcPr marL="127000" marR="127000" marT="88900" marB="88900" anchor="t">
+                    <a:lnL w="12700" cap="flat" cmpd="sng" algn="ctr">
+                      <a:solidFill>
+                        <a:srgbClr val="CBCBCB"/>
+                      </a:solidFill>
+                      <a:prstDash val="solid"/>
+                      <a:round/>
+                      <a:headEnd type="none" w="med" len="med"/>
+                      <a:tailEnd type="none" w="med" len="med"/>
+                    </a:lnL>
+                    <a:lnR w="12700" cap="flat" cmpd="sng" algn="ctr">
+                      <a:solidFill>
+                        <a:srgbClr val="CBCBCB"/>
+                      </a:solidFill>
+                      <a:prstDash val="solid"/>
+                      <a:round/>
+                      <a:headEnd type="none" w="med" len="med"/>
+                      <a:tailEnd type="none" w="med" len="med"/>
+                    </a:lnR>
+                    <a:lnT w="12700" cap="flat" cmpd="sng" algn="ctr">
+                      <a:solidFill>
+                        <a:srgbClr val="C4C5C6"/>
+                      </a:solidFill>
+                      <a:prstDash val="solid"/>
+                      <a:round/>
+                      <a:headEnd type="none" w="med" len="med"/>
+                      <a:tailEnd type="none" w="med" len="med"/>
+                    </a:lnT>
+                    <a:lnB w="12700" cap="flat" cmpd="sng" algn="ctr">
+                      <a:solidFill>
+                        <a:srgbClr val="CBCBCB"/>
+                      </a:solidFill>
+                      <a:prstDash val="solid"/>
+                      <a:round/>
+                      <a:headEnd type="none" w="med" len="med"/>
+                      <a:tailEnd type="none" w="med" len="med"/>
+                    </a:lnB>
+                  </a:tcPr>
+                </a:tc>
+                <a:tc>
+                  <a:txBody>
+                    <a:bodyPr/>
+                    <a:lstStyle/>
+                    <a:p>
+                      <a:pPr indent="0" marL="0">
+                        <a:lnSpc>
+                          <a:spcPts val="1820"/>
+                        </a:lnSpc>
+                        <a:buNone/>
+                      </a:pPr>
+                      <a:r>
+                        <a:rPr lang="en-US" sz="1300" dirty="0">
+                          <a:solidFill>
+                            <a:srgbClr val="293036"/>
+                          </a:solidFill>
+                          <a:latin typeface="Roboto Flex" pitchFamily="34" charset="0"/>
+                          <a:ea typeface="Roboto Flex" pitchFamily="34" charset="-122"/>
+                          <a:cs typeface="Roboto Flex" pitchFamily="34" charset="-120"/>
+                        </a:rPr>
+                        <a:t>Energia ühisost, 285 000 registreerunut</a:t>
+                      </a:r>
+                      <a:endParaRPr lang="en-US" sz="1300" dirty="0">
+                        <a:latin typeface="Roboto Flex" charset="0"/>
+                        <a:ea typeface="Roboto Flex" charset="0"/>
+                        <a:cs typeface="Roboto Flex" charset="0"/>
+                      </a:endParaRPr>
+                    </a:p>
+                  </a:txBody>
+                  <a:tcPr marL="127000" marR="127000" marT="88900" marB="88900" anchor="t">
+                    <a:lnL w="12700" cap="flat" cmpd="sng" algn="ctr">
+                      <a:solidFill>
+                        <a:srgbClr val="CBCBCB"/>
+                      </a:solidFill>
+                      <a:prstDash val="solid"/>
+                      <a:round/>
+                      <a:headEnd type="none" w="med" len="med"/>
+                      <a:tailEnd type="none" w="med" len="med"/>
+                    </a:lnL>
+                    <a:lnR w="12700" cap="flat" cmpd="sng" algn="ctr">
+                      <a:solidFill>
+                        <a:srgbClr val="CBCBCB"/>
+                      </a:solidFill>
+                      <a:prstDash val="solid"/>
+                      <a:round/>
+                      <a:headEnd type="none" w="med" len="med"/>
+                      <a:tailEnd type="none" w="med" len="med"/>
+                    </a:lnR>
+                    <a:lnT w="12700" cap="flat" cmpd="sng" algn="ctr">
+                      <a:solidFill>
+                        <a:srgbClr val="C4C5C6"/>
+                      </a:solidFill>
+                      <a:prstDash val="solid"/>
+                      <a:round/>
+                      <a:headEnd type="none" w="med" len="med"/>
+                      <a:tailEnd type="none" w="med" len="med"/>
+                    </a:lnT>
+                    <a:lnB w="12700" cap="flat" cmpd="sng" algn="ctr">
+                      <a:solidFill>
+                        <a:srgbClr val="CBCBCB"/>
+                      </a:solidFill>
+                      <a:prstDash val="solid"/>
+                      <a:round/>
+                      <a:headEnd type="none" w="med" len="med"/>
+                      <a:tailEnd type="none" w="med" len="med"/>
+                    </a:lnB>
+                  </a:tcPr>
+                </a:tc>
+                <a:tc>
+                  <a:txBody>
+                    <a:bodyPr/>
+                    <a:lstStyle/>
+                    <a:p>
+                      <a:pPr indent="0" marL="0">
+                        <a:lnSpc>
+                          <a:spcPts val="1820"/>
+                        </a:lnSpc>
+                        <a:buNone/>
+                      </a:pPr>
+                      <a:r>
+                        <a:rPr lang="en-US" sz="1300" dirty="0">
+                          <a:solidFill>
+                            <a:srgbClr val="293036"/>
+                          </a:solidFill>
+                          <a:latin typeface="Roboto Flex" pitchFamily="34" charset="0"/>
+                          <a:ea typeface="Roboto Flex" pitchFamily="34" charset="-122"/>
+                          <a:cs typeface="Roboto Flex" pitchFamily="34" charset="-120"/>
+                        </a:rPr>
+                        <a:t>Ühisost ei garanteeri turu parimat hinda</a:t>
+                      </a:r>
+                      <a:endParaRPr lang="en-US" sz="1300" dirty="0">
+                        <a:latin typeface="Roboto Flex" charset="0"/>
+                        <a:ea typeface="Roboto Flex" charset="0"/>
+                        <a:cs typeface="Roboto Flex" charset="0"/>
+                      </a:endParaRPr>
+                    </a:p>
+                  </a:txBody>
+                  <a:tcPr marL="127000" marR="127000" marT="88900" marB="88900" anchor="t">
+                    <a:lnL w="12700" cap="flat" cmpd="sng" algn="ctr">
+                      <a:solidFill>
+                        <a:srgbClr val="CBCBCB"/>
+                      </a:solidFill>
+                      <a:prstDash val="solid"/>
+                      <a:round/>
+                      <a:headEnd type="none" w="med" len="med"/>
+                      <a:tailEnd type="none" w="med" len="med"/>
+                    </a:lnL>
+                    <a:lnR w="12700" cap="flat" cmpd="sng" algn="ctr">
+                      <a:solidFill>
+                        <a:srgbClr val="CBCBCB"/>
+                      </a:solidFill>
+                      <a:prstDash val="solid"/>
+                      <a:round/>
+                      <a:headEnd type="none" w="med" len="med"/>
+                      <a:tailEnd type="none" w="med" len="med"/>
+                    </a:lnR>
+                    <a:lnT w="12700" cap="flat" cmpd="sng" algn="ctr">
+                      <a:solidFill>
+                        <a:srgbClr val="C4C5C6"/>
+                      </a:solidFill>
+                      <a:prstDash val="solid"/>
+                      <a:round/>
+                      <a:headEnd type="none" w="med" len="med"/>
+                      <a:tailEnd type="none" w="med" len="med"/>
+                    </a:lnT>
+                    <a:lnB w="12700" cap="flat" cmpd="sng" algn="ctr">
+                      <a:solidFill>
+                        <a:srgbClr val="CBCBCB"/>
+                      </a:solidFill>
+                      <a:prstDash val="solid"/>
+                      <a:round/>
+                      <a:headEnd type="none" w="med" len="med"/>
+                      <a:tailEnd type="none" w="med" len="med"/>
+                    </a:lnB>
+                  </a:tcPr>
+                </a:tc>
+              </a:tr>
+              <a:tr h="421630">
+                <a:tc>
+                  <a:txBody>
+                    <a:bodyPr/>
+                    <a:lstStyle/>
+                    <a:p>
+                      <a:pPr indent="0" marL="0">
+                        <a:lnSpc>
+                          <a:spcPts val="1820"/>
+                        </a:lnSpc>
+                        <a:buNone/>
+                      </a:pPr>
+                      <a:r>
+                        <a:rPr lang="en-US" sz="1300" dirty="0">
+                          <a:solidFill>
+                            <a:srgbClr val="293036"/>
+                          </a:solidFill>
+                          <a:latin typeface="Roboto Flex" pitchFamily="34" charset="0"/>
+                          <a:ea typeface="Roboto Flex" pitchFamily="34" charset="-122"/>
+                          <a:cs typeface="Roboto Flex" pitchFamily="34" charset="-120"/>
+                        </a:rPr>
+                        <a:t>Eestis täna</a:t>
+                      </a:r>
+                      <a:endParaRPr lang="en-US" sz="1300" dirty="0">
+                        <a:latin typeface="Roboto Flex" charset="0"/>
+                        <a:ea typeface="Roboto Flex" charset="0"/>
+                        <a:cs typeface="Roboto Flex" charset="0"/>
+                      </a:endParaRPr>
+                    </a:p>
+                  </a:txBody>
+                  <a:tcPr marL="127000" marR="127000" marT="88900" marB="88900" anchor="t">
+                    <a:lnL w="12700" cap="flat" cmpd="sng" algn="ctr">
+                      <a:solidFill>
+                        <a:srgbClr val="CBCBCB"/>
+                      </a:solidFill>
+                      <a:prstDash val="solid"/>
+                      <a:round/>
+                      <a:headEnd type="none" w="med" len="med"/>
+                      <a:tailEnd type="none" w="med" len="med"/>
+                    </a:lnL>
+                    <a:lnR w="12700" cap="flat" cmpd="sng" algn="ctr">
+                      <a:solidFill>
+                        <a:srgbClr val="C4C5C6"/>
+                      </a:solidFill>
+                      <a:prstDash val="solid"/>
+                      <a:round/>
+                      <a:headEnd type="none" w="med" len="med"/>
+                      <a:tailEnd type="none" w="med" len="med"/>
+                    </a:lnR>
+                    <a:lnT w="12700" cap="flat" cmpd="sng" algn="ctr">
+                      <a:solidFill>
+                        <a:srgbClr val="CBCBCB"/>
+                      </a:solidFill>
+                      <a:prstDash val="solid"/>
+                      <a:round/>
+                      <a:headEnd type="none" w="med" len="med"/>
+                      <a:tailEnd type="none" w="med" len="med"/>
+                    </a:lnT>
+                    <a:lnB w="12700" cap="flat" cmpd="sng" algn="ctr">
+                      <a:solidFill>
+                        <a:srgbClr val="C4C5C6"/>
+                      </a:solidFill>
+                      <a:prstDash val="solid"/>
+                      <a:round/>
+                      <a:headEnd type="none" w="med" len="med"/>
+                      <a:tailEnd type="none" w="med" len="med"/>
+                    </a:lnB>
+                    <a:solidFill>
+                      <a:srgbClr val="F5F7F9"/>
+                    </a:solidFill>
+                  </a:tcPr>
+                </a:tc>
+                <a:tc>
+                  <a:txBody>
+                    <a:bodyPr/>
+                    <a:lstStyle/>
+                    <a:p>
+                      <a:pPr indent="0" marL="0">
+                        <a:lnSpc>
+                          <a:spcPts val="1820"/>
+                        </a:lnSpc>
+                        <a:buNone/>
+                      </a:pPr>
+                      <a:r>
+                        <a:rPr lang="en-US" sz="1300" dirty="0">
+                          <a:solidFill>
+                            <a:srgbClr val="293036"/>
+                          </a:solidFill>
+                          <a:latin typeface="Roboto Flex" pitchFamily="34" charset="0"/>
+                          <a:ea typeface="Roboto Flex" pitchFamily="34" charset="-122"/>
+                          <a:cs typeface="Roboto Flex" pitchFamily="34" charset="-120"/>
+                        </a:rPr>
+                        <a:t>Operaatorite kampaaniad ja klubid</a:t>
+                      </a:r>
+                      <a:endParaRPr lang="en-US" sz="1300" dirty="0">
+                        <a:latin typeface="Roboto Flex" charset="0"/>
+                        <a:ea typeface="Roboto Flex" charset="0"/>
+                        <a:cs typeface="Roboto Flex" charset="0"/>
+                      </a:endParaRPr>
+                    </a:p>
+                  </a:txBody>
+                  <a:tcPr marL="127000" marR="127000" marT="88900" marB="88900" anchor="t">
+                    <a:lnL w="12700" cap="flat" cmpd="sng" algn="ctr">
+                      <a:solidFill>
+                        <a:srgbClr val="C4C5C6"/>
+                      </a:solidFill>
+                      <a:prstDash val="solid"/>
+                      <a:round/>
+                      <a:headEnd type="none" w="med" len="med"/>
+                      <a:tailEnd type="none" w="med" len="med"/>
+                    </a:lnL>
+                    <a:lnR w="12700" cap="flat" cmpd="sng" algn="ctr">
+                      <a:solidFill>
+                        <a:srgbClr val="C4C5C6"/>
+                      </a:solidFill>
+                      <a:prstDash val="solid"/>
+                      <a:round/>
+                      <a:headEnd type="none" w="med" len="med"/>
+                      <a:tailEnd type="none" w="med" len="med"/>
+                    </a:lnR>
+                    <a:lnT w="12700" cap="flat" cmpd="sng" algn="ctr">
+                      <a:solidFill>
+                        <a:srgbClr val="CBCBCB"/>
+                      </a:solidFill>
+                      <a:prstDash val="solid"/>
+                      <a:round/>
+                      <a:headEnd type="none" w="med" len="med"/>
+                      <a:tailEnd type="none" w="med" len="med"/>
+                    </a:lnT>
+                    <a:lnB w="12700" cap="flat" cmpd="sng" algn="ctr">
+                      <a:solidFill>
+                        <a:srgbClr val="C4C5C6"/>
+                      </a:solidFill>
+                      <a:prstDash val="solid"/>
+                      <a:round/>
+                      <a:headEnd type="none" w="med" len="med"/>
+                      <a:tailEnd type="none" w="med" len="med"/>
+                    </a:lnB>
+                    <a:solidFill>
+                      <a:srgbClr val="F5F7F9"/>
+                    </a:solidFill>
+                  </a:tcPr>
+                </a:tc>
+                <a:tc>
+                  <a:txBody>
+                    <a:bodyPr/>
+                    <a:lstStyle/>
+                    <a:p>
+                      <a:pPr indent="0" marL="0">
+                        <a:lnSpc>
+                          <a:spcPts val="1820"/>
+                        </a:lnSpc>
+                        <a:buNone/>
+                      </a:pPr>
+                      <a:r>
+                        <a:rPr lang="en-US" sz="1300" dirty="0">
+                          <a:solidFill>
+                            <a:srgbClr val="293036"/>
+                          </a:solidFill>
+                          <a:latin typeface="Roboto Flex" pitchFamily="34" charset="0"/>
+                          <a:ea typeface="Roboto Flex" pitchFamily="34" charset="-122"/>
+                          <a:cs typeface="Roboto Flex" pitchFamily="34" charset="-120"/>
+                        </a:rPr>
+                        <a:t>Soodushind seob 24 kuuks, siis tuleb tavahind</a:t>
+                      </a:r>
+                      <a:endParaRPr lang="en-US" sz="1300" dirty="0">
+                        <a:latin typeface="Roboto Flex" charset="0"/>
+                        <a:ea typeface="Roboto Flex" charset="0"/>
+                        <a:cs typeface="Roboto Flex" charset="0"/>
+                      </a:endParaRPr>
+                    </a:p>
+                  </a:txBody>
+                  <a:tcPr marL="127000" marR="127000" marT="88900" marB="88900" anchor="t">
+                    <a:lnL w="12700" cap="flat" cmpd="sng" algn="ctr">
+                      <a:solidFill>
+                        <a:srgbClr val="C4C5C6"/>
+                      </a:solidFill>
+                      <a:prstDash val="solid"/>
+                      <a:round/>
+                      <a:headEnd type="none" w="med" len="med"/>
+                      <a:tailEnd type="none" w="med" len="med"/>
+                    </a:lnL>
+                    <a:lnR w="12700" cap="flat" cmpd="sng" algn="ctr">
+                      <a:solidFill>
+                        <a:srgbClr val="C4C5C6"/>
+                      </a:solidFill>
+                      <a:prstDash val="solid"/>
+                      <a:round/>
+                      <a:headEnd type="none" w="med" len="med"/>
+                      <a:tailEnd type="none" w="med" len="med"/>
+                    </a:lnR>
+                    <a:lnT w="12700" cap="flat" cmpd="sng" algn="ctr">
+                      <a:solidFill>
+                        <a:srgbClr val="CBCBCB"/>
+                      </a:solidFill>
+                      <a:prstDash val="solid"/>
+                      <a:round/>
+                      <a:headEnd type="none" w="med" len="med"/>
+                      <a:tailEnd type="none" w="med" len="med"/>
+                    </a:lnT>
+                    <a:lnB w="12700" cap="flat" cmpd="sng" algn="ctr">
+                      <a:solidFill>
+                        <a:srgbClr val="C4C5C6"/>
+                      </a:solidFill>
+                      <a:prstDash val="solid"/>
+                      <a:round/>
+                      <a:headEnd type="none" w="med" len="med"/>
+                      <a:tailEnd type="none" w="med" len="med"/>
+                    </a:lnB>
+                    <a:solidFill>
+                      <a:srgbClr val="F5F7F9"/>
+                    </a:solidFill>
+                  </a:tcPr>
+                </a:tc>
+              </a:tr>
+            </a:tbl>
+          </a:graphicData>
+        </a:graphic>
+      </p:graphicFrame>
+      <p:sp>
+        <p:nvSpPr>
+          <p:cNvPr id="4" name="Text 1"/>
+          <p:cNvSpPr/>
+          <p:nvPr/>
+        </p:nvSpPr>
+        <p:spPr>
+          <a:xfrm>
+            <a:off x="812800" y="5557540"/>
+            <a:ext cx="10883392" cy="309860"/>
+          </a:xfrm>
+          <a:prstGeom prst="rect">
+            <a:avLst/>
+          </a:prstGeom>
+          <a:noFill/>
+          <a:ln/>
+        </p:spPr>
+        <p:txBody>
+          <a:bodyPr wrap="square" lIns="0" tIns="0" rIns="0" bIns="0" rtlCol="0" anchor="t">
+            <a:normAutofit/>
+          </a:bodyPr>
+          <a:lstStyle/>
+          <a:p>
+            <a:pPr algn="l" indent="0" marL="0">
+              <a:lnSpc>
+                <a:spcPts val="2240"/>
+              </a:lnSpc>
+              <a:buNone/>
+            </a:pPr>
+            <a:r>
+              <a:rPr lang="en-US" sz="1600" b="1" dirty="0">
+                <a:solidFill>
+                  <a:srgbClr val="002F63"/>
+                </a:solidFill>
+                <a:latin typeface="Roboto Flex" pitchFamily="34" charset="0"/>
+                <a:ea typeface="Roboto Flex" pitchFamily="34" charset="-122"/>
+                <a:cs typeface="Roboto Flex" pitchFamily="34" charset="-120"/>
+              </a:rPr>
+              <a:t>Meie vastus:</a:t>
+            </a:r>
+            <a:r>
+              <a:rPr lang="en-US" sz="1600" dirty="0">
+                <a:solidFill>
+                  <a:srgbClr val="002F63"/>
+                </a:solidFill>
+                <a:latin typeface="Roboto Flex" pitchFamily="34" charset="0"/>
+                <a:ea typeface="Roboto Flex" pitchFamily="34" charset="-122"/>
+                <a:cs typeface="Roboto Flex" pitchFamily="34" charset="-120"/>
+              </a:rPr>
+              <a:t> püsiv konto ja igakuine tasu · tasu avalik, kõigile sama · avaldame vahetajate arvu</a:t>
+            </a:r>
+            <a:endParaRPr lang="en-US" sz="1600" dirty="0"/>
+          </a:p>
+        </p:txBody>
+      </p:sp>
+      <p:sp>
+        <p:nvSpPr>
+          <p:cNvPr id="5" name="Text 2"/>
+          <p:cNvSpPr/>
+          <p:nvPr/>
+        </p:nvSpPr>
+        <p:spPr>
+          <a:xfrm>
+            <a:off x="812800" y="6238280"/>
+            <a:ext cx="7716679" cy="238720"/>
+          </a:xfrm>
+          <a:prstGeom prst="rect">
+            <a:avLst/>
+          </a:prstGeom>
+          <a:noFill/>
+          <a:ln/>
+        </p:spPr>
+        <p:txBody>
+          <a:bodyPr wrap="square" lIns="0" tIns="0" rIns="0" bIns="0" rtlCol="0" anchor="t">
+            <a:normAutofit/>
+          </a:bodyPr>
+          <a:lstStyle/>
+          <a:p>
+            <a:pPr algn="l" indent="0" marL="0">
+              <a:lnSpc>
+                <a:spcPts val="1680"/>
+              </a:lnSpc>
+              <a:buNone/>
+            </a:pPr>
+            <a:r>
+              <a:rPr lang="en-US" sz="1200" dirty="0">
+                <a:solidFill>
+                  <a:srgbClr val="6B7074"/>
+                </a:solidFill>
+                <a:latin typeface="Roboto Flex" pitchFamily="34" charset="0"/>
+                <a:ea typeface="Roboto Flex" pitchFamily="34" charset="-122"/>
+                <a:cs typeface="Roboto Flex" pitchFamily="34" charset="-120"/>
+              </a:rPr>
+              <a:t>OCU 2014–2018, iPhoneItalia 23.04.2015, MoneySavingExpert 05.2012 · detailid docs/18 ja docs/03</a:t>
+            </a:r>
+            <a:endParaRPr lang="en-US" sz="1200" dirty="0"/>
+          </a:p>
+        </p:txBody>
+      </p:sp>
+      <p:sp>
+        <p:nvSpPr>
+          <p:cNvPr id="6" name="Text 3"/>
+          <p:cNvSpPr/>
+          <p:nvPr/>
+        </p:nvSpPr>
+        <p:spPr>
+          <a:xfrm>
+            <a:off x="11164838" y="6238280"/>
+            <a:ext cx="214362" cy="238720"/>
+          </a:xfrm>
+          <a:prstGeom prst="rect">
+            <a:avLst/>
+          </a:prstGeom>
+          <a:noFill/>
+          <a:ln/>
+        </p:spPr>
+        <p:txBody>
+          <a:bodyPr wrap="square" lIns="0" tIns="0" rIns="0" bIns="0" rtlCol="0" anchor="t">
+            <a:normAutofit/>
+          </a:bodyPr>
+          <a:lstStyle/>
+          <a:p>
+            <a:pPr algn="r" indent="0" marL="0">
+              <a:lnSpc>
+                <a:spcPts val="1680"/>
+              </a:lnSpc>
+              <a:buNone/>
+            </a:pPr>
+            <a:r>
+              <a:rPr lang="en-US" sz="1200" dirty="0">
+                <a:solidFill>
+                  <a:srgbClr val="6B7074"/>
+                </a:solidFill>
+                <a:latin typeface="Roboto Flex" pitchFamily="34" charset="0"/>
+                <a:ea typeface="Roboto Flex" pitchFamily="34" charset="-122"/>
+                <a:cs typeface="Roboto Flex" pitchFamily="34" charset="-120"/>
+              </a:rPr>
+              <a:t>10</a:t>
+            </a:r>
+            <a:endParaRPr lang="en-US" sz="1200" dirty="0"/>
+          </a:p>
+        </p:txBody>
+      </p:sp>
+    </p:spTree>
+  </p:cSld>
+  <p:clrMapOvr>
+    <a:masterClrMapping/>
+  </p:clrMapOvr>
+</p:sld>
+</file>
+
+<file path=ppt/slides/slide11.xml><?xml version="1.0" encoding="utf-8"?>
+<p:sld xmlns:a="http://schemas.openxmlformats.org/drawingml/2006/main" xmlns:r="http://schemas.openxmlformats.org/officeDocument/2006/relationships" xmlns:p="http://schemas.openxmlformats.org/presentationml/2006/main">
+  <p:cSld name="Slide 11">
+    <p:bg>
+      <p:bgPr>
+        <a:solidFill>
+          <a:srgbClr val="FFFFFF"/>
+        </a:solidFill>
+      </p:bgPr>
+    </p:bg>
+    <p:spTree>
+      <p:nvGrpSpPr>
+        <p:cNvPr id="1" name=""/>
+        <p:cNvGrpSpPr/>
+        <p:nvPr/>
+      </p:nvGrpSpPr>
+      <p:grpSpPr>
+        <a:xfrm>
+          <a:off x="0" y="0"/>
+          <a:ext cx="0" cy="0"/>
+          <a:chOff x="0" y="0"/>
+          <a:chExt cx="0" cy="0"/>
+        </a:xfrm>
+      </p:grpSpPr>
+      <p:sp>
+        <p:nvSpPr>
+          <p:cNvPr id="2" name="Text 0"/>
+          <p:cNvSpPr/>
+          <p:nvPr>
+            <p:ph type="title"/>
+          </p:nvPr>
+        </p:nvSpPr>
+        <p:spPr>
+          <a:xfrm>
+            <a:off x="812800" y="812800"/>
+            <a:ext cx="10883392" cy="574030"/>
+          </a:xfrm>
+          <a:prstGeom prst="rect">
+            <a:avLst/>
+          </a:prstGeom>
+          <a:noFill/>
+          <a:ln/>
+        </p:spPr>
+        <p:txBody>
+          <a:bodyPr wrap="square" lIns="0" tIns="0" rIns="0" bIns="0" rtlCol="0" anchor="t">
+            <a:normAutofit/>
+          </a:bodyPr>
+          <a:lstStyle/>
+          <a:p>
+            <a:pPr algn="l" indent="0" marL="0">
+              <a:lnSpc>
+                <a:spcPts val="4320"/>
+              </a:lnSpc>
+              <a:buNone/>
+            </a:pPr>
+            <a:r>
+              <a:rPr lang="en-US" sz="3600" b="1" i="0" dirty="0">
+                <a:solidFill>
+                  <a:srgbClr val="002F63"/>
+                </a:solidFill>
+                <a:latin typeface="Merriweather" pitchFamily="18" charset="0"/>
+                <a:ea typeface="Merriweather" pitchFamily="18" charset="-122"/>
+                <a:cs typeface="Merriweather" pitchFamily="18" charset="-120"/>
+              </a:rPr>
+              <a:t>Mida me veel ei tea</a:t>
+            </a:r>
+            <a:endParaRPr lang="en-US" sz="3600" dirty="0"/>
+          </a:p>
+        </p:txBody>
+      </p:sp>
+      <p:graphicFrame>
+        <p:nvGraphicFramePr>
+          <p:cNvPr id="3" name="Table 0"/>
+          <p:cNvGraphicFramePr>
+            <a:graphicFrameLocks noGrp="1"/>
+          </p:cNvGraphicFramePr>
+          <p:nvPr>
+            <p:extLst>
+              <p:ext uri="{D42A27DB-BD31-4B8C-83A1-F6EECF244321}">
+                <p14:modId xmlns:p14="http://schemas.microsoft.com/office/powerpoint/2010/main" val="1579011935"/>
+              </p:ext>
+            </p:extLst>
+          </p:nvPr>
+        </p:nvGraphicFramePr>
+        <p:xfrm>
+          <a:off x="825500" y="1577330"/>
+          <a:ext cx="10553700" cy="2760911"/>
+        </p:xfrm>
+        <a:graphic>
+          <a:graphicData uri="http://schemas.openxmlformats.org/drawingml/2006/table">
+            <a:tbl>
+              <a:tblPr/>
+              <a:tblGrid>
+                <a:gridCol w="5487924"/>
+                <a:gridCol w="5065776"/>
+              </a:tblGrid>
+              <a:tr h="421630">
+                <a:tc>
+                  <a:txBody>
+                    <a:bodyPr/>
+                    <a:lstStyle/>
+                    <a:p>
+                      <a:pPr indent="0" marL="0">
+                        <a:lnSpc>
+                          <a:spcPts val="1820"/>
+                        </a:lnSpc>
+                        <a:buNone/>
+                      </a:pPr>
+                      <a:r>
+                        <a:rPr lang="en-US" sz="1300" b="1" dirty="0">
+                          <a:solidFill>
+                            <a:srgbClr val="FFFFFF"/>
+                          </a:solidFill>
+                          <a:latin typeface="Roboto Flex" pitchFamily="34" charset="0"/>
+                          <a:ea typeface="Roboto Flex" pitchFamily="34" charset="-122"/>
+                          <a:cs typeface="Roboto Flex" pitchFamily="34" charset="-120"/>
+                        </a:rPr>
+                        <a:t>Teadmatus</a:t>
+                      </a:r>
+                      <a:endParaRPr lang="en-US" sz="1300" dirty="0">
+                        <a:latin typeface="Roboto Flex" charset="0"/>
+                        <a:ea typeface="Roboto Flex" charset="0"/>
+                        <a:cs typeface="Roboto Flex" charset="0"/>
+                      </a:endParaRPr>
+                    </a:p>
+                  </a:txBody>
+                  <a:tcPr marL="127000" marR="127000" marT="88900" marB="88900" anchor="t">
+                    <a:lnL w="12700" cap="flat" cmpd="sng" algn="ctr">
+                      <a:solidFill>
+                        <a:srgbClr val="CBCBCB"/>
+                      </a:solidFill>
+                      <a:prstDash val="solid"/>
+                      <a:round/>
+                      <a:headEnd type="none" w="med" len="med"/>
+                      <a:tailEnd type="none" w="med" len="med"/>
+                    </a:lnL>
+                    <a:lnR w="12700" cap="flat" cmpd="sng" algn="ctr">
+                      <a:solidFill>
+                        <a:srgbClr val="042951"/>
+                      </a:solidFill>
+                      <a:prstDash val="solid"/>
+                      <a:round/>
+                      <a:headEnd type="none" w="med" len="med"/>
+                      <a:tailEnd type="none" w="med" len="med"/>
+                    </a:lnR>
+                    <a:lnT w="12700" cap="flat" cmpd="sng" algn="ctr">
+                      <a:solidFill>
+                        <a:srgbClr val="CBCBCB"/>
+                      </a:solidFill>
+                      <a:prstDash val="solid"/>
+                      <a:round/>
+                      <a:headEnd type="none" w="med" len="med"/>
+                      <a:tailEnd type="none" w="med" len="med"/>
+                    </a:lnT>
+                    <a:lnB w="12700" cap="flat" cmpd="sng" algn="ctr">
+                      <a:solidFill>
+                        <a:srgbClr val="042951"/>
+                      </a:solidFill>
+                      <a:prstDash val="solid"/>
+                      <a:round/>
+                      <a:headEnd type="none" w="med" len="med"/>
+                      <a:tailEnd type="none" w="med" len="med"/>
+                    </a:lnB>
+                    <a:solidFill>
+                      <a:srgbClr val="002F63"/>
+                    </a:solidFill>
+                  </a:tcPr>
+                </a:tc>
+                <a:tc>
+                  <a:txBody>
+                    <a:bodyPr/>
+                    <a:lstStyle/>
+                    <a:p>
+                      <a:pPr indent="0" marL="0">
+                        <a:lnSpc>
+                          <a:spcPts val="1820"/>
+                        </a:lnSpc>
+                        <a:buNone/>
+                      </a:pPr>
+                      <a:r>
+                        <a:rPr lang="en-US" sz="1300" b="1" dirty="0">
+                          <a:solidFill>
+                            <a:srgbClr val="FFFFFF"/>
+                          </a:solidFill>
+                          <a:latin typeface="Roboto Flex" pitchFamily="34" charset="0"/>
+                          <a:ea typeface="Roboto Flex" pitchFamily="34" charset="-122"/>
+                          <a:cs typeface="Roboto Flex" pitchFamily="34" charset="-120"/>
+                        </a:rPr>
+                        <a:t>Kuidas teada saame</a:t>
+                      </a:r>
+                      <a:endParaRPr lang="en-US" sz="1300" dirty="0">
+                        <a:latin typeface="Roboto Flex" charset="0"/>
+                        <a:ea typeface="Roboto Flex" charset="0"/>
+                        <a:cs typeface="Roboto Flex" charset="0"/>
+                      </a:endParaRPr>
+                    </a:p>
+                  </a:txBody>
+                  <a:tcPr marL="127000" marR="127000" marT="88900" marB="88900" anchor="t">
+                    <a:lnL w="12700" cap="flat" cmpd="sng" algn="ctr">
+                      <a:solidFill>
+                        <a:srgbClr val="042951"/>
+                      </a:solidFill>
+                      <a:prstDash val="solid"/>
+                      <a:round/>
+                      <a:headEnd type="none" w="med" len="med"/>
+                      <a:tailEnd type="none" w="med" len="med"/>
+                    </a:lnL>
+                    <a:lnR w="12700" cap="flat" cmpd="sng" algn="ctr">
+                      <a:solidFill>
+                        <a:srgbClr val="042951"/>
+                      </a:solidFill>
+                      <a:prstDash val="solid"/>
+                      <a:round/>
+                      <a:headEnd type="none" w="med" len="med"/>
+                      <a:tailEnd type="none" w="med" len="med"/>
+                    </a:lnR>
+                    <a:lnT w="12700" cap="flat" cmpd="sng" algn="ctr">
+                      <a:solidFill>
+                        <a:srgbClr val="CBCBCB"/>
+                      </a:solidFill>
+                      <a:prstDash val="solid"/>
+                      <a:round/>
+                      <a:headEnd type="none" w="med" len="med"/>
+                      <a:tailEnd type="none" w="med" len="med"/>
+                    </a:lnT>
+                    <a:lnB w="12700" cap="flat" cmpd="sng" algn="ctr">
+                      <a:solidFill>
+                        <a:srgbClr val="042951"/>
+                      </a:solidFill>
+                      <a:prstDash val="solid"/>
+                      <a:round/>
+                      <a:headEnd type="none" w="med" len="med"/>
+                      <a:tailEnd type="none" w="med" len="med"/>
+                    </a:lnB>
+                    <a:solidFill>
+                      <a:srgbClr val="002F63"/>
+                    </a:solidFill>
+                  </a:tcPr>
+                </a:tc>
+              </a:tr>
+              <a:tr h="652760">
+                <a:tc>
+                  <a:txBody>
+                    <a:bodyPr/>
+                    <a:lstStyle/>
+                    <a:p>
+                      <a:pPr indent="0" marL="0">
+                        <a:lnSpc>
+                          <a:spcPts val="1820"/>
+                        </a:lnSpc>
+                        <a:buNone/>
+                      </a:pPr>
+                      <a:r>
+                        <a:rPr lang="en-US" sz="1300" dirty="0">
+                          <a:solidFill>
+                            <a:srgbClr val="293036"/>
+                          </a:solidFill>
+                          <a:latin typeface="Roboto Flex" pitchFamily="34" charset="0"/>
+                          <a:ea typeface="Roboto Flex" pitchFamily="34" charset="-122"/>
+                          <a:cs typeface="Roboto Flex" pitchFamily="34" charset="-120"/>
+                        </a:rPr>
+                        <a:t>Kas operaator pakub vähemalt 2 € alla turu parima?</a:t>
+                      </a:r>
+                      <a:endParaRPr lang="en-US" sz="1300" dirty="0">
+                        <a:latin typeface="Roboto Flex" charset="0"/>
+                        <a:ea typeface="Roboto Flex" charset="0"/>
+                        <a:cs typeface="Roboto Flex" charset="0"/>
+                      </a:endParaRPr>
+                    </a:p>
+                  </a:txBody>
+                  <a:tcPr marL="127000" marR="127000" marT="88900" marB="88900" anchor="t">
+                    <a:lnL w="12700" cap="flat" cmpd="sng" algn="ctr">
+                      <a:solidFill>
+                        <a:srgbClr val="CBCBCB"/>
+                      </a:solidFill>
+                      <a:prstDash val="solid"/>
+                      <a:round/>
+                      <a:headEnd type="none" w="med" len="med"/>
+                      <a:tailEnd type="none" w="med" len="med"/>
+                    </a:lnL>
+                    <a:lnR w="12700" cap="flat" cmpd="sng" algn="ctr">
+                      <a:solidFill>
+                        <a:srgbClr val="CBCBCB"/>
+                      </a:solidFill>
+                      <a:prstDash val="solid"/>
+                      <a:round/>
+                      <a:headEnd type="none" w="med" len="med"/>
+                      <a:tailEnd type="none" w="med" len="med"/>
+                    </a:lnR>
+                    <a:lnT w="12700" cap="flat" cmpd="sng" algn="ctr">
+                      <a:solidFill>
+                        <a:srgbClr val="042951"/>
+                      </a:solidFill>
+                      <a:prstDash val="solid"/>
+                      <a:round/>
+                      <a:headEnd type="none" w="med" len="med"/>
+                      <a:tailEnd type="none" w="med" len="med"/>
+                    </a:lnT>
+                    <a:lnB w="12700" cap="flat" cmpd="sng" algn="ctr">
+                      <a:solidFill>
+                        <a:srgbClr val="CBCBCB"/>
+                      </a:solidFill>
+                      <a:prstDash val="solid"/>
+                      <a:round/>
+                      <a:headEnd type="none" w="med" len="med"/>
+                      <a:tailEnd type="none" w="med" len="med"/>
+                    </a:lnB>
+                  </a:tcPr>
+                </a:tc>
+                <a:tc>
+                  <a:txBody>
+                    <a:bodyPr/>
+                    <a:lstStyle/>
+                    <a:p>
+                      <a:pPr indent="0" marL="0">
+                        <a:lnSpc>
+                          <a:spcPts val="1820"/>
+                        </a:lnSpc>
+                        <a:buNone/>
+                      </a:pPr>
+                      <a:r>
+                        <a:rPr lang="en-US" sz="1300" dirty="0">
+                          <a:solidFill>
+                            <a:srgbClr val="293036"/>
+                          </a:solidFill>
+                          <a:latin typeface="Roboto Flex" pitchFamily="34" charset="0"/>
+                          <a:ea typeface="Roboto Flex" pitchFamily="34" charset="-122"/>
+                          <a:cs typeface="Roboto Flex" pitchFamily="34" charset="-120"/>
+                        </a:rPr>
+                        <a:t>Hankepäring kõigile. Enne seda küsime 1–2 müügijuhilt hinda 1 000 liinile</a:t>
+                      </a:r>
+                      <a:endParaRPr lang="en-US" sz="1300" dirty="0">
+                        <a:latin typeface="Roboto Flex" charset="0"/>
+                        <a:ea typeface="Roboto Flex" charset="0"/>
+                        <a:cs typeface="Roboto Flex" charset="0"/>
+                      </a:endParaRPr>
+                    </a:p>
+                  </a:txBody>
+                  <a:tcPr marL="127000" marR="127000" marT="88900" marB="88900" anchor="t">
+                    <a:lnL w="12700" cap="flat" cmpd="sng" algn="ctr">
+                      <a:solidFill>
+                        <a:srgbClr val="CBCBCB"/>
+                      </a:solidFill>
+                      <a:prstDash val="solid"/>
+                      <a:round/>
+                      <a:headEnd type="none" w="med" len="med"/>
+                      <a:tailEnd type="none" w="med" len="med"/>
+                    </a:lnL>
+                    <a:lnR w="12700" cap="flat" cmpd="sng" algn="ctr">
+                      <a:solidFill>
+                        <a:srgbClr val="CBCBCB"/>
+                      </a:solidFill>
+                      <a:prstDash val="solid"/>
+                      <a:round/>
+                      <a:headEnd type="none" w="med" len="med"/>
+                      <a:tailEnd type="none" w="med" len="med"/>
+                    </a:lnR>
+                    <a:lnT w="12700" cap="flat" cmpd="sng" algn="ctr">
+                      <a:solidFill>
+                        <a:srgbClr val="042951"/>
+                      </a:solidFill>
+                      <a:prstDash val="solid"/>
+                      <a:round/>
+                      <a:headEnd type="none" w="med" len="med"/>
+                      <a:tailEnd type="none" w="med" len="med"/>
+                    </a:lnT>
+                    <a:lnB w="12700" cap="flat" cmpd="sng" algn="ctr">
+                      <a:solidFill>
+                        <a:srgbClr val="CBCBCB"/>
+                      </a:solidFill>
+                      <a:prstDash val="solid"/>
+                      <a:round/>
+                      <a:headEnd type="none" w="med" len="med"/>
+                      <a:tailEnd type="none" w="med" len="med"/>
+                    </a:lnB>
+                  </a:tcPr>
+                </a:tc>
+              </a:tr>
+              <a:tr h="421630">
+                <a:tc>
+                  <a:txBody>
+                    <a:bodyPr/>
+                    <a:lstStyle/>
+                    <a:p>
+                      <a:pPr indent="0" marL="0">
+                        <a:lnSpc>
+                          <a:spcPts val="1820"/>
+                        </a:lnSpc>
+                        <a:buNone/>
+                      </a:pPr>
+                      <a:r>
+                        <a:rPr lang="en-US" sz="1300" dirty="0">
+                          <a:solidFill>
+                            <a:srgbClr val="293036"/>
+                          </a:solidFill>
+                          <a:latin typeface="Roboto Flex" pitchFamily="34" charset="0"/>
+                          <a:ea typeface="Roboto Flex" pitchFamily="34" charset="-122"/>
+                          <a:cs typeface="Roboto Flex" pitchFamily="34" charset="-120"/>
+                        </a:rPr>
+                        <a:t>Mitu registreerunut päriselt vahetab? Mudelis 45%, OCU-s umbes 10%</a:t>
+                      </a:r>
+                      <a:endParaRPr lang="en-US" sz="1300" dirty="0">
+                        <a:latin typeface="Roboto Flex" charset="0"/>
+                        <a:ea typeface="Roboto Flex" charset="0"/>
+                        <a:cs typeface="Roboto Flex" charset="0"/>
+                      </a:endParaRPr>
+                    </a:p>
+                  </a:txBody>
+                  <a:tcPr marL="127000" marR="127000" marT="88900" marB="88900" anchor="t">
+                    <a:lnL w="12700" cap="flat" cmpd="sng" algn="ctr">
+                      <a:solidFill>
+                        <a:srgbClr val="CBCBCB"/>
+                      </a:solidFill>
+                      <a:prstDash val="solid"/>
+                      <a:round/>
+                      <a:headEnd type="none" w="med" len="med"/>
+                      <a:tailEnd type="none" w="med" len="med"/>
+                    </a:lnL>
+                    <a:lnR w="12700" cap="flat" cmpd="sng" algn="ctr">
+                      <a:solidFill>
+                        <a:srgbClr val="C4C5C6"/>
+                      </a:solidFill>
+                      <a:prstDash val="solid"/>
+                      <a:round/>
+                      <a:headEnd type="none" w="med" len="med"/>
+                      <a:tailEnd type="none" w="med" len="med"/>
+                    </a:lnR>
+                    <a:lnT w="12700" cap="flat" cmpd="sng" algn="ctr">
+                      <a:solidFill>
+                        <a:srgbClr val="CBCBCB"/>
+                      </a:solidFill>
+                      <a:prstDash val="solid"/>
+                      <a:round/>
+                      <a:headEnd type="none" w="med" len="med"/>
+                      <a:tailEnd type="none" w="med" len="med"/>
+                    </a:lnT>
+                    <a:lnB w="12700" cap="flat" cmpd="sng" algn="ctr">
+                      <a:solidFill>
+                        <a:srgbClr val="C4C5C6"/>
+                      </a:solidFill>
+                      <a:prstDash val="solid"/>
+                      <a:round/>
+                      <a:headEnd type="none" w="med" len="med"/>
+                      <a:tailEnd type="none" w="med" len="med"/>
+                    </a:lnB>
+                    <a:solidFill>
+                      <a:srgbClr val="F5F7F9"/>
+                    </a:solidFill>
+                  </a:tcPr>
+                </a:tc>
+                <a:tc>
+                  <a:txBody>
+                    <a:bodyPr/>
+                    <a:lstStyle/>
+                    <a:p>
+                      <a:pPr indent="0" marL="0">
+                        <a:lnSpc>
+                          <a:spcPts val="1820"/>
+                        </a:lnSpc>
+                        <a:buNone/>
+                      </a:pPr>
+                      <a:r>
+                        <a:rPr lang="en-US" sz="1300" dirty="0">
+                          <a:solidFill>
+                            <a:srgbClr val="293036"/>
+                          </a:solidFill>
+                          <a:latin typeface="Roboto Flex" pitchFamily="34" charset="0"/>
+                          <a:ea typeface="Roboto Flex" pitchFamily="34" charset="-122"/>
+                          <a:cs typeface="Roboto Flex" pitchFamily="34" charset="-120"/>
+                        </a:rPr>
+                        <a:t>Registreerumisvorm Tuleva kogukonnas. Esimene hange mõõdab</a:t>
+                      </a:r>
+                      <a:endParaRPr lang="en-US" sz="1300" dirty="0">
+                        <a:latin typeface="Roboto Flex" charset="0"/>
+                        <a:ea typeface="Roboto Flex" charset="0"/>
+                        <a:cs typeface="Roboto Flex" charset="0"/>
+                      </a:endParaRPr>
+                    </a:p>
+                  </a:txBody>
+                  <a:tcPr marL="127000" marR="127000" marT="88900" marB="88900" anchor="t">
+                    <a:lnL w="12700" cap="flat" cmpd="sng" algn="ctr">
+                      <a:solidFill>
+                        <a:srgbClr val="C4C5C6"/>
+                      </a:solidFill>
+                      <a:prstDash val="solid"/>
+                      <a:round/>
+                      <a:headEnd type="none" w="med" len="med"/>
+                      <a:tailEnd type="none" w="med" len="med"/>
+                    </a:lnL>
+                    <a:lnR w="12700" cap="flat" cmpd="sng" algn="ctr">
+                      <a:solidFill>
+                        <a:srgbClr val="C4C5C6"/>
+                      </a:solidFill>
+                      <a:prstDash val="solid"/>
+                      <a:round/>
+                      <a:headEnd type="none" w="med" len="med"/>
+                      <a:tailEnd type="none" w="med" len="med"/>
+                    </a:lnR>
+                    <a:lnT w="12700" cap="flat" cmpd="sng" algn="ctr">
+                      <a:solidFill>
+                        <a:srgbClr val="CBCBCB"/>
+                      </a:solidFill>
+                      <a:prstDash val="solid"/>
+                      <a:round/>
+                      <a:headEnd type="none" w="med" len="med"/>
+                      <a:tailEnd type="none" w="med" len="med"/>
+                    </a:lnT>
+                    <a:lnB w="12700" cap="flat" cmpd="sng" algn="ctr">
+                      <a:solidFill>
+                        <a:srgbClr val="C4C5C6"/>
+                      </a:solidFill>
+                      <a:prstDash val="solid"/>
+                      <a:round/>
+                      <a:headEnd type="none" w="med" len="med"/>
+                      <a:tailEnd type="none" w="med" len="med"/>
+                    </a:lnB>
+                    <a:solidFill>
+                      <a:srgbClr val="F5F7F9"/>
+                    </a:solidFill>
+                  </a:tcPr>
+                </a:tc>
+              </a:tr>
+              <a:tr h="421630">
+                <a:tc>
+                  <a:txBody>
+                    <a:bodyPr/>
+                    <a:lstStyle/>
+                    <a:p>
+                      <a:pPr indent="0" marL="0">
+                        <a:lnSpc>
+                          <a:spcPts val="1820"/>
+                        </a:lnSpc>
+                        <a:buNone/>
+                      </a:pPr>
+                      <a:r>
+                        <a:rPr lang="en-US" sz="1300" dirty="0">
+                          <a:solidFill>
+                            <a:srgbClr val="293036"/>
+                          </a:solidFill>
+                          <a:latin typeface="Roboto Flex" pitchFamily="34" charset="0"/>
+                          <a:ea typeface="Roboto Flex" pitchFamily="34" charset="-122"/>
+                          <a:cs typeface="Roboto Flex" pitchFamily="34" charset="-120"/>
+                        </a:rPr>
+                        <a:t>Kas operaator nõustub 1 € tasu ja meie vahendusrolliga?</a:t>
+                      </a:r>
+                      <a:endParaRPr lang="en-US" sz="1300" dirty="0">
+                        <a:latin typeface="Roboto Flex" charset="0"/>
+                        <a:ea typeface="Roboto Flex" charset="0"/>
+                        <a:cs typeface="Roboto Flex" charset="0"/>
+                      </a:endParaRPr>
+                    </a:p>
+                  </a:txBody>
+                  <a:tcPr marL="127000" marR="127000" marT="88900" marB="88900" anchor="t">
+                    <a:lnL w="12700" cap="flat" cmpd="sng" algn="ctr">
+                      <a:solidFill>
+                        <a:srgbClr val="CBCBCB"/>
+                      </a:solidFill>
+                      <a:prstDash val="solid"/>
+                      <a:round/>
+                      <a:headEnd type="none" w="med" len="med"/>
+                      <a:tailEnd type="none" w="med" len="med"/>
+                    </a:lnL>
+                    <a:lnR w="12700" cap="flat" cmpd="sng" algn="ctr">
+                      <a:solidFill>
+                        <a:srgbClr val="CBCBCB"/>
+                      </a:solidFill>
+                      <a:prstDash val="solid"/>
+                      <a:round/>
+                      <a:headEnd type="none" w="med" len="med"/>
+                      <a:tailEnd type="none" w="med" len="med"/>
+                    </a:lnR>
+                    <a:lnT w="12700" cap="flat" cmpd="sng" algn="ctr">
+                      <a:solidFill>
+                        <a:srgbClr val="C4C5C6"/>
+                      </a:solidFill>
+                      <a:prstDash val="solid"/>
+                      <a:round/>
+                      <a:headEnd type="none" w="med" len="med"/>
+                      <a:tailEnd type="none" w="med" len="med"/>
+                    </a:lnT>
+                    <a:lnB w="12700" cap="flat" cmpd="sng" algn="ctr">
+                      <a:solidFill>
+                        <a:srgbClr val="CBCBCB"/>
+                      </a:solidFill>
+                      <a:prstDash val="solid"/>
+                      <a:round/>
+                      <a:headEnd type="none" w="med" len="med"/>
+                      <a:tailEnd type="none" w="med" len="med"/>
+                    </a:lnB>
+                  </a:tcPr>
+                </a:tc>
+                <a:tc>
+                  <a:txBody>
+                    <a:bodyPr/>
+                    <a:lstStyle/>
+                    <a:p>
+                      <a:pPr indent="0" marL="0">
+                        <a:lnSpc>
+                          <a:spcPts val="1820"/>
+                        </a:lnSpc>
+                        <a:buNone/>
+                      </a:pPr>
+                      <a:r>
+                        <a:rPr lang="en-US" sz="1300" dirty="0">
+                          <a:solidFill>
+                            <a:srgbClr val="293036"/>
+                          </a:solidFill>
+                          <a:latin typeface="Roboto Flex" pitchFamily="34" charset="0"/>
+                          <a:ea typeface="Roboto Flex" pitchFamily="34" charset="-122"/>
+                          <a:cs typeface="Roboto Flex" pitchFamily="34" charset="-120"/>
+                        </a:rPr>
+                        <a:t>Tingimus hankepäringus. Õigusmentori hinnang</a:t>
+                      </a:r>
+                      <a:endParaRPr lang="en-US" sz="1300" dirty="0">
+                        <a:latin typeface="Roboto Flex" charset="0"/>
+                        <a:ea typeface="Roboto Flex" charset="0"/>
+                        <a:cs typeface="Roboto Flex" charset="0"/>
+                      </a:endParaRPr>
+                    </a:p>
+                  </a:txBody>
+                  <a:tcPr marL="127000" marR="127000" marT="88900" marB="88900" anchor="t">
+                    <a:lnL w="12700" cap="flat" cmpd="sng" algn="ctr">
+                      <a:solidFill>
+                        <a:srgbClr val="CBCBCB"/>
+                      </a:solidFill>
+                      <a:prstDash val="solid"/>
+                      <a:round/>
+                      <a:headEnd type="none" w="med" len="med"/>
+                      <a:tailEnd type="none" w="med" len="med"/>
+                    </a:lnL>
+                    <a:lnR w="12700" cap="flat" cmpd="sng" algn="ctr">
+                      <a:solidFill>
+                        <a:srgbClr val="CBCBCB"/>
+                      </a:solidFill>
+                      <a:prstDash val="solid"/>
+                      <a:round/>
+                      <a:headEnd type="none" w="med" len="med"/>
+                      <a:tailEnd type="none" w="med" len="med"/>
+                    </a:lnR>
+                    <a:lnT w="12700" cap="flat" cmpd="sng" algn="ctr">
+                      <a:solidFill>
+                        <a:srgbClr val="C4C5C6"/>
+                      </a:solidFill>
+                      <a:prstDash val="solid"/>
+                      <a:round/>
+                      <a:headEnd type="none" w="med" len="med"/>
+                      <a:tailEnd type="none" w="med" len="med"/>
+                    </a:lnT>
+                    <a:lnB w="12700" cap="flat" cmpd="sng" algn="ctr">
+                      <a:solidFill>
+                        <a:srgbClr val="CBCBCB"/>
+                      </a:solidFill>
+                      <a:prstDash val="solid"/>
+                      <a:round/>
+                      <a:headEnd type="none" w="med" len="med"/>
+                      <a:tailEnd type="none" w="med" len="med"/>
+                    </a:lnB>
+                  </a:tcPr>
+                </a:tc>
+              </a:tr>
+              <a:tr h="421630">
+                <a:tc>
+                  <a:txBody>
+                    <a:bodyPr/>
+                    <a:lstStyle/>
+                    <a:p>
+                      <a:pPr indent="0" marL="0">
+                        <a:lnSpc>
+                          <a:spcPts val="1820"/>
+                        </a:lnSpc>
+                        <a:buNone/>
+                      </a:pPr>
+                      <a:r>
+                        <a:rPr lang="en-US" sz="1300" dirty="0">
+                          <a:solidFill>
+                            <a:srgbClr val="293036"/>
+                          </a:solidFill>
+                          <a:latin typeface="Roboto Flex" pitchFamily="34" charset="0"/>
+                          <a:ea typeface="Roboto Flex" pitchFamily="34" charset="-122"/>
+                          <a:cs typeface="Roboto Flex" pitchFamily="34" charset="-120"/>
+                        </a:rPr>
+                        <a:t>Kas operaator aktsepteerib meie isikutuvastust ja lepingut?</a:t>
+                      </a:r>
+                      <a:endParaRPr lang="en-US" sz="1300" dirty="0">
+                        <a:latin typeface="Roboto Flex" charset="0"/>
+                        <a:ea typeface="Roboto Flex" charset="0"/>
+                        <a:cs typeface="Roboto Flex" charset="0"/>
+                      </a:endParaRPr>
+                    </a:p>
+                  </a:txBody>
+                  <a:tcPr marL="127000" marR="127000" marT="88900" marB="88900" anchor="t">
+                    <a:lnL w="12700" cap="flat" cmpd="sng" algn="ctr">
+                      <a:solidFill>
+                        <a:srgbClr val="CBCBCB"/>
+                      </a:solidFill>
+                      <a:prstDash val="solid"/>
+                      <a:round/>
+                      <a:headEnd type="none" w="med" len="med"/>
+                      <a:tailEnd type="none" w="med" len="med"/>
+                    </a:lnL>
+                    <a:lnR w="12700" cap="flat" cmpd="sng" algn="ctr">
+                      <a:solidFill>
+                        <a:srgbClr val="C4C5C6"/>
+                      </a:solidFill>
+                      <a:prstDash val="solid"/>
+                      <a:round/>
+                      <a:headEnd type="none" w="med" len="med"/>
+                      <a:tailEnd type="none" w="med" len="med"/>
+                    </a:lnR>
+                    <a:lnT w="12700" cap="flat" cmpd="sng" algn="ctr">
+                      <a:solidFill>
+                        <a:srgbClr val="CBCBCB"/>
+                      </a:solidFill>
+                      <a:prstDash val="solid"/>
+                      <a:round/>
+                      <a:headEnd type="none" w="med" len="med"/>
+                      <a:tailEnd type="none" w="med" len="med"/>
+                    </a:lnT>
+                    <a:lnB w="12700" cap="flat" cmpd="sng" algn="ctr">
+                      <a:solidFill>
+                        <a:srgbClr val="C4C5C6"/>
+                      </a:solidFill>
+                      <a:prstDash val="solid"/>
+                      <a:round/>
+                      <a:headEnd type="none" w="med" len="med"/>
+                      <a:tailEnd type="none" w="med" len="med"/>
+                    </a:lnB>
+                    <a:solidFill>
+                      <a:srgbClr val="F5F7F9"/>
+                    </a:solidFill>
+                  </a:tcPr>
+                </a:tc>
+                <a:tc>
+                  <a:txBody>
+                    <a:bodyPr/>
+                    <a:lstStyle/>
+                    <a:p>
+                      <a:pPr indent="0" marL="0">
+                        <a:lnSpc>
+                          <a:spcPts val="1820"/>
+                        </a:lnSpc>
+                        <a:buNone/>
+                      </a:pPr>
+                      <a:r>
+                        <a:rPr lang="en-US" sz="1300" dirty="0">
+                          <a:solidFill>
+                            <a:srgbClr val="293036"/>
+                          </a:solidFill>
+                          <a:latin typeface="Roboto Flex" pitchFamily="34" charset="0"/>
+                          <a:ea typeface="Roboto Flex" pitchFamily="34" charset="-122"/>
+                          <a:cs typeface="Roboto Flex" pitchFamily="34" charset="-120"/>
+                        </a:rPr>
+                        <a:t>SLA läbirääkimine. Tagavara: suuname operaatori lehele</a:t>
+                      </a:r>
+                      <a:endParaRPr lang="en-US" sz="1300" dirty="0">
+                        <a:latin typeface="Roboto Flex" charset="0"/>
+                        <a:ea typeface="Roboto Flex" charset="0"/>
+                        <a:cs typeface="Roboto Flex" charset="0"/>
+                      </a:endParaRPr>
+                    </a:p>
+                  </a:txBody>
+                  <a:tcPr marL="127000" marR="127000" marT="88900" marB="88900" anchor="t">
+                    <a:lnL w="12700" cap="flat" cmpd="sng" algn="ctr">
+                      <a:solidFill>
+                        <a:srgbClr val="C4C5C6"/>
+                      </a:solidFill>
+                      <a:prstDash val="solid"/>
+                      <a:round/>
+                      <a:headEnd type="none" w="med" len="med"/>
+                      <a:tailEnd type="none" w="med" len="med"/>
+                    </a:lnL>
+                    <a:lnR w="12700" cap="flat" cmpd="sng" algn="ctr">
+                      <a:solidFill>
+                        <a:srgbClr val="C4C5C6"/>
+                      </a:solidFill>
+                      <a:prstDash val="solid"/>
+                      <a:round/>
+                      <a:headEnd type="none" w="med" len="med"/>
+                      <a:tailEnd type="none" w="med" len="med"/>
+                    </a:lnR>
+                    <a:lnT w="12700" cap="flat" cmpd="sng" algn="ctr">
+                      <a:solidFill>
+                        <a:srgbClr val="CBCBCB"/>
+                      </a:solidFill>
+                      <a:prstDash val="solid"/>
+                      <a:round/>
+                      <a:headEnd type="none" w="med" len="med"/>
+                      <a:tailEnd type="none" w="med" len="med"/>
+                    </a:lnT>
+                    <a:lnB w="12700" cap="flat" cmpd="sng" algn="ctr">
+                      <a:solidFill>
+                        <a:srgbClr val="C4C5C6"/>
+                      </a:solidFill>
+                      <a:prstDash val="solid"/>
+                      <a:round/>
+                      <a:headEnd type="none" w="med" len="med"/>
+                      <a:tailEnd type="none" w="med" len="med"/>
+                    </a:lnB>
+                    <a:solidFill>
+                      <a:srgbClr val="F5F7F9"/>
+                    </a:solidFill>
+                  </a:tcPr>
+                </a:tc>
+              </a:tr>
+              <a:tr h="421630">
+                <a:tc>
+                  <a:txBody>
+                    <a:bodyPr/>
+                    <a:lstStyle/>
+                    <a:p>
+                      <a:pPr indent="0" marL="0">
+                        <a:lnSpc>
+                          <a:spcPts val="1820"/>
+                        </a:lnSpc>
+                        <a:buNone/>
+                      </a:pPr>
+                      <a:r>
+                        <a:rPr lang="en-US" sz="1300" dirty="0">
+                          <a:solidFill>
+                            <a:srgbClr val="293036"/>
+                          </a:solidFill>
+                          <a:latin typeface="Roboto Flex" pitchFamily="34" charset="0"/>
+                          <a:ea typeface="Roboto Flex" pitchFamily="34" charset="-122"/>
+                          <a:cs typeface="Roboto Flex" pitchFamily="34" charset="-120"/>
+                        </a:rPr>
+                        <a:t>Milline on andmetöötluse alus ja Tuleva roll?</a:t>
+                      </a:r>
+                      <a:endParaRPr lang="en-US" sz="1300" dirty="0">
+                        <a:latin typeface="Roboto Flex" charset="0"/>
+                        <a:ea typeface="Roboto Flex" charset="0"/>
+                        <a:cs typeface="Roboto Flex" charset="0"/>
+                      </a:endParaRPr>
+                    </a:p>
+                  </a:txBody>
+                  <a:tcPr marL="127000" marR="127000" marT="88900" marB="88900" anchor="t">
+                    <a:lnL w="12700" cap="flat" cmpd="sng" algn="ctr">
+                      <a:solidFill>
+                        <a:srgbClr val="CBCBCB"/>
+                      </a:solidFill>
+                      <a:prstDash val="solid"/>
+                      <a:round/>
+                      <a:headEnd type="none" w="med" len="med"/>
+                      <a:tailEnd type="none" w="med" len="med"/>
+                    </a:lnL>
+                    <a:lnR w="12700" cap="flat" cmpd="sng" algn="ctr">
+                      <a:solidFill>
+                        <a:srgbClr val="CBCBCB"/>
+                      </a:solidFill>
+                      <a:prstDash val="solid"/>
+                      <a:round/>
+                      <a:headEnd type="none" w="med" len="med"/>
+                      <a:tailEnd type="none" w="med" len="med"/>
+                    </a:lnR>
+                    <a:lnT w="12700" cap="flat" cmpd="sng" algn="ctr">
+                      <a:solidFill>
+                        <a:srgbClr val="C4C5C6"/>
+                      </a:solidFill>
+                      <a:prstDash val="solid"/>
+                      <a:round/>
+                      <a:headEnd type="none" w="med" len="med"/>
+                      <a:tailEnd type="none" w="med" len="med"/>
+                    </a:lnT>
+                    <a:lnB w="12700" cap="flat" cmpd="sng" algn="ctr">
+                      <a:solidFill>
+                        <a:srgbClr val="CBCBCB"/>
+                      </a:solidFill>
+                      <a:prstDash val="solid"/>
+                      <a:round/>
+                      <a:headEnd type="none" w="med" len="med"/>
+                      <a:tailEnd type="none" w="med" len="med"/>
+                    </a:lnB>
+                  </a:tcPr>
+                </a:tc>
+                <a:tc>
+                  <a:txBody>
+                    <a:bodyPr/>
+                    <a:lstStyle/>
+                    <a:p>
+                      <a:pPr indent="0" marL="0">
+                        <a:lnSpc>
+                          <a:spcPts val="1820"/>
+                        </a:lnSpc>
+                        <a:buNone/>
+                      </a:pPr>
+                      <a:r>
+                        <a:rPr lang="en-US" sz="1300" dirty="0">
+                          <a:solidFill>
+                            <a:srgbClr val="293036"/>
+                          </a:solidFill>
+                          <a:latin typeface="Roboto Flex" pitchFamily="34" charset="0"/>
+                          <a:ea typeface="Roboto Flex" pitchFamily="34" charset="-122"/>
+                          <a:cs typeface="Roboto Flex" pitchFamily="34" charset="-120"/>
+                        </a:rPr>
+                        <a:t>Andmekaitse mentor, siis Tuleva jurist</a:t>
+                      </a:r>
+                      <a:endParaRPr lang="en-US" sz="1300" dirty="0">
+                        <a:latin typeface="Roboto Flex" charset="0"/>
+                        <a:ea typeface="Roboto Flex" charset="0"/>
+                        <a:cs typeface="Roboto Flex" charset="0"/>
+                      </a:endParaRPr>
+                    </a:p>
+                  </a:txBody>
+                  <a:tcPr marL="127000" marR="127000" marT="88900" marB="88900" anchor="t">
+                    <a:lnL w="12700" cap="flat" cmpd="sng" algn="ctr">
+                      <a:solidFill>
+                        <a:srgbClr val="CBCBCB"/>
+                      </a:solidFill>
+                      <a:prstDash val="solid"/>
+                      <a:round/>
+                      <a:headEnd type="none" w="med" len="med"/>
+                      <a:tailEnd type="none" w="med" len="med"/>
+                    </a:lnL>
+                    <a:lnR w="12700" cap="flat" cmpd="sng" algn="ctr">
+                      <a:solidFill>
+                        <a:srgbClr val="CBCBCB"/>
+                      </a:solidFill>
+                      <a:prstDash val="solid"/>
+                      <a:round/>
+                      <a:headEnd type="none" w="med" len="med"/>
+                      <a:tailEnd type="none" w="med" len="med"/>
+                    </a:lnR>
+                    <a:lnT w="12700" cap="flat" cmpd="sng" algn="ctr">
+                      <a:solidFill>
+                        <a:srgbClr val="C4C5C6"/>
+                      </a:solidFill>
+                      <a:prstDash val="solid"/>
+                      <a:round/>
+                      <a:headEnd type="none" w="med" len="med"/>
+                      <a:tailEnd type="none" w="med" len="med"/>
+                    </a:lnT>
+                    <a:lnB w="12700" cap="flat" cmpd="sng" algn="ctr">
+                      <a:solidFill>
+                        <a:srgbClr val="CBCBCB"/>
+                      </a:solidFill>
+                      <a:prstDash val="solid"/>
+                      <a:round/>
+                      <a:headEnd type="none" w="med" len="med"/>
+                      <a:tailEnd type="none" w="med" len="med"/>
+                    </a:lnB>
+                  </a:tcPr>
+                </a:tc>
+              </a:tr>
+            </a:tbl>
+          </a:graphicData>
+        </a:graphic>
+      </p:graphicFrame>
+      <p:sp>
+        <p:nvSpPr>
+          <p:cNvPr id="4" name="Text 1"/>
+          <p:cNvSpPr/>
+          <p:nvPr/>
+        </p:nvSpPr>
+        <p:spPr>
+          <a:xfrm>
+            <a:off x="812800" y="6238280"/>
+            <a:ext cx="8818245" cy="238720"/>
+          </a:xfrm>
+          <a:prstGeom prst="rect">
+            <a:avLst/>
+          </a:prstGeom>
+          <a:noFill/>
+          <a:ln/>
+        </p:spPr>
+        <p:txBody>
+          <a:bodyPr wrap="square" lIns="0" tIns="0" rIns="0" bIns="0" rtlCol="0" anchor="t">
+            <a:normAutofit/>
+          </a:bodyPr>
+          <a:lstStyle/>
+          <a:p>
+            <a:pPr algn="l" indent="0" marL="0">
+              <a:lnSpc>
+                <a:spcPts val="1680"/>
+              </a:lnSpc>
+              <a:buNone/>
+            </a:pPr>
+            <a:r>
+              <a:rPr lang="en-US" sz="1200" dirty="0">
+                <a:solidFill>
+                  <a:srgbClr val="6B7074"/>
+                </a:solidFill>
+                <a:latin typeface="Roboto Flex" pitchFamily="34" charset="0"/>
+                <a:ea typeface="Roboto Flex" pitchFamily="34" charset="-122"/>
+                <a:cs typeface="Roboto Flex" pitchFamily="34" charset="-120"/>
+              </a:rPr>
+              <a:t>Kõik lahtised küsimused: docs/05 ja docs/15 · Tele2 tingimused keelavad vahendamise ilma nõusolekuta (docs/14)</a:t>
+            </a:r>
+            <a:endParaRPr lang="en-US" sz="1200" dirty="0"/>
+          </a:p>
+        </p:txBody>
+      </p:sp>
+      <p:sp>
+        <p:nvSpPr>
+          <p:cNvPr id="5" name="Text 2"/>
+          <p:cNvSpPr/>
+          <p:nvPr/>
+        </p:nvSpPr>
+        <p:spPr>
+          <a:xfrm>
+            <a:off x="11164838" y="6238280"/>
+            <a:ext cx="214362" cy="238720"/>
+          </a:xfrm>
+          <a:prstGeom prst="rect">
+            <a:avLst/>
+          </a:prstGeom>
+          <a:noFill/>
+          <a:ln/>
+        </p:spPr>
+        <p:txBody>
+          <a:bodyPr wrap="square" lIns="0" tIns="0" rIns="0" bIns="0" rtlCol="0" anchor="t">
+            <a:normAutofit/>
+          </a:bodyPr>
+          <a:lstStyle/>
+          <a:p>
+            <a:pPr algn="r" indent="0" marL="0">
+              <a:lnSpc>
+                <a:spcPts val="1680"/>
+              </a:lnSpc>
+              <a:buNone/>
+            </a:pPr>
+            <a:r>
+              <a:rPr lang="en-US" sz="1200" dirty="0">
+                <a:solidFill>
+                  <a:srgbClr val="6B7074"/>
+                </a:solidFill>
+                <a:latin typeface="Roboto Flex" pitchFamily="34" charset="0"/>
+                <a:ea typeface="Roboto Flex" pitchFamily="34" charset="-122"/>
+                <a:cs typeface="Roboto Flex" pitchFamily="34" charset="-120"/>
+              </a:rPr>
+              <a:t>11</a:t>
+            </a:r>
+            <a:endParaRPr lang="en-US" sz="1200" dirty="0"/>
+          </a:p>
+        </p:txBody>
+      </p:sp>
+    </p:spTree>
+  </p:cSld>
+  <p:clrMapOvr>
+    <a:masterClrMapping/>
+  </p:clrMapOvr>
+</p:sld>
+</file>
+
+<file path=ppt/slides/slide12.xml><?xml version="1.0" encoding="utf-8"?>
+<p:sld xmlns:a="http://schemas.openxmlformats.org/drawingml/2006/main" xmlns:r="http://schemas.openxmlformats.org/officeDocument/2006/relationships" xmlns:p="http://schemas.openxmlformats.org/presentationml/2006/main">
+  <p:cSld name="Slide 12">
     <p:bg>
       <p:bgPr>
         <a:solidFill>
@@ -2158,7 +4710,27 @@
                 <a:ea typeface="Merriweather" pitchFamily="18" charset="-122"/>
                 <a:cs typeface="Merriweather" pitchFamily="18" charset="-120"/>
               </a:rPr>
-              <a:t>Üksi pole sul läbirääkimisjõudu. Tuhandel inimesel on.</a:t>
+              <a:t>Üksi pole sul läbirääkimisjõudu.</a:t>
+            </a:r>
+            <a:endParaRPr lang="en-US" sz="3600" dirty="0"/>
+          </a:p>
+          <a:p>
+            <a:pPr algn="l" indent="0" marL="0">
+              <a:lnSpc>
+                <a:spcPts val="4320"/>
+              </a:lnSpc>
+              <a:buNone/>
+            </a:pPr>
+            <a:r>
+              <a:rPr lang="en-US" sz="3600" b="1" i="0" dirty="0">
+                <a:solidFill>
+                  <a:srgbClr val="FFFFFF"/>
+                </a:solidFill>
+                <a:latin typeface="Merriweather" pitchFamily="18" charset="0"/>
+                <a:ea typeface="Merriweather" pitchFamily="18" charset="-122"/>
+                <a:cs typeface="Merriweather" pitchFamily="18" charset="-120"/>
+              </a:rPr>
+              <a:t>Tuhandel inimesel on.</a:t>
             </a:r>
             <a:endParaRPr lang="en-US" sz="3600" dirty="0"/>
           </a:p>
@@ -2248,12 +4820,12 @@
         </p:nvSpPr>
         <p:spPr>
           <a:xfrm>
-            <a:off x="812800" y="2095500"/>
-            <a:ext cx="10566400" cy="3556000"/>
+            <a:off x="812800" y="2501900"/>
+            <a:ext cx="10566400" cy="3302000"/>
           </a:xfrm>
           <a:prstGeom prst="roundRect">
             <a:avLst>
-              <a:gd name="adj" fmla="val 2857"/>
+              <a:gd name="adj" fmla="val 3077"/>
             </a:avLst>
           </a:prstGeom>
           <a:solidFill>
@@ -2273,7 +4845,7 @@
         <p:spPr>
           <a:xfrm>
             <a:off x="812800" y="812800"/>
-            <a:ext cx="10883392" cy="574030"/>
+            <a:ext cx="10883392" cy="1122660"/>
           </a:xfrm>
           <a:prstGeom prst="rect">
             <a:avLst/>
@@ -2302,8 +4874,17 @@
                 <a:ea typeface="Merriweather" pitchFamily="18" charset="-122"/>
                 <a:cs typeface="Merriweather" pitchFamily="18" charset="-120"/>
               </a:rPr>
-              <a:t>Sama pakett, </a:t>
-            </a:r>
+              <a:t>Piiramatu internetiga pakett</a:t>
+            </a:r>
+            <a:endParaRPr lang="en-US" sz="3600" dirty="0"/>
+          </a:p>
+          <a:p>
+            <a:pPr algn="l" indent="0" marL="0">
+              <a:lnSpc>
+                <a:spcPts val="4320"/>
+              </a:lnSpc>
+              <a:buNone/>
+            </a:pPr>
             <a:r>
               <a:rPr lang="en-US" sz="3600" b="1" i="0" dirty="0">
                 <a:solidFill>
@@ -2338,7 +4919,7 @@
         </p:nvSpPr>
         <p:spPr>
           <a:xfrm>
-            <a:off x="812800" y="1463030"/>
+            <a:off x="812800" y="2011660"/>
             <a:ext cx="10883392" cy="309860"/>
           </a:xfrm>
           <a:prstGeom prst="rect">
@@ -2362,13 +4943,57 @@
             <a:r>
               <a:rPr lang="en-US" sz="1600" dirty="0">
                 <a:solidFill>
-                  <a:srgbClr val="6B7074"/>
+                  <a:srgbClr val="293036"/>
                 </a:solidFill>
                 <a:latin typeface="Roboto Flex" pitchFamily="34" charset="0"/>
                 <a:ea typeface="Roboto Flex" pitchFamily="34" charset="-122"/>
                 <a:cs typeface="Roboto Flex" pitchFamily="34" charset="-120"/>
               </a:rPr>
-              <a:t>Piiramatu mobiilipakett, tavahind ilma sidumiseta</a:t>
+              <a:t>Liikmeküsitluses peab </a:t>
+            </a:r>
+            <a:r>
+              <a:rPr lang="en-US" sz="1600" b="1" dirty="0">
+                <a:solidFill>
+                  <a:srgbClr val="293036"/>
+                </a:solidFill>
+                <a:latin typeface="Roboto Flex" pitchFamily="34" charset="0"/>
+                <a:ea typeface="Roboto Flex" pitchFamily="34" charset="-122"/>
+                <a:cs typeface="Roboto Flex" pitchFamily="34" charset="-120"/>
+              </a:rPr>
+              <a:t>83%</a:t>
+            </a:r>
+            <a:r>
+              <a:rPr lang="en-US" sz="1600" dirty="0">
+                <a:solidFill>
+                  <a:srgbClr val="293036"/>
+                </a:solidFill>
+                <a:latin typeface="Roboto Flex" pitchFamily="34" charset="0"/>
+                <a:ea typeface="Roboto Flex" pitchFamily="34" charset="-122"/>
+                <a:cs typeface="Roboto Flex" pitchFamily="34" charset="-120"/>
+              </a:rPr>
+              <a:t> püsikulusid probleemiks · Eestis on </a:t>
+            </a:r>
+            <a:r>
+              <a:rPr lang="en-US" sz="1600" b="1" dirty="0">
+                <a:solidFill>
+                  <a:srgbClr val="293036"/>
+                </a:solidFill>
+                <a:latin typeface="Roboto Flex" pitchFamily="34" charset="0"/>
+                <a:ea typeface="Roboto Flex" pitchFamily="34" charset="-122"/>
+                <a:cs typeface="Roboto Flex" pitchFamily="34" charset="-120"/>
+              </a:rPr>
+              <a:t>1,8 mln</a:t>
+            </a:r>
+            <a:r>
+              <a:rPr lang="en-US" sz="1600" dirty="0">
+                <a:solidFill>
+                  <a:srgbClr val="293036"/>
+                </a:solidFill>
+                <a:latin typeface="Roboto Flex" pitchFamily="34" charset="0"/>
+                <a:ea typeface="Roboto Flex" pitchFamily="34" charset="-122"/>
+                <a:cs typeface="Roboto Flex" pitchFamily="34" charset="-120"/>
+              </a:rPr>
+              <a:t> lepingulist mobiilikasutajat</a:t>
             </a:r>
             <a:endParaRPr lang="en-US" sz="1600" dirty="0"/>
           </a:p>
@@ -2382,8 +5007,75 @@
         </p:nvSpPr>
         <p:spPr>
           <a:xfrm>
-            <a:off x="2603500" y="3206750"/>
-            <a:ext cx="1397000" cy="2000250"/>
+            <a:off x="1625600" y="4851400"/>
+            <a:ext cx="8940800" cy="0"/>
+          </a:xfrm>
+          <a:prstGeom prst="line">
+            <a:avLst/>
+          </a:prstGeom>
+          <a:noFill/>
+          <a:ln w="12700">
+            <a:solidFill>
+              <a:srgbClr val="00AEEA"/>
+            </a:solidFill>
+            <a:prstDash val="dash"/>
+          </a:ln>
+        </p:spPr>
+      </p:sp>
+      <p:sp>
+        <p:nvSpPr>
+          <p:cNvPr id="6" name="Text 4"/>
+          <p:cNvSpPr/>
+          <p:nvPr/>
+        </p:nvSpPr>
+        <p:spPr>
+          <a:xfrm>
+            <a:off x="863600" y="4743450"/>
+            <a:ext cx="685800" cy="223490"/>
+          </a:xfrm>
+          <a:prstGeom prst="rect">
+            <a:avLst/>
+          </a:prstGeom>
+          <a:noFill/>
+          <a:ln/>
+        </p:spPr>
+        <p:txBody>
+          <a:bodyPr wrap="square" lIns="0" tIns="0" rIns="0" bIns="0" rtlCol="0" anchor="t">
+            <a:normAutofit/>
+          </a:bodyPr>
+          <a:lstStyle/>
+          <a:p>
+            <a:pPr algn="r" indent="0" marL="0">
+              <a:lnSpc>
+                <a:spcPts val="1560"/>
+              </a:lnSpc>
+              <a:buNone/>
+            </a:pPr>
+            <a:r>
+              <a:rPr lang="en-US" sz="1200" b="1" dirty="0">
+                <a:solidFill>
+                  <a:srgbClr val="006CE6"/>
+                </a:solidFill>
+                <a:latin typeface="Roboto Flex" pitchFamily="34" charset="0"/>
+                <a:ea typeface="Roboto Flex" pitchFamily="34" charset="-122"/>
+                <a:cs typeface="Roboto Flex" pitchFamily="34" charset="-120"/>
+              </a:rPr>
+              <a:t>10 €</a:t>
+            </a:r>
+            <a:endParaRPr lang="en-US" sz="1200" dirty="0"/>
+          </a:p>
+        </p:txBody>
+      </p:sp>
+      <p:sp>
+        <p:nvSpPr>
+          <p:cNvPr id="7" name="Shape 5"/>
+          <p:cNvSpPr/>
+          <p:nvPr/>
+        </p:nvSpPr>
+        <p:spPr>
+          <a:xfrm>
+            <a:off x="2108200" y="3581400"/>
+            <a:ext cx="1270000" cy="1778000"/>
           </a:xfrm>
           <a:custGeom>
             <a:avLst/>
@@ -2392,44 +5084,44 @@
             <a:cxnLst/>
             <a:rect l="l" t="t" r="r" b="b"/>
             <a:pathLst>
-              <a:path w="1397000" h="2000250">
+              <a:path w="1270000" h="1778000">
                 <a:moveTo>
-                  <a:pt x="50800" y="0"/>
+                  <a:pt x="101600" y="0"/>
                 </a:moveTo>
                 <a:lnTo>
-                  <a:pt x="1346200" y="0"/>
+                  <a:pt x="1168400" y="0"/>
                 </a:lnTo>
-                <a:arcTo hR="50800" wR="50800" stAng="16200000" swAng="5400000"/>
+                <a:arcTo hR="101600" wR="101600" stAng="16200000" swAng="5400000"/>
                 <a:lnTo>
-                  <a:pt x="1397000" y="2000250"/>
+                  <a:pt x="1270000" y="1778000"/>
                 </a:lnTo>
                 <a:lnTo>
-                  <a:pt x="0" y="2000250"/>
+                  <a:pt x="0" y="1778000"/>
                 </a:lnTo>
                 <a:lnTo>
-                  <a:pt x="0" y="50800"/>
+                  <a:pt x="0" y="101600"/>
                 </a:lnTo>
-                <a:arcTo hR="50800" wR="50800" stAng="10800000" swAng="5400000"/>
+                <a:arcTo hR="101600" wR="101600" stAng="10800000" swAng="5400000"/>
                 <a:close/>
               </a:path>
             </a:pathLst>
           </a:custGeom>
           <a:solidFill>
-            <a:srgbClr val="293036"/>
+            <a:srgbClr val="7D8FA3"/>
           </a:solidFill>
           <a:ln/>
         </p:spPr>
       </p:sp>
       <p:sp>
         <p:nvSpPr>
-          <p:cNvPr id="6" name="Shape 4"/>
-          <p:cNvSpPr/>
-          <p:nvPr/>
-        </p:nvSpPr>
-        <p:spPr>
-          <a:xfrm>
-            <a:off x="5397500" y="2825750"/>
-            <a:ext cx="1397000" cy="2381250"/>
+          <p:cNvPr id="8" name="Shape 6"/>
+          <p:cNvSpPr/>
+          <p:nvPr/>
+        </p:nvSpPr>
+        <p:spPr>
+          <a:xfrm>
+            <a:off x="4343400" y="3244850"/>
+            <a:ext cx="1270000" cy="2114550"/>
           </a:xfrm>
           <a:custGeom>
             <a:avLst/>
@@ -2438,44 +5130,44 @@
             <a:cxnLst/>
             <a:rect l="l" t="t" r="r" b="b"/>
             <a:pathLst>
-              <a:path w="1397000" h="2381250">
+              <a:path w="1270000" h="2114550">
                 <a:moveTo>
-                  <a:pt x="50800" y="0"/>
+                  <a:pt x="101600" y="0"/>
                 </a:moveTo>
                 <a:lnTo>
-                  <a:pt x="1346200" y="0"/>
+                  <a:pt x="1168400" y="0"/>
                 </a:lnTo>
-                <a:arcTo hR="50800" wR="50800" stAng="16200000" swAng="5400000"/>
+                <a:arcTo hR="101600" wR="101600" stAng="16200000" swAng="5400000"/>
                 <a:lnTo>
-                  <a:pt x="1397000" y="2381250"/>
+                  <a:pt x="1270000" y="2114550"/>
                 </a:lnTo>
                 <a:lnTo>
-                  <a:pt x="0" y="2381250"/>
+                  <a:pt x="0" y="2114550"/>
                 </a:lnTo>
                 <a:lnTo>
-                  <a:pt x="0" y="50800"/>
+                  <a:pt x="0" y="101600"/>
                 </a:lnTo>
-                <a:arcTo hR="50800" wR="50800" stAng="10800000" swAng="5400000"/>
+                <a:arcTo hR="101600" wR="101600" stAng="10800000" swAng="5400000"/>
                 <a:close/>
               </a:path>
             </a:pathLst>
           </a:custGeom>
           <a:solidFill>
-            <a:srgbClr val="293036"/>
+            <a:srgbClr val="7D8FA3"/>
           </a:solidFill>
           <a:ln/>
         </p:spPr>
       </p:sp>
       <p:sp>
         <p:nvSpPr>
-          <p:cNvPr id="7" name="Shape 5"/>
-          <p:cNvSpPr/>
-          <p:nvPr/>
-        </p:nvSpPr>
-        <p:spPr>
-          <a:xfrm>
-            <a:off x="8191500" y="2692400"/>
-            <a:ext cx="1397000" cy="2514600"/>
+          <p:cNvPr id="9" name="Shape 7"/>
+          <p:cNvSpPr/>
+          <p:nvPr/>
+        </p:nvSpPr>
+        <p:spPr>
+          <a:xfrm>
+            <a:off x="6578600" y="3124200"/>
+            <a:ext cx="1270000" cy="2235200"/>
           </a:xfrm>
           <a:custGeom>
             <a:avLst/>
@@ -2484,43 +5176,226 @@
             <a:cxnLst/>
             <a:rect l="l" t="t" r="r" b="b"/>
             <a:pathLst>
-              <a:path w="1397000" h="2514600">
+              <a:path w="1270000" h="2235200">
                 <a:moveTo>
-                  <a:pt x="50800" y="0"/>
+                  <a:pt x="101600" y="0"/>
                 </a:moveTo>
                 <a:lnTo>
-                  <a:pt x="1346200" y="0"/>
+                  <a:pt x="1168400" y="0"/>
                 </a:lnTo>
-                <a:arcTo hR="50800" wR="50800" stAng="16200000" swAng="5400000"/>
+                <a:arcTo hR="101600" wR="101600" stAng="16200000" swAng="5400000"/>
                 <a:lnTo>
-                  <a:pt x="1397000" y="2514600"/>
+                  <a:pt x="1270000" y="2235200"/>
                 </a:lnTo>
                 <a:lnTo>
-                  <a:pt x="0" y="2514600"/>
+                  <a:pt x="0" y="2235200"/>
                 </a:lnTo>
                 <a:lnTo>
-                  <a:pt x="0" y="50800"/>
+                  <a:pt x="0" y="101600"/>
                 </a:lnTo>
-                <a:arcTo hR="50800" wR="50800" stAng="10800000" swAng="5400000"/>
+                <a:arcTo hR="101600" wR="101600" stAng="10800000" swAng="5400000"/>
                 <a:close/>
               </a:path>
             </a:pathLst>
           </a:custGeom>
           <a:solidFill>
-            <a:srgbClr val="293036"/>
+            <a:srgbClr val="7D8FA3"/>
           </a:solidFill>
           <a:ln/>
         </p:spPr>
       </p:sp>
       <p:sp>
         <p:nvSpPr>
-          <p:cNvPr id="8" name="Shape 6"/>
-          <p:cNvSpPr/>
-          <p:nvPr/>
-        </p:nvSpPr>
-        <p:spPr>
-          <a:xfrm>
-            <a:off x="1625600" y="5207000"/>
+          <p:cNvPr id="10" name="Shape 8"/>
+          <p:cNvSpPr/>
+          <p:nvPr/>
+        </p:nvSpPr>
+        <p:spPr>
+          <a:xfrm>
+            <a:off x="8813800" y="4851400"/>
+            <a:ext cx="1270000" cy="508000"/>
+          </a:xfrm>
+          <a:custGeom>
+            <a:avLst/>
+            <a:gdLst/>
+            <a:ahLst/>
+            <a:cxnLst/>
+            <a:rect l="l" t="t" r="r" b="b"/>
+            <a:pathLst>
+              <a:path w="1270000" h="508000">
+                <a:moveTo>
+                  <a:pt x="101600" y="0"/>
+                </a:moveTo>
+                <a:lnTo>
+                  <a:pt x="1168400" y="0"/>
+                </a:lnTo>
+                <a:arcTo hR="101600" wR="101600" stAng="16200000" swAng="5400000"/>
+                <a:lnTo>
+                  <a:pt x="1270000" y="508000"/>
+                </a:lnTo>
+                <a:lnTo>
+                  <a:pt x="0" y="508000"/>
+                </a:lnTo>
+                <a:lnTo>
+                  <a:pt x="0" y="101600"/>
+                </a:lnTo>
+                <a:arcTo hR="101600" wR="101600" stAng="10800000" swAng="5400000"/>
+                <a:close/>
+              </a:path>
+            </a:pathLst>
+          </a:custGeom>
+          <a:solidFill>
+            <a:srgbClr val="00AEEA">
+              <a:alpha val="10000"/>
+            </a:srgbClr>
+          </a:solidFill>
+          <a:ln/>
+        </p:spPr>
+      </p:sp>
+      <p:sp>
+        <p:nvSpPr>
+          <p:cNvPr id="11" name="Shape 9"/>
+          <p:cNvSpPr/>
+          <p:nvPr/>
+        </p:nvSpPr>
+        <p:spPr>
+          <a:xfrm>
+            <a:off x="8813800" y="4857750"/>
+            <a:ext cx="1270000" cy="0"/>
+          </a:xfrm>
+          <a:prstGeom prst="line">
+            <a:avLst/>
+          </a:prstGeom>
+          <a:noFill/>
+          <a:ln w="12700">
+            <a:solidFill>
+              <a:srgbClr val="00AEEA"/>
+            </a:solidFill>
+            <a:prstDash val="dash"/>
+          </a:ln>
+        </p:spPr>
+      </p:sp>
+      <p:sp>
+        <p:nvSpPr>
+          <p:cNvPr id="12" name="Shape 10"/>
+          <p:cNvSpPr/>
+          <p:nvPr/>
+        </p:nvSpPr>
+        <p:spPr>
+          <a:xfrm>
+            <a:off x="10077450" y="4851400"/>
+            <a:ext cx="0" cy="508000"/>
+          </a:xfrm>
+          <a:prstGeom prst="line">
+            <a:avLst/>
+          </a:prstGeom>
+          <a:noFill/>
+          <a:ln w="12700">
+            <a:solidFill>
+              <a:srgbClr val="00AEEA"/>
+            </a:solidFill>
+            <a:prstDash val="dash"/>
+          </a:ln>
+        </p:spPr>
+      </p:sp>
+      <p:sp>
+        <p:nvSpPr>
+          <p:cNvPr id="13" name="Shape 11"/>
+          <p:cNvSpPr/>
+          <p:nvPr/>
+        </p:nvSpPr>
+        <p:spPr>
+          <a:xfrm>
+            <a:off x="8820150" y="4851400"/>
+            <a:ext cx="0" cy="508000"/>
+          </a:xfrm>
+          <a:prstGeom prst="line">
+            <a:avLst/>
+          </a:prstGeom>
+          <a:noFill/>
+          <a:ln w="12700">
+            <a:solidFill>
+              <a:srgbClr val="00AEEA"/>
+            </a:solidFill>
+            <a:prstDash val="dash"/>
+          </a:ln>
+        </p:spPr>
+      </p:sp>
+      <p:sp>
+        <p:nvSpPr>
+          <p:cNvPr id="14" name="Shape 12"/>
+          <p:cNvSpPr/>
+          <p:nvPr/>
+        </p:nvSpPr>
+        <p:spPr>
+          <a:xfrm>
+            <a:off x="8813800" y="4851400"/>
+            <a:ext cx="1270000" cy="508000"/>
+          </a:xfrm>
+          <a:custGeom>
+            <a:avLst/>
+            <a:gdLst/>
+            <a:ahLst/>
+            <a:cxnLst/>
+            <a:rect l="l" t="t" r="r" b="b"/>
+            <a:pathLst>
+              <a:path w="1270000" h="508000">
+                <a:moveTo>
+                  <a:pt x="101600" y="0"/>
+                </a:moveTo>
+                <a:lnTo>
+                  <a:pt x="1168400" y="0"/>
+                </a:lnTo>
+                <a:arcTo hR="101600" wR="101600" stAng="16200000" swAng="5400000"/>
+                <a:lnTo>
+                  <a:pt x="1270000" y="508000"/>
+                </a:lnTo>
+                <a:lnTo>
+                  <a:pt x="0" y="508000"/>
+                </a:lnTo>
+                <a:lnTo>
+                  <a:pt x="0" y="101600"/>
+                </a:lnTo>
+                <a:arcTo hR="101600" wR="101600" stAng="10800000" swAng="5400000"/>
+                <a:close/>
+              </a:path>
+            </a:pathLst>
+          </a:custGeom>
+          <a:gradFill rotWithShape="1">
+            <a:gsLst>
+              <a:gs pos="0">
+                <a:srgbClr val="006CE6"/>
+              </a:gs>
+              <a:gs pos="55000">
+                <a:srgbClr val="00AEEA"/>
+              </a:gs>
+              <a:gs pos="100000">
+                <a:srgbClr val="00AEEA">
+                  <a:alpha val="0"/>
+                </a:srgbClr>
+              </a:gs>
+            </a:gsLst>
+            <a:lin ang="16200000" scaled="0"/>
+          </a:gradFill>
+          <a:ln/>
+          <a:effectLst>
+            <a:outerShdw sx="100000" sy="100000" kx="0" ky="0" algn="bl" rotWithShape="0" blurRad="203200" dist="152400" dir="5400000">
+              <a:srgbClr val="006CE6">
+                <a:alpha val="45000"/>
+              </a:srgbClr>
+            </a:outerShdw>
+          </a:effectLst>
+        </p:spPr>
+      </p:sp>
+      <p:sp>
+        <p:nvSpPr>
+          <p:cNvPr id="15" name="Shape 13"/>
+          <p:cNvSpPr/>
+          <p:nvPr/>
+        </p:nvSpPr>
+        <p:spPr>
+          <a:xfrm>
+            <a:off x="1625600" y="5359400"/>
             <a:ext cx="8940800" cy="12700"/>
           </a:xfrm>
           <a:prstGeom prst="rect">
@@ -2534,13 +5409,13 @@
       </p:sp>
       <p:sp>
         <p:nvSpPr>
-          <p:cNvPr id="9" name="Text 7"/>
-          <p:cNvSpPr/>
-          <p:nvPr/>
-        </p:nvSpPr>
-        <p:spPr>
-          <a:xfrm>
-            <a:off x="2255520" y="2768600"/>
+          <p:cNvPr id="16" name="Text 14"/>
+          <p:cNvSpPr/>
+          <p:nvPr/>
+        </p:nvSpPr>
+        <p:spPr>
+          <a:xfrm>
+            <a:off x="1696720" y="3143250"/>
             <a:ext cx="2092960" cy="360660"/>
           </a:xfrm>
           <a:prstGeom prst="rect">
@@ -2578,13 +5453,13 @@
       </p:sp>
       <p:sp>
         <p:nvSpPr>
-          <p:cNvPr id="10" name="Text 8"/>
-          <p:cNvSpPr/>
-          <p:nvPr/>
-        </p:nvSpPr>
-        <p:spPr>
-          <a:xfrm>
-            <a:off x="5049520" y="2387600"/>
+          <p:cNvPr id="17" name="Text 15"/>
+          <p:cNvSpPr/>
+          <p:nvPr/>
+        </p:nvSpPr>
+        <p:spPr>
+          <a:xfrm>
+            <a:off x="3931920" y="2806700"/>
             <a:ext cx="2092960" cy="360660"/>
           </a:xfrm>
           <a:prstGeom prst="rect">
@@ -2622,13 +5497,13 @@
       </p:sp>
       <p:sp>
         <p:nvSpPr>
-          <p:cNvPr id="11" name="Text 9"/>
-          <p:cNvSpPr/>
-          <p:nvPr/>
-        </p:nvSpPr>
-        <p:spPr>
-          <a:xfrm>
-            <a:off x="7843520" y="2254250"/>
+          <p:cNvPr id="18" name="Text 16"/>
+          <p:cNvSpPr/>
+          <p:nvPr/>
+        </p:nvSpPr>
+        <p:spPr>
+          <a:xfrm>
+            <a:off x="6167120" y="2686050"/>
             <a:ext cx="2092960" cy="360660"/>
           </a:xfrm>
           <a:prstGeom prst="rect">
@@ -2664,15 +5539,112 @@
           </a:p>
         </p:txBody>
       </p:sp>
-      <p:sp>
-        <p:nvSpPr>
-          <p:cNvPr id="12" name="Text 10"/>
-          <p:cNvSpPr/>
-          <p:nvPr/>
-        </p:nvSpPr>
-        <p:spPr>
-          <a:xfrm>
-            <a:off x="2255520" y="5321300"/>
+      <p:pic>
+        <p:nvPicPr>
+          <p:cNvPr id="19" name="Image 0" descr="arrow-down">    </p:cNvPr>
+          <p:cNvPicPr>
+            <a:picLocks noChangeAspect="1"/>
+          </p:cNvPicPr>
+          <p:nvPr/>
+        </p:nvPicPr>
+        <p:blipFill>
+          <a:blip r:embed="rId1"/>
+          <a:srcRect l="0" r="0" t="0" b="0"/>
+          <a:stretch/>
+        </p:blipFill>
+        <p:spPr>
+          <a:xfrm>
+            <a:off x="9385300" y="4470400"/>
+            <a:ext cx="127000" cy="254000"/>
+          </a:xfrm>
+          <a:prstGeom prst="rect">
+            <a:avLst/>
+          </a:prstGeom>
+        </p:spPr>
+      </p:pic>
+      <p:sp>
+        <p:nvSpPr>
+          <p:cNvPr id="20" name="Text 17"/>
+          <p:cNvSpPr/>
+          <p:nvPr/>
+        </p:nvSpPr>
+        <p:spPr>
+          <a:xfrm>
+            <a:off x="8750300" y="4013200"/>
+            <a:ext cx="1397000" cy="365720"/>
+          </a:xfrm>
+          <a:custGeom>
+            <a:avLst/>
+            <a:gdLst/>
+            <a:ahLst/>
+            <a:cxnLst/>
+            <a:rect l="l" t="t" r="r" b="b"/>
+            <a:pathLst>
+              <a:path w="1397000" h="365720">
+                <a:moveTo>
+                  <a:pt x="182860" y="0"/>
+                </a:moveTo>
+                <a:lnTo>
+                  <a:pt x="1214140" y="0"/>
+                </a:lnTo>
+                <a:arcTo hR="182860" wR="182860" stAng="16200000" swAng="5400000"/>
+                <a:lnTo>
+                  <a:pt x="1397000" y="182860"/>
+                </a:lnTo>
+                <a:arcTo hR="182860" wR="182860" stAng="0" swAng="5400000"/>
+                <a:lnTo>
+                  <a:pt x="182860" y="365720"/>
+                </a:lnTo>
+                <a:arcTo hR="182860" wR="182860" stAng="5400000" swAng="5400000"/>
+                <a:lnTo>
+                  <a:pt x="0" y="182860"/>
+                </a:lnTo>
+                <a:arcTo hR="182860" wR="182860" stAng="10800000" swAng="5400000"/>
+                <a:close/>
+              </a:path>
+            </a:pathLst>
+          </a:custGeom>
+          <a:solidFill>
+            <a:srgbClr val="006CE6"/>
+          </a:solidFill>
+          <a:ln/>
+        </p:spPr>
+        <p:txBody>
+          <a:bodyPr wrap="square" lIns="76200" tIns="50800" rIns="76200" bIns="25400" rtlCol="0" anchor="t">
+            <a:normAutofit/>
+          </a:bodyPr>
+          <a:lstStyle/>
+          <a:p>
+            <a:pPr algn="ctr" indent="0" marL="0">
+              <a:lnSpc>
+                <a:spcPts val="2080"/>
+              </a:lnSpc>
+              <a:buNone/>
+            </a:pPr>
+            <a:r>
+              <a:rPr lang="en-US" sz="1600" b="1" dirty="0">
+                <a:solidFill>
+                  <a:srgbClr val="FFFFFF"/>
+                </a:solidFill>
+                <a:latin typeface="Roboto Flex" pitchFamily="34" charset="0"/>
+                <a:ea typeface="Roboto Flex" pitchFamily="34" charset="-122"/>
+                <a:cs typeface="Roboto Flex" pitchFamily="34" charset="-120"/>
+              </a:rPr>
+              <a:t>alla 10 €</a:t>
+            </a:r>
+            <a:endParaRPr lang="en-US" sz="1600" dirty="0"/>
+          </a:p>
+        </p:txBody>
+      </p:sp>
+      <p:sp>
+        <p:nvSpPr>
+          <p:cNvPr id="21" name="Text 18"/>
+          <p:cNvSpPr/>
+          <p:nvPr/>
+        </p:nvSpPr>
+        <p:spPr>
+          <a:xfrm>
+            <a:off x="1696720" y="5473700"/>
             <a:ext cx="2092960" cy="289520"/>
           </a:xfrm>
           <a:prstGeom prst="rect">
@@ -2710,13 +5682,13 @@
       </p:sp>
       <p:sp>
         <p:nvSpPr>
-          <p:cNvPr id="13" name="Text 11"/>
-          <p:cNvSpPr/>
-          <p:nvPr/>
-        </p:nvSpPr>
-        <p:spPr>
-          <a:xfrm>
-            <a:off x="5049520" y="5321300"/>
+          <p:cNvPr id="22" name="Text 19"/>
+          <p:cNvSpPr/>
+          <p:nvPr/>
+        </p:nvSpPr>
+        <p:spPr>
+          <a:xfrm>
+            <a:off x="3931920" y="5473700"/>
             <a:ext cx="2092960" cy="289520"/>
           </a:xfrm>
           <a:prstGeom prst="rect">
@@ -2754,13 +5726,13 @@
       </p:sp>
       <p:sp>
         <p:nvSpPr>
-          <p:cNvPr id="14" name="Text 12"/>
-          <p:cNvSpPr/>
-          <p:nvPr/>
-        </p:nvSpPr>
-        <p:spPr>
-          <a:xfrm>
-            <a:off x="7843520" y="5321300"/>
+          <p:cNvPr id="23" name="Text 20"/>
+          <p:cNvSpPr/>
+          <p:nvPr/>
+        </p:nvSpPr>
+        <p:spPr>
+          <a:xfrm>
+            <a:off x="6167120" y="5473700"/>
             <a:ext cx="2092960" cy="289520"/>
           </a:xfrm>
           <a:prstGeom prst="rect">
@@ -2798,14 +5770,58 @@
       </p:sp>
       <p:sp>
         <p:nvSpPr>
-          <p:cNvPr id="15" name="Text 13"/>
+          <p:cNvPr id="24" name="Text 21"/>
+          <p:cNvSpPr/>
+          <p:nvPr/>
+        </p:nvSpPr>
+        <p:spPr>
+          <a:xfrm>
+            <a:off x="8402320" y="5473700"/>
+            <a:ext cx="2092960" cy="289520"/>
+          </a:xfrm>
+          <a:prstGeom prst="rect">
+            <a:avLst/>
+          </a:prstGeom>
+          <a:noFill/>
+          <a:ln/>
+        </p:spPr>
+        <p:txBody>
+          <a:bodyPr wrap="square" lIns="0" tIns="0" rIns="0" bIns="0" rtlCol="0" anchor="t">
+            <a:normAutofit/>
+          </a:bodyPr>
+          <a:lstStyle/>
+          <a:p>
+            <a:pPr algn="ctr" indent="0" marL="0">
+              <a:lnSpc>
+                <a:spcPts val="2080"/>
+              </a:lnSpc>
+              <a:buNone/>
+            </a:pPr>
+            <a:r>
+              <a:rPr lang="en-US" sz="1600" b="1" dirty="0">
+                <a:solidFill>
+                  <a:srgbClr val="006CE6"/>
+                </a:solidFill>
+                <a:latin typeface="Roboto Flex" pitchFamily="34" charset="0"/>
+                <a:ea typeface="Roboto Flex" pitchFamily="34" charset="-122"/>
+                <a:cs typeface="Roboto Flex" pitchFamily="34" charset="-120"/>
+              </a:rPr>
+              <a:t>Tuleva Kogum</a:t>
+            </a:r>
+            <a:endParaRPr lang="en-US" sz="1600" dirty="0"/>
+          </a:p>
+        </p:txBody>
+      </p:sp>
+      <p:sp>
+        <p:nvSpPr>
+          <p:cNvPr id="25" name="Text 22"/>
           <p:cNvSpPr/>
           <p:nvPr/>
         </p:nvSpPr>
         <p:spPr>
           <a:xfrm>
             <a:off x="812800" y="6238280"/>
-            <a:ext cx="6369427" cy="238720"/>
+            <a:ext cx="7962126" cy="238720"/>
           </a:xfrm>
           <a:prstGeom prst="rect">
             <a:avLst/>
@@ -2834,7 +5850,7 @@
                 <a:ea typeface="Roboto Flex" pitchFamily="34" charset="-122"/>
                 <a:cs typeface="Roboto Flex" pitchFamily="34" charset="-120"/>
               </a:rPr>
-              <a:t>Tele2 Piiramatu Eesti, Telia Piiramatu, Elisa Võimas 5G+ · hinnad 27.09–10.10.2026</a:t>
+              <a:t>Tavahind ilma sidumiseta 27.09–10.10.2026 · TTJA 2025 · Tuleva liikmeküsitlus 2026 · Kogum: eesmärk</a:t>
             </a:r>
             <a:endParaRPr lang="en-US" sz="1200" dirty="0"/>
           </a:p>
@@ -2842,7 +5858,7 @@
       </p:sp>
       <p:sp>
         <p:nvSpPr>
-          <p:cNvPr id="16" name="Text 14"/>
+          <p:cNvPr id="26" name="Text 23"/>
           <p:cNvSpPr/>
           <p:nvPr/>
         </p:nvSpPr>
@@ -2895,6 +5911,194 @@
 <file path=ppt/slides/slide3.xml><?xml version="1.0" encoding="utf-8"?>
 <p:sld xmlns:a="http://schemas.openxmlformats.org/drawingml/2006/main" xmlns:r="http://schemas.openxmlformats.org/officeDocument/2006/relationships" xmlns:p="http://schemas.openxmlformats.org/presentationml/2006/main">
   <p:cSld name="Slide 3">
+    <p:bg>
+      <p:bgPr>
+        <a:solidFill>
+          <a:srgbClr val="002F63"/>
+        </a:solidFill>
+      </p:bgPr>
+    </p:bg>
+    <p:spTree>
+      <p:nvGrpSpPr>
+        <p:cNvPr id="1" name=""/>
+        <p:cNvGrpSpPr/>
+        <p:nvPr/>
+      </p:nvGrpSpPr>
+      <p:grpSpPr>
+        <a:xfrm>
+          <a:off x="0" y="0"/>
+          <a:ext cx="0" cy="0"/>
+          <a:chOff x="0" y="0"/>
+          <a:chExt cx="0" cy="0"/>
+        </a:xfrm>
+      </p:grpSpPr>
+      <p:sp>
+        <p:nvSpPr>
+          <p:cNvPr id="2" name="Shape 0"/>
+          <p:cNvSpPr/>
+          <p:nvPr/>
+        </p:nvSpPr>
+        <p:spPr>
+          <a:xfrm>
+            <a:off x="812800" y="2459980"/>
+            <a:ext cx="762000" cy="50800"/>
+          </a:xfrm>
+          <a:prstGeom prst="roundRect">
+            <a:avLst>
+              <a:gd name="adj" fmla="val 50000"/>
+            </a:avLst>
+          </a:prstGeom>
+          <a:solidFill>
+            <a:srgbClr val="00AEEA"/>
+          </a:solidFill>
+          <a:ln/>
+        </p:spPr>
+      </p:sp>
+      <p:sp>
+        <p:nvSpPr>
+          <p:cNvPr id="3" name="Text 1"/>
+          <p:cNvSpPr/>
+          <p:nvPr>
+            <p:ph type="title"/>
+          </p:nvPr>
+        </p:nvSpPr>
+        <p:spPr>
+          <a:xfrm>
+            <a:off x="812800" y="2713980"/>
+            <a:ext cx="10883392" cy="1143000"/>
+          </a:xfrm>
+          <a:prstGeom prst="rect">
+            <a:avLst/>
+          </a:prstGeom>
+          <a:noFill/>
+          <a:ln/>
+        </p:spPr>
+        <p:txBody>
+          <a:bodyPr wrap="square" lIns="0" tIns="0" rIns="0" bIns="0" rtlCol="0" anchor="t">
+            <a:normAutofit/>
+          </a:bodyPr>
+          <a:lstStyle/>
+          <a:p>
+            <a:pPr algn="l" indent="0" marL="0">
+              <a:lnSpc>
+                <a:spcPts val="8800"/>
+              </a:lnSpc>
+              <a:buNone/>
+            </a:pPr>
+            <a:r>
+              <a:rPr lang="en-US" sz="8000" b="1" i="0" dirty="0">
+                <a:solidFill>
+                  <a:srgbClr val="FFFFFF"/>
+                </a:solidFill>
+                <a:latin typeface="Merriweather" pitchFamily="18" charset="0"/>
+                <a:ea typeface="Merriweather" pitchFamily="18" charset="-122"/>
+                <a:cs typeface="Merriweather" pitchFamily="18" charset="-120"/>
+              </a:rPr>
+              <a:t>Demo</a:t>
+            </a:r>
+            <a:endParaRPr lang="en-US" sz="8000" dirty="0"/>
+          </a:p>
+        </p:txBody>
+      </p:sp>
+      <p:sp>
+        <p:nvSpPr>
+          <p:cNvPr id="4" name="Text 2"/>
+          <p:cNvSpPr/>
+          <p:nvPr/>
+        </p:nvSpPr>
+        <p:spPr>
+          <a:xfrm>
+            <a:off x="812800" y="4034780"/>
+            <a:ext cx="10883392" cy="388590"/>
+          </a:xfrm>
+          <a:prstGeom prst="rect">
+            <a:avLst/>
+          </a:prstGeom>
+          <a:noFill/>
+          <a:ln/>
+        </p:spPr>
+        <p:txBody>
+          <a:bodyPr wrap="square" lIns="0" tIns="0" rIns="0" bIns="0" rtlCol="0" anchor="t">
+            <a:normAutofit/>
+          </a:bodyPr>
+          <a:lstStyle/>
+          <a:p>
+            <a:pPr algn="l" indent="0" marL="0">
+              <a:lnSpc>
+                <a:spcPts val="2860"/>
+              </a:lnSpc>
+              <a:buNone/>
+            </a:pPr>
+            <a:r>
+              <a:rPr lang="en-US" sz="2200" dirty="0">
+                <a:solidFill>
+                  <a:srgbClr val="A9C6E2"/>
+                </a:solidFill>
+                <a:latin typeface="Roboto Flex" pitchFamily="34" charset="0"/>
+                <a:ea typeface="Roboto Flex" pitchFamily="34" charset="-122"/>
+                <a:cs typeface="Roboto Flex" pitchFamily="34" charset="-120"/>
+              </a:rPr>
+              <a:t>Kadri vahetab paketi ühe allkirjaga</a:t>
+            </a:r>
+            <a:endParaRPr lang="en-US" sz="2200" dirty="0"/>
+          </a:p>
+        </p:txBody>
+      </p:sp>
+      <p:sp>
+        <p:nvSpPr>
+          <p:cNvPr id="5" name="Text 3"/>
+          <p:cNvSpPr/>
+          <p:nvPr/>
+        </p:nvSpPr>
+        <p:spPr>
+          <a:xfrm>
+            <a:off x="812800" y="6238280"/>
+            <a:ext cx="10883392" cy="238720"/>
+          </a:xfrm>
+          <a:prstGeom prst="rect">
+            <a:avLst/>
+          </a:prstGeom>
+          <a:noFill/>
+          <a:ln/>
+        </p:spPr>
+        <p:txBody>
+          <a:bodyPr wrap="square" lIns="0" tIns="0" rIns="0" bIns="0" rtlCol="0" anchor="t">
+            <a:normAutofit/>
+          </a:bodyPr>
+          <a:lstStyle/>
+          <a:p>
+            <a:pPr algn="l" indent="0" marL="0">
+              <a:lnSpc>
+                <a:spcPts val="1680"/>
+              </a:lnSpc>
+              <a:buNone/>
+            </a:pPr>
+            <a:r>
+              <a:rPr lang="en-US" sz="1200" dirty="0">
+                <a:solidFill>
+                  <a:srgbClr val="8FADCA"/>
+                </a:solidFill>
+                <a:latin typeface="Roboto Flex" pitchFamily="34" charset="0"/>
+                <a:ea typeface="Roboto Flex" pitchFamily="34" charset="-122"/>
+                <a:cs typeface="Roboto Flex" pitchFamily="34" charset="-120"/>
+              </a:rPr>
+              <a:t>Prototüüp · andmed on näidis</a:t>
+            </a:r>
+            <a:endParaRPr lang="en-US" sz="1200" dirty="0"/>
+          </a:p>
+        </p:txBody>
+      </p:sp>
+    </p:spTree>
+  </p:cSld>
+  <p:clrMapOvr>
+    <a:masterClrMapping/>
+  </p:clrMapOvr>
+</p:sld>
+</file>
+
+<file path=ppt/slides/slide4.xml><?xml version="1.0" encoding="utf-8"?>
+<p:sld xmlns:a="http://schemas.openxmlformats.org/drawingml/2006/main" xmlns:r="http://schemas.openxmlformats.org/officeDocument/2006/relationships" xmlns:p="http://schemas.openxmlformats.org/presentationml/2006/main">
+  <p:cSld name="Slide 4">
     <p:bg>
       <p:bgPr>
         <a:solidFill>
@@ -2956,7 +6160,7 @@
                 <a:ea typeface="Merriweather" pitchFamily="18" charset="-122"/>
                 <a:cs typeface="Merriweather" pitchFamily="18" charset="-120"/>
               </a:rPr>
-              <a:t>Üks hange, kord aastas</a:t>
+              <a:t>Miks Tuleva?</a:t>
             </a:r>
             <a:endParaRPr lang="en-US" sz="3600" dirty="0"/>
           </a:p>
@@ -2970,12 +6174,12 @@
         </p:nvSpPr>
         <p:spPr>
           <a:xfrm>
-            <a:off x="812800" y="2900660"/>
-            <a:ext cx="3318917" cy="1605260"/>
+            <a:off x="812800" y="2565400"/>
+            <a:ext cx="3318917" cy="2275780"/>
           </a:xfrm>
           <a:prstGeom prst="roundRect">
             <a:avLst>
-              <a:gd name="adj" fmla="val 6329"/>
+              <a:gd name="adj" fmla="val 4464"/>
             </a:avLst>
           </a:prstGeom>
           <a:solidFill>
@@ -2984,63 +6188,38 @@
           <a:ln/>
         </p:spPr>
       </p:sp>
-      <p:sp>
-        <p:nvSpPr>
-          <p:cNvPr id="4" name="Text 2"/>
-          <p:cNvSpPr/>
-          <p:nvPr/>
-        </p:nvSpPr>
-        <p:spPr>
-          <a:xfrm>
-            <a:off x="1117600" y="3205460"/>
-            <a:ext cx="457200" cy="457200"/>
-          </a:xfrm>
-          <a:prstGeom prst="roundRect">
-            <a:avLst>
-              <a:gd name="adj" fmla="val 50000"/>
-            </a:avLst>
-          </a:prstGeom>
-          <a:solidFill>
-            <a:srgbClr val="CCEDFA"/>
-          </a:solidFill>
-          <a:ln/>
-        </p:spPr>
-        <p:txBody>
-          <a:bodyPr wrap="square" lIns="0" tIns="0" rIns="0" bIns="0" rtlCol="0" anchor="ctr">
-            <a:normAutofit/>
-          </a:bodyPr>
-          <a:lstStyle/>
-          <a:p>
-            <a:pPr algn="ctr" indent="0" marL="0">
-              <a:lnSpc>
-                <a:spcPts val="2240"/>
-              </a:lnSpc>
-              <a:buNone/>
-            </a:pPr>
-            <a:r>
-              <a:rPr lang="en-US" sz="1600" b="1" dirty="0">
-                <a:solidFill>
-                  <a:srgbClr val="002F63"/>
-                </a:solidFill>
-                <a:latin typeface="Roboto Flex" pitchFamily="34" charset="0"/>
-                <a:ea typeface="Roboto Flex" pitchFamily="34" charset="-122"/>
-                <a:cs typeface="Roboto Flex" pitchFamily="34" charset="-120"/>
-              </a:rPr>
-              <a:t>1</a:t>
-            </a:r>
-            <a:endParaRPr lang="en-US" sz="1600" dirty="0"/>
-          </a:p>
-        </p:txBody>
-      </p:sp>
-      <p:sp>
-        <p:nvSpPr>
-          <p:cNvPr id="5" name="Text 3"/>
-          <p:cNvSpPr/>
-          <p:nvPr/>
-        </p:nvSpPr>
-        <p:spPr>
-          <a:xfrm>
-            <a:off x="1117600" y="3865860"/>
+      <p:pic>
+        <p:nvPicPr>
+          <p:cNvPr id="4" name="Image 0" descr="Search">    </p:cNvPr>
+          <p:cNvPicPr>
+            <a:picLocks noChangeAspect="1"/>
+          </p:cNvPicPr>
+          <p:nvPr/>
+        </p:nvPicPr>
+        <p:blipFill>
+          <a:blip r:embed="rId1"/>
+          <a:srcRect l="0" r="0" t="0" b="0"/>
+          <a:stretch/>
+        </p:blipFill>
+        <p:spPr>
+          <a:xfrm>
+            <a:off x="1117600" y="2870200"/>
+            <a:ext cx="406400" cy="406400"/>
+          </a:xfrm>
+          <a:prstGeom prst="rect">
+            <a:avLst/>
+          </a:prstGeom>
+        </p:spPr>
+      </p:pic>
+      <p:sp>
+        <p:nvSpPr>
+          <p:cNvPr id="5" name="Text 2"/>
+          <p:cNvSpPr/>
+          <p:nvPr/>
+        </p:nvSpPr>
+        <p:spPr>
+          <a:xfrm>
+            <a:off x="1117600" y="3429000"/>
             <a:ext cx="2790596" cy="360660"/>
           </a:xfrm>
           <a:prstGeom prst="rect">
@@ -3070,7 +6249,7 @@
                 <a:ea typeface="Merriweather" pitchFamily="18" charset="-122"/>
                 <a:cs typeface="Merriweather" pitchFamily="18" charset="-120"/>
               </a:rPr>
-              <a:t>Registreeru</a:t>
+              <a:t>Tasud nähtavaks</a:t>
             </a:r>
             <a:endParaRPr lang="en-US" sz="2200" dirty="0"/>
           </a:p>
@@ -3078,69 +6257,43 @@
       </p:sp>
       <p:sp>
         <p:nvSpPr>
-          <p:cNvPr id="6" name="Shape 4"/>
-          <p:cNvSpPr/>
-          <p:nvPr/>
-        </p:nvSpPr>
-        <p:spPr>
-          <a:xfrm>
-            <a:off x="4436517" y="2900660"/>
-            <a:ext cx="3318966" cy="1605260"/>
-          </a:xfrm>
-          <a:prstGeom prst="roundRect">
-            <a:avLst>
-              <a:gd name="adj" fmla="val 6329"/>
-            </a:avLst>
-          </a:prstGeom>
-          <a:solidFill>
-            <a:srgbClr val="EDF7FD"/>
-          </a:solidFill>
-          <a:ln/>
-        </p:spPr>
-      </p:sp>
-      <p:sp>
-        <p:nvSpPr>
-          <p:cNvPr id="7" name="Text 5"/>
-          <p:cNvSpPr/>
-          <p:nvPr/>
-        </p:nvSpPr>
-        <p:spPr>
-          <a:xfrm>
-            <a:off x="4741317" y="3205460"/>
-            <a:ext cx="457200" cy="457200"/>
-          </a:xfrm>
-          <a:prstGeom prst="roundRect">
-            <a:avLst>
-              <a:gd name="adj" fmla="val 50000"/>
-            </a:avLst>
-          </a:prstGeom>
-          <a:solidFill>
-            <a:srgbClr val="CCEDFA"/>
-          </a:solidFill>
-          <a:ln/>
-        </p:spPr>
-        <p:txBody>
-          <a:bodyPr wrap="square" lIns="0" tIns="0" rIns="0" bIns="0" rtlCol="0" anchor="ctr">
+          <p:cNvPr id="6" name="Text 3"/>
+          <p:cNvSpPr/>
+          <p:nvPr/>
+        </p:nvSpPr>
+        <p:spPr>
+          <a:xfrm>
+            <a:off x="1117600" y="3916660"/>
+            <a:ext cx="2790596" cy="309860"/>
+          </a:xfrm>
+          <a:prstGeom prst="rect">
+            <a:avLst/>
+          </a:prstGeom>
+          <a:noFill/>
+          <a:ln/>
+        </p:spPr>
+        <p:txBody>
+          <a:bodyPr wrap="square" lIns="0" tIns="0" rIns="0" bIns="0" rtlCol="0" anchor="t">
             <a:normAutofit/>
           </a:bodyPr>
           <a:lstStyle/>
           <a:p>
-            <a:pPr algn="ctr" indent="0" marL="0">
+            <a:pPr algn="l" indent="0" marL="0">
               <a:lnSpc>
                 <a:spcPts val="2240"/>
               </a:lnSpc>
               <a:buNone/>
             </a:pPr>
             <a:r>
-              <a:rPr lang="en-US" sz="1600" b="1" dirty="0">
+              <a:rPr lang="en-US" sz="1600" dirty="0">
                 <a:solidFill>
-                  <a:srgbClr val="002F63"/>
+                  <a:srgbClr val="293036"/>
                 </a:solidFill>
                 <a:latin typeface="Roboto Flex" pitchFamily="34" charset="0"/>
                 <a:ea typeface="Roboto Flex" pitchFamily="34" charset="-122"/>
                 <a:cs typeface="Roboto Flex" pitchFamily="34" charset="-120"/>
               </a:rPr>
-              <a:t>2</a:t>
+              <a:t>Tegime seda pensionifondidega</a:t>
             </a:r>
             <a:endParaRPr lang="en-US" sz="1600" dirty="0"/>
           </a:p>
@@ -3148,14 +6301,59 @@
       </p:sp>
       <p:sp>
         <p:nvSpPr>
-          <p:cNvPr id="8" name="Text 6"/>
-          <p:cNvSpPr/>
-          <p:nvPr/>
-        </p:nvSpPr>
-        <p:spPr>
-          <a:xfrm>
-            <a:off x="4741317" y="3865860"/>
-            <a:ext cx="3014166" cy="360660"/>
+          <p:cNvPr id="7" name="Shape 4"/>
+          <p:cNvSpPr/>
+          <p:nvPr/>
+        </p:nvSpPr>
+        <p:spPr>
+          <a:xfrm>
+            <a:off x="4436517" y="2565400"/>
+            <a:ext cx="3318966" cy="2275780"/>
+          </a:xfrm>
+          <a:prstGeom prst="roundRect">
+            <a:avLst>
+              <a:gd name="adj" fmla="val 4464"/>
+            </a:avLst>
+          </a:prstGeom>
+          <a:solidFill>
+            <a:srgbClr val="EDF7FD"/>
+          </a:solidFill>
+          <a:ln/>
+        </p:spPr>
+      </p:sp>
+      <p:pic>
+        <p:nvPicPr>
+          <p:cNvPr id="8" name="Image 1" descr="Trust">    </p:cNvPr>
+          <p:cNvPicPr>
+            <a:picLocks noChangeAspect="1"/>
+          </p:cNvPicPr>
+          <p:nvPr/>
+        </p:nvPicPr>
+        <p:blipFill>
+          <a:blip r:embed="rId2"/>
+          <a:srcRect l="0" r="0" t="0" b="0"/>
+          <a:stretch/>
+        </p:blipFill>
+        <p:spPr>
+          <a:xfrm>
+            <a:off x="4741317" y="2870200"/>
+            <a:ext cx="406400" cy="406400"/>
+          </a:xfrm>
+          <a:prstGeom prst="rect">
+            <a:avLst/>
+          </a:prstGeom>
+        </p:spPr>
+      </p:pic>
+      <p:sp>
+        <p:nvSpPr>
+          <p:cNvPr id="9" name="Text 5"/>
+          <p:cNvSpPr/>
+          <p:nvPr/>
+        </p:nvSpPr>
+        <p:spPr>
+          <a:xfrm>
+            <a:off x="4741317" y="3429000"/>
+            <a:ext cx="2790647" cy="695920"/>
           </a:xfrm>
           <a:prstGeom prst="rect">
             <a:avLst/>
@@ -3184,7 +6382,7 @@
                 <a:ea typeface="Merriweather" pitchFamily="18" charset="-122"/>
                 <a:cs typeface="Merriweather" pitchFamily="18" charset="-120"/>
               </a:rPr>
-              <a:t>Tuleva küsib hinna</a:t>
+              <a:t>Ühistu, mitte müüja</a:t>
             </a:r>
             <a:endParaRPr lang="en-US" sz="2200" dirty="0"/>
           </a:p>
@@ -3192,69 +6390,43 @@
       </p:sp>
       <p:sp>
         <p:nvSpPr>
-          <p:cNvPr id="9" name="Shape 7"/>
-          <p:cNvSpPr/>
-          <p:nvPr/>
-        </p:nvSpPr>
-        <p:spPr>
-          <a:xfrm>
-            <a:off x="8060283" y="2900660"/>
-            <a:ext cx="3318917" cy="1605260"/>
-          </a:xfrm>
-          <a:prstGeom prst="roundRect">
-            <a:avLst>
-              <a:gd name="adj" fmla="val 6329"/>
-            </a:avLst>
-          </a:prstGeom>
-          <a:solidFill>
-            <a:srgbClr val="EDF7FD"/>
-          </a:solidFill>
-          <a:ln/>
-        </p:spPr>
-      </p:sp>
-      <p:sp>
-        <p:nvSpPr>
-          <p:cNvPr id="10" name="Text 8"/>
-          <p:cNvSpPr/>
-          <p:nvPr/>
-        </p:nvSpPr>
-        <p:spPr>
-          <a:xfrm>
-            <a:off x="8365083" y="3205460"/>
-            <a:ext cx="457200" cy="457200"/>
-          </a:xfrm>
-          <a:prstGeom prst="roundRect">
-            <a:avLst>
-              <a:gd name="adj" fmla="val 50000"/>
-            </a:avLst>
-          </a:prstGeom>
-          <a:solidFill>
-            <a:srgbClr val="CCEDFA"/>
-          </a:solidFill>
-          <a:ln/>
-        </p:spPr>
-        <p:txBody>
-          <a:bodyPr wrap="square" lIns="0" tIns="0" rIns="0" bIns="0" rtlCol="0" anchor="ctr">
+          <p:cNvPr id="10" name="Text 6"/>
+          <p:cNvSpPr/>
+          <p:nvPr/>
+        </p:nvSpPr>
+        <p:spPr>
+          <a:xfrm>
+            <a:off x="4741317" y="4251920"/>
+            <a:ext cx="2790647" cy="309860"/>
+          </a:xfrm>
+          <a:prstGeom prst="rect">
+            <a:avLst/>
+          </a:prstGeom>
+          <a:noFill/>
+          <a:ln/>
+        </p:spPr>
+        <p:txBody>
+          <a:bodyPr wrap="square" lIns="0" tIns="0" rIns="0" bIns="0" rtlCol="0" anchor="t">
             <a:normAutofit/>
           </a:bodyPr>
           <a:lstStyle/>
           <a:p>
-            <a:pPr algn="ctr" indent="0" marL="0">
+            <a:pPr algn="l" indent="0" marL="0">
               <a:lnSpc>
                 <a:spcPts val="2240"/>
               </a:lnSpc>
               <a:buNone/>
             </a:pPr>
             <a:r>
-              <a:rPr lang="en-US" sz="1600" b="1" dirty="0">
+              <a:rPr lang="en-US" sz="1600" dirty="0">
                 <a:solidFill>
-                  <a:srgbClr val="002F63"/>
+                  <a:srgbClr val="293036"/>
                 </a:solidFill>
                 <a:latin typeface="Roboto Flex" pitchFamily="34" charset="0"/>
                 <a:ea typeface="Roboto Flex" pitchFamily="34" charset="-122"/>
                 <a:cs typeface="Roboto Flex" pitchFamily="34" charset="-120"/>
               </a:rPr>
-              <a:t>3</a:t>
+              <a:t>Fikseeritud tasu, kõigilt sama</a:t>
             </a:r>
             <a:endParaRPr lang="en-US" sz="1600" dirty="0"/>
           </a:p>
@@ -3262,13 +6434,58 @@
       </p:sp>
       <p:sp>
         <p:nvSpPr>
-          <p:cNvPr id="11" name="Text 9"/>
-          <p:cNvSpPr/>
-          <p:nvPr/>
-        </p:nvSpPr>
-        <p:spPr>
-          <a:xfrm>
-            <a:off x="8365083" y="3865860"/>
+          <p:cNvPr id="11" name="Shape 7"/>
+          <p:cNvSpPr/>
+          <p:nvPr/>
+        </p:nvSpPr>
+        <p:spPr>
+          <a:xfrm>
+            <a:off x="8060283" y="2565400"/>
+            <a:ext cx="3318917" cy="2275780"/>
+          </a:xfrm>
+          <a:prstGeom prst="roundRect">
+            <a:avLst>
+              <a:gd name="adj" fmla="val 4464"/>
+            </a:avLst>
+          </a:prstGeom>
+          <a:solidFill>
+            <a:srgbClr val="EDF7FD"/>
+          </a:solidFill>
+          <a:ln/>
+        </p:spPr>
+      </p:sp>
+      <p:pic>
+        <p:nvPicPr>
+          <p:cNvPr id="12" name="Image 2" descr="Users">    </p:cNvPr>
+          <p:cNvPicPr>
+            <a:picLocks noChangeAspect="1"/>
+          </p:cNvPicPr>
+          <p:nvPr/>
+        </p:nvPicPr>
+        <p:blipFill>
+          <a:blip r:embed="rId3"/>
+          <a:srcRect l="0" r="0" t="0" b="0"/>
+          <a:stretch/>
+        </p:blipFill>
+        <p:spPr>
+          <a:xfrm>
+            <a:off x="8365083" y="2870200"/>
+            <a:ext cx="406400" cy="406400"/>
+          </a:xfrm>
+          <a:prstGeom prst="rect">
+            <a:avLst/>
+          </a:prstGeom>
+        </p:spPr>
+      </p:pic>
+      <p:sp>
+        <p:nvSpPr>
+          <p:cNvPr id="13" name="Text 8"/>
+          <p:cNvSpPr/>
+          <p:nvPr/>
+        </p:nvSpPr>
+        <p:spPr>
+          <a:xfrm>
+            <a:off x="8365083" y="3429000"/>
             <a:ext cx="2790596" cy="360660"/>
           </a:xfrm>
           <a:prstGeom prst="rect">
@@ -3298,7 +6515,7 @@
                 <a:ea typeface="Merriweather" pitchFamily="18" charset="-122"/>
                 <a:cs typeface="Merriweather" pitchFamily="18" charset="-120"/>
               </a:rPr>
-              <a:t>Allkirjasta</a:t>
+              <a:t>85 745 kogujat</a:t>
             </a:r>
             <a:endParaRPr lang="en-US" sz="2200" dirty="0"/>
           </a:p>
@@ -3306,14 +6523,14 @@
       </p:sp>
       <p:sp>
         <p:nvSpPr>
-          <p:cNvPr id="12" name="Text 10"/>
-          <p:cNvSpPr/>
-          <p:nvPr/>
-        </p:nvSpPr>
-        <p:spPr>
-          <a:xfrm>
-            <a:off x="11246594" y="6238280"/>
-            <a:ext cx="132606" cy="238720"/>
+          <p:cNvPr id="14" name="Text 9"/>
+          <p:cNvSpPr/>
+          <p:nvPr/>
+        </p:nvSpPr>
+        <p:spPr>
+          <a:xfrm>
+            <a:off x="8365083" y="3916660"/>
+            <a:ext cx="2790596" cy="309860"/>
           </a:xfrm>
           <a:prstGeom prst="rect">
             <a:avLst/>
@@ -3327,7 +6544,51 @@
           </a:bodyPr>
           <a:lstStyle/>
           <a:p>
-            <a:pPr algn="r" indent="0" marL="0">
+            <a:pPr algn="l" indent="0" marL="0">
+              <a:lnSpc>
+                <a:spcPts val="2240"/>
+              </a:lnSpc>
+              <a:buNone/>
+            </a:pPr>
+            <a:r>
+              <a:rPr lang="en-US" sz="1600" dirty="0">
+                <a:solidFill>
+                  <a:srgbClr val="293036"/>
+                </a:solidFill>
+                <a:latin typeface="Roboto Flex" pitchFamily="34" charset="0"/>
+                <a:ea typeface="Roboto Flex" pitchFamily="34" charset="-122"/>
+                <a:cs typeface="Roboto Flex" pitchFamily="34" charset="-120"/>
+              </a:rPr>
+              <a:t>Juba usaldavad Tulevat</a:t>
+            </a:r>
+            <a:endParaRPr lang="en-US" sz="1600" dirty="0"/>
+          </a:p>
+        </p:txBody>
+      </p:sp>
+      <p:sp>
+        <p:nvSpPr>
+          <p:cNvPr id="15" name="Text 10"/>
+          <p:cNvSpPr/>
+          <p:nvPr/>
+        </p:nvSpPr>
+        <p:spPr>
+          <a:xfrm>
+            <a:off x="812800" y="6238280"/>
+            <a:ext cx="6434971" cy="238720"/>
+          </a:xfrm>
+          <a:prstGeom prst="rect">
+            <a:avLst/>
+          </a:prstGeom>
+          <a:noFill/>
+          <a:ln/>
+        </p:spPr>
+        <p:txBody>
+          <a:bodyPr wrap="square" lIns="0" tIns="0" rIns="0" bIns="0" rtlCol="0" anchor="t">
+            <a:normAutofit/>
+          </a:bodyPr>
+          <a:lstStyle/>
+          <a:p>
+            <a:pPr algn="l" indent="0" marL="0">
               <a:lnSpc>
                 <a:spcPts val="1680"/>
               </a:lnSpc>
@@ -3342,78 +6603,22 @@
                 <a:ea typeface="Roboto Flex" pitchFamily="34" charset="-122"/>
                 <a:cs typeface="Roboto Flex" pitchFamily="34" charset="-120"/>
               </a:rPr>
-              <a:t>3</a:t>
+              <a:t>Kogujad 30.06.2026, Tuleva poolaasta aruanne · null infomüra, usaldus, järjekindlus</a:t>
             </a:r>
             <a:endParaRPr lang="en-US" sz="1200" dirty="0"/>
           </a:p>
         </p:txBody>
       </p:sp>
-    </p:spTree>
-  </p:cSld>
-  <p:clrMapOvr>
-    <a:masterClrMapping/>
-  </p:clrMapOvr>
-</p:sld>
-</file>
-
-<file path=ppt/slides/slide4.xml><?xml version="1.0" encoding="utf-8"?>
-<p:sld xmlns:a="http://schemas.openxmlformats.org/drawingml/2006/main" xmlns:r="http://schemas.openxmlformats.org/officeDocument/2006/relationships" xmlns:p="http://schemas.openxmlformats.org/presentationml/2006/main">
-  <p:cSld name="Slide 4">
-    <p:bg>
-      <p:bgPr>
-        <a:solidFill>
-          <a:srgbClr val="002F63"/>
-        </a:solidFill>
-      </p:bgPr>
-    </p:bg>
-    <p:spTree>
-      <p:nvGrpSpPr>
-        <p:cNvPr id="1" name=""/>
-        <p:cNvGrpSpPr/>
-        <p:nvPr/>
-      </p:nvGrpSpPr>
-      <p:grpSpPr>
-        <a:xfrm>
-          <a:off x="0" y="0"/>
-          <a:ext cx="0" cy="0"/>
-          <a:chOff x="0" y="0"/>
-          <a:chExt cx="0" cy="0"/>
-        </a:xfrm>
-      </p:grpSpPr>
-      <p:sp>
-        <p:nvSpPr>
-          <p:cNvPr id="2" name="Shape 0"/>
-          <p:cNvSpPr/>
-          <p:nvPr/>
-        </p:nvSpPr>
-        <p:spPr>
-          <a:xfrm>
-            <a:off x="812800" y="2459980"/>
-            <a:ext cx="762000" cy="50800"/>
-          </a:xfrm>
-          <a:prstGeom prst="roundRect">
-            <a:avLst>
-              <a:gd name="adj" fmla="val 50000"/>
-            </a:avLst>
-          </a:prstGeom>
-          <a:solidFill>
-            <a:srgbClr val="00AEEA"/>
-          </a:solidFill>
-          <a:ln/>
-        </p:spPr>
-      </p:sp>
-      <p:sp>
-        <p:nvSpPr>
-          <p:cNvPr id="3" name="Text 1"/>
-          <p:cNvSpPr/>
-          <p:nvPr>
-            <p:ph type="title"/>
-          </p:nvPr>
-        </p:nvSpPr>
-        <p:spPr>
-          <a:xfrm>
-            <a:off x="812800" y="2713980"/>
-            <a:ext cx="10883392" cy="1143000"/>
+      <p:sp>
+        <p:nvSpPr>
+          <p:cNvPr id="16" name="Text 11"/>
+          <p:cNvSpPr/>
+          <p:nvPr/>
+        </p:nvSpPr>
+        <p:spPr>
+          <a:xfrm>
+            <a:off x="11246594" y="6238280"/>
+            <a:ext cx="132606" cy="238720"/>
           </a:xfrm>
           <a:prstGeom prst="rect">
             <a:avLst/>
@@ -3427,110 +6632,22 @@
           </a:bodyPr>
           <a:lstStyle/>
           <a:p>
-            <a:pPr algn="l" indent="0" marL="0">
+            <a:pPr algn="r" indent="0" marL="0">
               <a:lnSpc>
-                <a:spcPts val="8800"/>
+                <a:spcPts val="1680"/>
               </a:lnSpc>
               <a:buNone/>
             </a:pPr>
             <a:r>
-              <a:rPr lang="en-US" sz="8000" b="1" i="0" dirty="0">
+              <a:rPr lang="en-US" sz="1200" dirty="0">
                 <a:solidFill>
-                  <a:srgbClr val="FFFFFF"/>
-                </a:solidFill>
-                <a:latin typeface="Merriweather" pitchFamily="18" charset="0"/>
-                <a:ea typeface="Merriweather" pitchFamily="18" charset="-122"/>
-                <a:cs typeface="Merriweather" pitchFamily="18" charset="-120"/>
-              </a:rPr>
-              <a:t>Demo</a:t>
-            </a:r>
-            <a:endParaRPr lang="en-US" sz="8000" dirty="0"/>
-          </a:p>
-        </p:txBody>
-      </p:sp>
-      <p:sp>
-        <p:nvSpPr>
-          <p:cNvPr id="4" name="Text 2"/>
-          <p:cNvSpPr/>
-          <p:nvPr/>
-        </p:nvSpPr>
-        <p:spPr>
-          <a:xfrm>
-            <a:off x="812800" y="4034780"/>
-            <a:ext cx="10883392" cy="388590"/>
-          </a:xfrm>
-          <a:prstGeom prst="rect">
-            <a:avLst/>
-          </a:prstGeom>
-          <a:noFill/>
-          <a:ln/>
-        </p:spPr>
-        <p:txBody>
-          <a:bodyPr wrap="square" lIns="0" tIns="0" rIns="0" bIns="0" rtlCol="0" anchor="t">
-            <a:normAutofit/>
-          </a:bodyPr>
-          <a:lstStyle/>
-          <a:p>
-            <a:pPr algn="l" indent="0" marL="0">
-              <a:lnSpc>
-                <a:spcPts val="2860"/>
-              </a:lnSpc>
-              <a:buNone/>
-            </a:pPr>
-            <a:r>
-              <a:rPr lang="en-US" sz="2200" dirty="0">
-                <a:solidFill>
-                  <a:srgbClr val="A9C6E2"/>
+                  <a:srgbClr val="6B7074"/>
                 </a:solidFill>
                 <a:latin typeface="Roboto Flex" pitchFamily="34" charset="0"/>
                 <a:ea typeface="Roboto Flex" pitchFamily="34" charset="-122"/>
                 <a:cs typeface="Roboto Flex" pitchFamily="34" charset="-120"/>
               </a:rPr>
-              <a:t>Kadri vahetab paketi ühe allkirjaga</a:t>
-            </a:r>
-            <a:endParaRPr lang="en-US" sz="2200" dirty="0"/>
-          </a:p>
-        </p:txBody>
-      </p:sp>
-      <p:sp>
-        <p:nvSpPr>
-          <p:cNvPr id="5" name="Text 3"/>
-          <p:cNvSpPr/>
-          <p:nvPr/>
-        </p:nvSpPr>
-        <p:spPr>
-          <a:xfrm>
-            <a:off x="812800" y="6238280"/>
-            <a:ext cx="10883392" cy="238720"/>
-          </a:xfrm>
-          <a:prstGeom prst="rect">
-            <a:avLst/>
-          </a:prstGeom>
-          <a:noFill/>
-          <a:ln/>
-        </p:spPr>
-        <p:txBody>
-          <a:bodyPr wrap="square" lIns="0" tIns="0" rIns="0" bIns="0" rtlCol="0" anchor="t">
-            <a:normAutofit/>
-          </a:bodyPr>
-          <a:lstStyle/>
-          <a:p>
-            <a:pPr algn="l" indent="0" marL="0">
-              <a:lnSpc>
-                <a:spcPts val="1680"/>
-              </a:lnSpc>
-              <a:buNone/>
-            </a:pPr>
-            <a:r>
-              <a:rPr lang="en-US" sz="1200" dirty="0">
-                <a:solidFill>
-                  <a:srgbClr val="8FADCA"/>
-                </a:solidFill>
-                <a:latin typeface="Roboto Flex" pitchFamily="34" charset="0"/>
-                <a:ea typeface="Roboto Flex" pitchFamily="34" charset="-122"/>
-                <a:cs typeface="Roboto Flex" pitchFamily="34" charset="-120"/>
-              </a:rPr>
-              <a:t>Prototüüp · andmed on näidis</a:t>
+              <a:t>4</a:t>
             </a:r>
             <a:endParaRPr lang="en-US" sz="1200" dirty="0"/>
           </a:p>
@@ -3572,12 +6689,146 @@
         <p:nvSpPr>
           <p:cNvPr id="2" name="Text 0"/>
           <p:cNvSpPr/>
-          <p:nvPr/>
-        </p:nvSpPr>
-        <p:spPr>
-          <a:xfrm>
-            <a:off x="812800" y="2536180"/>
-            <a:ext cx="5127752" cy="1143000"/>
+          <p:nvPr>
+            <p:ph type="title"/>
+          </p:nvPr>
+        </p:nvSpPr>
+        <p:spPr>
+          <a:xfrm>
+            <a:off x="812800" y="812800"/>
+            <a:ext cx="10883392" cy="574030"/>
+          </a:xfrm>
+          <a:prstGeom prst="rect">
+            <a:avLst/>
+          </a:prstGeom>
+          <a:noFill/>
+          <a:ln/>
+        </p:spPr>
+        <p:txBody>
+          <a:bodyPr wrap="square" lIns="0" tIns="0" rIns="0" bIns="0" rtlCol="0" anchor="t">
+            <a:normAutofit/>
+          </a:bodyPr>
+          <a:lstStyle/>
+          <a:p>
+            <a:pPr algn="l" indent="0" marL="0">
+              <a:lnSpc>
+                <a:spcPts val="4320"/>
+              </a:lnSpc>
+              <a:buNone/>
+            </a:pPr>
+            <a:r>
+              <a:rPr lang="en-US" sz="3600" b="1" i="0" dirty="0">
+                <a:solidFill>
+                  <a:srgbClr val="002F63"/>
+                </a:solidFill>
+                <a:latin typeface="Merriweather" pitchFamily="18" charset="0"/>
+                <a:ea typeface="Merriweather" pitchFamily="18" charset="-122"/>
+                <a:cs typeface="Merriweather" pitchFamily="18" charset="-120"/>
+              </a:rPr>
+              <a:t>Kulud on kaetud, kui</a:t>
+            </a:r>
+            <a:endParaRPr lang="en-US" sz="3600" dirty="0"/>
+          </a:p>
+        </p:txBody>
+      </p:sp>
+      <p:sp>
+        <p:nvSpPr>
+          <p:cNvPr id="3" name="Text 1"/>
+          <p:cNvSpPr/>
+          <p:nvPr/>
+        </p:nvSpPr>
+        <p:spPr>
+          <a:xfrm>
+            <a:off x="812800" y="2585690"/>
+            <a:ext cx="4899141" cy="1143000"/>
+          </a:xfrm>
+          <a:prstGeom prst="rect">
+            <a:avLst/>
+          </a:prstGeom>
+          <a:noFill/>
+          <a:ln/>
+        </p:spPr>
+        <p:txBody>
+          <a:bodyPr wrap="square" lIns="0" tIns="0" rIns="0" bIns="0" rtlCol="0" anchor="t">
+            <a:normAutofit/>
+          </a:bodyPr>
+          <a:lstStyle/>
+          <a:p>
+            <a:pPr algn="l" indent="0" marL="0">
+              <a:lnSpc>
+                <a:spcPts val="8800"/>
+              </a:lnSpc>
+              <a:buNone/>
+            </a:pPr>
+            <a:r>
+              <a:rPr lang="en-US" sz="8000" b="1" dirty="0">
+                <a:solidFill>
+                  <a:srgbClr val="002F63"/>
+                </a:solidFill>
+                <a:latin typeface="Merriweather" pitchFamily="18" charset="0"/>
+                <a:ea typeface="Merriweather" pitchFamily="18" charset="-122"/>
+                <a:cs typeface="Merriweather" pitchFamily="18" charset="-120"/>
+              </a:rPr>
+              <a:t>5 750</a:t>
+            </a:r>
+            <a:endParaRPr lang="en-US" sz="8000" dirty="0"/>
+          </a:p>
+        </p:txBody>
+      </p:sp>
+      <p:sp>
+        <p:nvSpPr>
+          <p:cNvPr id="4" name="Text 2"/>
+          <p:cNvSpPr/>
+          <p:nvPr/>
+        </p:nvSpPr>
+        <p:spPr>
+          <a:xfrm>
+            <a:off x="5569248" y="2962870"/>
+            <a:ext cx="5984251" cy="388590"/>
+          </a:xfrm>
+          <a:prstGeom prst="rect">
+            <a:avLst/>
+          </a:prstGeom>
+          <a:noFill/>
+          <a:ln/>
+        </p:spPr>
+        <p:txBody>
+          <a:bodyPr wrap="square" lIns="0" tIns="0" rIns="0" bIns="0" rtlCol="0" anchor="t">
+            <a:normAutofit/>
+          </a:bodyPr>
+          <a:lstStyle/>
+          <a:p>
+            <a:pPr algn="l" indent="0" marL="0">
+              <a:lnSpc>
+                <a:spcPts val="2860"/>
+              </a:lnSpc>
+              <a:buNone/>
+            </a:pPr>
+            <a:r>
+              <a:rPr lang="en-US" sz="2200" dirty="0">
+                <a:solidFill>
+                  <a:srgbClr val="293036"/>
+                </a:solidFill>
+                <a:latin typeface="Roboto Flex" pitchFamily="34" charset="0"/>
+                <a:ea typeface="Roboto Flex" pitchFamily="34" charset="-122"/>
+                <a:cs typeface="Roboto Flex" pitchFamily="34" charset="-120"/>
+              </a:rPr>
+              <a:t>lepingut</a:t>
+            </a:r>
+            <a:endParaRPr lang="en-US" sz="2200" dirty="0"/>
+          </a:p>
+        </p:txBody>
+      </p:sp>
+      <p:sp>
+        <p:nvSpPr>
+          <p:cNvPr id="5" name="Text 3"/>
+          <p:cNvSpPr/>
+          <p:nvPr/>
+        </p:nvSpPr>
+        <p:spPr>
+          <a:xfrm>
+            <a:off x="812800" y="3703290"/>
+            <a:ext cx="4899141" cy="1143000"/>
           </a:xfrm>
           <a:prstGeom prst="rect">
             <a:avLst/>
@@ -3606,7 +6857,7 @@
                 <a:ea typeface="Merriweather" pitchFamily="18" charset="-122"/>
                 <a:cs typeface="Merriweather" pitchFamily="18" charset="-120"/>
               </a:rPr>
-              <a:t>6,50 €</a:t>
+              <a:t>2,3 mln €</a:t>
             </a:r>
             <a:endParaRPr lang="en-US" sz="8000" dirty="0"/>
           </a:p>
@@ -3614,14 +6865,14 @@
       </p:sp>
       <p:sp>
         <p:nvSpPr>
-          <p:cNvPr id="3" name="Text 1"/>
-          <p:cNvSpPr/>
-          <p:nvPr/>
-        </p:nvSpPr>
-        <p:spPr>
-          <a:xfrm>
-            <a:off x="812800" y="3755380"/>
-            <a:ext cx="5127752" cy="388590"/>
+          <p:cNvPr id="6" name="Text 4"/>
+          <p:cNvSpPr/>
+          <p:nvPr/>
+        </p:nvSpPr>
+        <p:spPr>
+          <a:xfrm>
+            <a:off x="5569248" y="4080470"/>
+            <a:ext cx="5984251" cy="388590"/>
           </a:xfrm>
           <a:prstGeom prst="rect">
             <a:avLst/>
@@ -3644,13 +6895,13 @@
             <a:r>
               <a:rPr lang="en-US" sz="2200" dirty="0">
                 <a:solidFill>
-                  <a:srgbClr val="002F63"/>
+                  <a:srgbClr val="293036"/>
                 </a:solidFill>
                 <a:latin typeface="Roboto Flex" pitchFamily="34" charset="0"/>
                 <a:ea typeface="Roboto Flex" pitchFamily="34" charset="-122"/>
                 <a:cs typeface="Roboto Flex" pitchFamily="34" charset="-120"/>
               </a:rPr>
-              <a:t>kuus, ilma sidumiseta</a:t>
+              <a:t>sääst aastas</a:t>
             </a:r>
             <a:endParaRPr lang="en-US" sz="2200" dirty="0"/>
           </a:p>
@@ -3658,102 +6909,14 @@
       </p:sp>
       <p:sp>
         <p:nvSpPr>
-          <p:cNvPr id="4" name="Text 2"/>
-          <p:cNvSpPr/>
-          <p:nvPr/>
-        </p:nvSpPr>
-        <p:spPr>
-          <a:xfrm>
-            <a:off x="6400800" y="2536180"/>
-            <a:ext cx="5127752" cy="1143000"/>
-          </a:xfrm>
-          <a:prstGeom prst="rect">
-            <a:avLst/>
-          </a:prstGeom>
-          <a:noFill/>
-          <a:ln/>
-        </p:spPr>
-        <p:txBody>
-          <a:bodyPr wrap="square" lIns="0" tIns="0" rIns="0" bIns="0" rtlCol="0" anchor="t">
-            <a:normAutofit/>
-          </a:bodyPr>
-          <a:lstStyle/>
-          <a:p>
-            <a:pPr algn="l" indent="0" marL="0">
-              <a:lnSpc>
-                <a:spcPts val="8800"/>
-              </a:lnSpc>
-              <a:buNone/>
-            </a:pPr>
-            <a:r>
-              <a:rPr lang="en-US" sz="8000" b="1" dirty="0">
-                <a:solidFill>
-                  <a:srgbClr val="006CE6"/>
-                </a:solidFill>
-                <a:latin typeface="Merriweather" pitchFamily="18" charset="0"/>
-                <a:ea typeface="Merriweather" pitchFamily="18" charset="-122"/>
-                <a:cs typeface="Merriweather" pitchFamily="18" charset="-120"/>
-              </a:rPr>
-              <a:t>405 €</a:t>
-            </a:r>
-            <a:endParaRPr lang="en-US" sz="8000" dirty="0"/>
-          </a:p>
-        </p:txBody>
-      </p:sp>
-      <p:sp>
-        <p:nvSpPr>
-          <p:cNvPr id="5" name="Text 3"/>
-          <p:cNvSpPr/>
-          <p:nvPr/>
-        </p:nvSpPr>
-        <p:spPr>
-          <a:xfrm>
-            <a:off x="6400800" y="3755380"/>
-            <a:ext cx="5127752" cy="388590"/>
-          </a:xfrm>
-          <a:prstGeom prst="rect">
-            <a:avLst/>
-          </a:prstGeom>
-          <a:noFill/>
-          <a:ln/>
-        </p:spPr>
-        <p:txBody>
-          <a:bodyPr wrap="square" lIns="0" tIns="0" rIns="0" bIns="0" rtlCol="0" anchor="t">
-            <a:normAutofit/>
-          </a:bodyPr>
-          <a:lstStyle/>
-          <a:p>
-            <a:pPr algn="l" indent="0" marL="0">
-              <a:lnSpc>
-                <a:spcPts val="2860"/>
-              </a:lnSpc>
-              <a:buNone/>
-            </a:pPr>
-            <a:r>
-              <a:rPr lang="en-US" sz="2200" dirty="0">
-                <a:solidFill>
-                  <a:srgbClr val="002F63"/>
-                </a:solidFill>
-                <a:latin typeface="Roboto Flex" pitchFamily="34" charset="0"/>
-                <a:ea typeface="Roboto Flex" pitchFamily="34" charset="-122"/>
-                <a:cs typeface="Roboto Flex" pitchFamily="34" charset="-120"/>
-              </a:rPr>
-              <a:t>sääst aastas, kuni</a:t>
-            </a:r>
-            <a:endParaRPr lang="en-US" sz="2200" dirty="0"/>
-          </a:p>
-        </p:txBody>
-      </p:sp>
-      <p:sp>
-        <p:nvSpPr>
-          <p:cNvPr id="6" name="Text 4"/>
+          <p:cNvPr id="7" name="Text 5"/>
           <p:cNvSpPr/>
           <p:nvPr/>
         </p:nvSpPr>
         <p:spPr>
           <a:xfrm>
             <a:off x="812800" y="6238280"/>
-            <a:ext cx="5065157" cy="238720"/>
+            <a:ext cx="6935033" cy="238720"/>
           </a:xfrm>
           <a:prstGeom prst="rect">
             <a:avLst/>
@@ -3782,7 +6945,7 @@
                 <a:ea typeface="Roboto Flex" pitchFamily="34" charset="-122"/>
                 <a:cs typeface="Roboto Flex" pitchFamily="34" charset="-120"/>
               </a:rPr>
-              <a:t>Sihthind, mitte veel pakkumine · sääst on hinnang tavahinna vastu</a:t>
+              <a:t>Hinnang · kulu 1 täiskoht ≈ 69 000 € aastas · tasu 1 € kuus · sääst kuni 405 € lepingu kohta</a:t>
             </a:r>
             <a:endParaRPr lang="en-US" sz="1200" dirty="0"/>
           </a:p>
@@ -3790,7 +6953,7 @@
       </p:sp>
       <p:sp>
         <p:nvSpPr>
-          <p:cNvPr id="7" name="Text 5"/>
+          <p:cNvPr id="8" name="Text 6"/>
           <p:cNvSpPr/>
           <p:nvPr/>
         </p:nvSpPr>
@@ -3868,12 +7031,14 @@
         <p:nvSpPr>
           <p:cNvPr id="2" name="Text 0"/>
           <p:cNvSpPr/>
-          <p:nvPr/>
-        </p:nvSpPr>
-        <p:spPr>
-          <a:xfrm>
-            <a:off x="812800" y="2070100"/>
-            <a:ext cx="5755640" cy="863600"/>
+          <p:nvPr>
+            <p:ph type="title"/>
+          </p:nvPr>
+        </p:nvSpPr>
+        <p:spPr>
+          <a:xfrm>
+            <a:off x="812800" y="812800"/>
+            <a:ext cx="10883392" cy="574030"/>
           </a:xfrm>
           <a:prstGeom prst="rect">
             <a:avLst/>
@@ -3889,12 +7054,12 @@
           <a:p>
             <a:pPr algn="l" indent="0" marL="0">
               <a:lnSpc>
-                <a:spcPts val="6600"/>
+                <a:spcPts val="4320"/>
               </a:lnSpc>
               <a:buNone/>
             </a:pPr>
             <a:r>
-              <a:rPr lang="en-US" sz="6000" b="1" dirty="0">
+              <a:rPr lang="en-US" sz="3600" b="1" i="0" dirty="0">
                 <a:solidFill>
                   <a:srgbClr val="002F63"/>
                 </a:solidFill>
@@ -3902,9 +7067,9 @@
                 <a:ea typeface="Merriweather" pitchFamily="18" charset="-122"/>
                 <a:cs typeface="Merriweather" pitchFamily="18" charset="-120"/>
               </a:rPr>
-              <a:t>1 000</a:t>
-            </a:r>
-            <a:endParaRPr lang="en-US" sz="6000" dirty="0"/>
+              <a:t>Ühine ostujõud igas valdkonnas</a:t>
+            </a:r>
+            <a:endParaRPr lang="en-US" sz="3600" dirty="0"/>
           </a:p>
         </p:txBody>
       </p:sp>
@@ -3916,8 +7081,8 @@
         </p:nvSpPr>
         <p:spPr>
           <a:xfrm>
-            <a:off x="6400800" y="2307580"/>
-            <a:ext cx="5127752" cy="388590"/>
+            <a:off x="812800" y="1463030"/>
+            <a:ext cx="10883392" cy="309860"/>
           </a:xfrm>
           <a:prstGeom prst="rect">
             <a:avLst/>
@@ -3933,35 +7098,80 @@
           <a:p>
             <a:pPr algn="l" indent="0" marL="0">
               <a:lnSpc>
-                <a:spcPts val="2860"/>
+                <a:spcPts val="2240"/>
               </a:lnSpc>
               <a:buNone/>
             </a:pPr>
             <a:r>
-              <a:rPr lang="en-US" sz="2200" dirty="0">
+              <a:rPr lang="en-US" sz="1600" dirty="0">
                 <a:solidFill>
-                  <a:srgbClr val="293036"/>
+                  <a:srgbClr val="6B7074"/>
                 </a:solidFill>
                 <a:latin typeface="Roboto Flex" pitchFamily="34" charset="0"/>
                 <a:ea typeface="Roboto Flex" pitchFamily="34" charset="-122"/>
                 <a:cs typeface="Roboto Flex" pitchFamily="34" charset="-120"/>
               </a:rPr>
-              <a:t>registreerunut</a:t>
-            </a:r>
-            <a:endParaRPr lang="en-US" sz="2200" dirty="0"/>
-          </a:p>
-        </p:txBody>
-      </p:sp>
-      <p:sp>
-        <p:nvSpPr>
-          <p:cNvPr id="4" name="Text 2"/>
-          <p:cNvSpPr/>
-          <p:nvPr/>
-        </p:nvSpPr>
-        <p:spPr>
-          <a:xfrm>
-            <a:off x="812800" y="2908300"/>
-            <a:ext cx="5755640" cy="863600"/>
+              <a:t>Mobiilside on esimene</a:t>
+            </a:r>
+            <a:endParaRPr lang="en-US" sz="1600" dirty="0"/>
+          </a:p>
+        </p:txBody>
+      </p:sp>
+      <p:sp>
+        <p:nvSpPr>
+          <p:cNvPr id="4" name="Shape 2"/>
+          <p:cNvSpPr/>
+          <p:nvPr/>
+        </p:nvSpPr>
+        <p:spPr>
+          <a:xfrm>
+            <a:off x="812800" y="2910830"/>
+            <a:ext cx="2489200" cy="1869380"/>
+          </a:xfrm>
+          <a:prstGeom prst="roundRect">
+            <a:avLst>
+              <a:gd name="adj" fmla="val 5435"/>
+            </a:avLst>
+          </a:prstGeom>
+          <a:solidFill>
+            <a:srgbClr val="002F63"/>
+          </a:solidFill>
+          <a:ln/>
+        </p:spPr>
+      </p:sp>
+      <p:pic>
+        <p:nvPicPr>
+          <p:cNvPr id="5" name="Image 0" descr="Chat">    </p:cNvPr>
+          <p:cNvPicPr>
+            <a:picLocks noChangeAspect="1"/>
+          </p:cNvPicPr>
+          <p:nvPr/>
+        </p:nvPicPr>
+        <p:blipFill>
+          <a:blip r:embed="rId1"/>
+          <a:srcRect l="0" r="0" t="0" b="0"/>
+          <a:stretch/>
+        </p:blipFill>
+        <p:spPr>
+          <a:xfrm>
+            <a:off x="1066800" y="3164830"/>
+            <a:ext cx="406400" cy="406400"/>
+          </a:xfrm>
+          <a:prstGeom prst="rect">
+            <a:avLst/>
+          </a:prstGeom>
+        </p:spPr>
+      </p:pic>
+      <p:sp>
+        <p:nvSpPr>
+          <p:cNvPr id="6" name="Text 3"/>
+          <p:cNvSpPr/>
+          <p:nvPr/>
+        </p:nvSpPr>
+        <p:spPr>
+          <a:xfrm>
+            <a:off x="1066800" y="3774430"/>
+            <a:ext cx="2040636" cy="360660"/>
           </a:xfrm>
           <a:prstGeom prst="rect">
             <a:avLst/>
@@ -3977,12 +7187,145 @@
           <a:p>
             <a:pPr algn="l" indent="0" marL="0">
               <a:lnSpc>
-                <a:spcPts val="6600"/>
+                <a:spcPts val="2640"/>
               </a:lnSpc>
               <a:buNone/>
             </a:pPr>
             <a:r>
-              <a:rPr lang="en-US" sz="6000" b="1" dirty="0">
+              <a:rPr lang="en-US" sz="2200" b="1" dirty="0">
+                <a:solidFill>
+                  <a:srgbClr val="FFFFFF"/>
+                </a:solidFill>
+                <a:latin typeface="Merriweather" pitchFamily="18" charset="0"/>
+                <a:ea typeface="Merriweather" pitchFamily="18" charset="-122"/>
+                <a:cs typeface="Merriweather" pitchFamily="18" charset="-120"/>
+              </a:rPr>
+              <a:t>Mobiilside</a:t>
+            </a:r>
+            <a:endParaRPr lang="en-US" sz="2200" dirty="0"/>
+          </a:p>
+        </p:txBody>
+      </p:sp>
+      <p:sp>
+        <p:nvSpPr>
+          <p:cNvPr id="7" name="Text 4"/>
+          <p:cNvSpPr/>
+          <p:nvPr/>
+        </p:nvSpPr>
+        <p:spPr>
+          <a:xfrm>
+            <a:off x="1066800" y="4312890"/>
+            <a:ext cx="2040636" cy="238720"/>
+          </a:xfrm>
+          <a:prstGeom prst="rect">
+            <a:avLst/>
+          </a:prstGeom>
+          <a:noFill/>
+          <a:ln/>
+        </p:spPr>
+        <p:txBody>
+          <a:bodyPr wrap="square" lIns="0" tIns="0" rIns="0" bIns="0" rtlCol="0" anchor="t">
+            <a:normAutofit/>
+          </a:bodyPr>
+          <a:lstStyle/>
+          <a:p>
+            <a:pPr algn="l" indent="0" marL="0">
+              <a:lnSpc>
+                <a:spcPts val="1680"/>
+              </a:lnSpc>
+              <a:buNone/>
+            </a:pPr>
+            <a:r>
+              <a:rPr lang="en-US" sz="1200" b="1" spc="100" kern="0" dirty="0">
+                <a:solidFill>
+                  <a:srgbClr val="A9C6E2"/>
+                </a:solidFill>
+                <a:latin typeface="Roboto Flex" pitchFamily="34" charset="0"/>
+                <a:ea typeface="Roboto Flex" pitchFamily="34" charset="-122"/>
+                <a:cs typeface="Roboto Flex" pitchFamily="34" charset="-120"/>
+              </a:rPr>
+              <a:t>TÄNA</a:t>
+            </a:r>
+            <a:endParaRPr lang="en-US" sz="1200" dirty="0"/>
+          </a:p>
+        </p:txBody>
+      </p:sp>
+      <p:sp>
+        <p:nvSpPr>
+          <p:cNvPr id="8" name="Shape 5"/>
+          <p:cNvSpPr/>
+          <p:nvPr/>
+        </p:nvSpPr>
+        <p:spPr>
+          <a:xfrm>
+            <a:off x="3505200" y="2910830"/>
+            <a:ext cx="2489200" cy="1869380"/>
+          </a:xfrm>
+          <a:prstGeom prst="roundRect">
+            <a:avLst>
+              <a:gd name="adj" fmla="val 5435"/>
+            </a:avLst>
+          </a:prstGeom>
+          <a:solidFill>
+            <a:srgbClr val="EDF7FD"/>
+          </a:solidFill>
+          <a:ln/>
+        </p:spPr>
+      </p:sp>
+      <p:pic>
+        <p:nvPicPr>
+          <p:cNvPr id="9" name="Image 1" descr="Lightning">    </p:cNvPr>
+          <p:cNvPicPr>
+            <a:picLocks noChangeAspect="1"/>
+          </p:cNvPicPr>
+          <p:nvPr/>
+        </p:nvPicPr>
+        <p:blipFill>
+          <a:blip r:embed="rId2"/>
+          <a:srcRect l="0" r="0" t="0" b="0"/>
+          <a:stretch/>
+        </p:blipFill>
+        <p:spPr>
+          <a:xfrm>
+            <a:off x="3759200" y="3164830"/>
+            <a:ext cx="406400" cy="406400"/>
+          </a:xfrm>
+          <a:prstGeom prst="rect">
+            <a:avLst/>
+          </a:prstGeom>
+        </p:spPr>
+      </p:pic>
+      <p:sp>
+        <p:nvSpPr>
+          <p:cNvPr id="10" name="Text 6"/>
+          <p:cNvSpPr/>
+          <p:nvPr/>
+        </p:nvSpPr>
+        <p:spPr>
+          <a:xfrm>
+            <a:off x="3759200" y="3774430"/>
+            <a:ext cx="2040636" cy="360660"/>
+          </a:xfrm>
+          <a:prstGeom prst="rect">
+            <a:avLst/>
+          </a:prstGeom>
+          <a:noFill/>
+          <a:ln/>
+        </p:spPr>
+        <p:txBody>
+          <a:bodyPr wrap="square" lIns="0" tIns="0" rIns="0" bIns="0" rtlCol="0" anchor="t">
+            <a:normAutofit/>
+          </a:bodyPr>
+          <a:lstStyle/>
+          <a:p>
+            <a:pPr algn="l" indent="0" marL="0">
+              <a:lnSpc>
+                <a:spcPts val="2640"/>
+              </a:lnSpc>
+              <a:buNone/>
+            </a:pPr>
+            <a:r>
+              <a:rPr lang="en-US" sz="2200" b="1" dirty="0">
                 <a:solidFill>
                   <a:srgbClr val="002F63"/>
                 </a:solidFill>
@@ -3990,22 +7333,22 @@
                 <a:ea typeface="Merriweather" pitchFamily="18" charset="-122"/>
                 <a:cs typeface="Merriweather" pitchFamily="18" charset="-120"/>
               </a:rPr>
-              <a:t>560</a:t>
-            </a:r>
-            <a:endParaRPr lang="en-US" sz="6000" dirty="0"/>
-          </a:p>
-        </p:txBody>
-      </p:sp>
-      <p:sp>
-        <p:nvSpPr>
-          <p:cNvPr id="5" name="Text 3"/>
-          <p:cNvSpPr/>
-          <p:nvPr/>
-        </p:nvSpPr>
-        <p:spPr>
-          <a:xfrm>
-            <a:off x="6400800" y="3145780"/>
-            <a:ext cx="5127752" cy="388590"/>
+              <a:t>Elekter</a:t>
+            </a:r>
+            <a:endParaRPr lang="en-US" sz="2200" dirty="0"/>
+          </a:p>
+        </p:txBody>
+      </p:sp>
+      <p:sp>
+        <p:nvSpPr>
+          <p:cNvPr id="11" name="Text 7"/>
+          <p:cNvSpPr/>
+          <p:nvPr/>
+        </p:nvSpPr>
+        <p:spPr>
+          <a:xfrm>
+            <a:off x="3759200" y="4312890"/>
+            <a:ext cx="2040636" cy="238720"/>
           </a:xfrm>
           <a:prstGeom prst="rect">
             <a:avLst/>
@@ -4021,35 +7364,80 @@
           <a:p>
             <a:pPr algn="l" indent="0" marL="0">
               <a:lnSpc>
-                <a:spcPts val="2860"/>
+                <a:spcPts val="1680"/>
               </a:lnSpc>
               <a:buNone/>
             </a:pPr>
             <a:r>
-              <a:rPr lang="en-US" sz="2200" dirty="0">
+              <a:rPr lang="en-US" sz="1200" b="1" spc="100" kern="0" dirty="0">
                 <a:solidFill>
-                  <a:srgbClr val="293036"/>
+                  <a:srgbClr val="6B7074"/>
                 </a:solidFill>
                 <a:latin typeface="Roboto Flex" pitchFamily="34" charset="0"/>
                 <a:ea typeface="Roboto Flex" pitchFamily="34" charset="-122"/>
                 <a:cs typeface="Roboto Flex" pitchFamily="34" charset="-120"/>
               </a:rPr>
-              <a:t>lepingut</a:t>
-            </a:r>
-            <a:endParaRPr lang="en-US" sz="2200" dirty="0"/>
-          </a:p>
-        </p:txBody>
-      </p:sp>
-      <p:sp>
-        <p:nvSpPr>
-          <p:cNvPr id="6" name="Text 4"/>
-          <p:cNvSpPr/>
-          <p:nvPr/>
-        </p:nvSpPr>
-        <p:spPr>
-          <a:xfrm>
-            <a:off x="812800" y="3746500"/>
-            <a:ext cx="5755640" cy="863600"/>
+              <a:t>TULEVIKUS</a:t>
+            </a:r>
+            <a:endParaRPr lang="en-US" sz="1200" dirty="0"/>
+          </a:p>
+        </p:txBody>
+      </p:sp>
+      <p:sp>
+        <p:nvSpPr>
+          <p:cNvPr id="12" name="Shape 8"/>
+          <p:cNvSpPr/>
+          <p:nvPr/>
+        </p:nvSpPr>
+        <p:spPr>
+          <a:xfrm>
+            <a:off x="6197600" y="2910830"/>
+            <a:ext cx="2489200" cy="1869380"/>
+          </a:xfrm>
+          <a:prstGeom prst="roundRect">
+            <a:avLst>
+              <a:gd name="adj" fmla="val 5435"/>
+            </a:avLst>
+          </a:prstGeom>
+          <a:solidFill>
+            <a:srgbClr val="EDF7FD"/>
+          </a:solidFill>
+          <a:ln/>
+        </p:spPr>
+      </p:sp>
+      <p:pic>
+        <p:nvPicPr>
+          <p:cNvPr id="13" name="Image 2" descr="Trust">    </p:cNvPr>
+          <p:cNvPicPr>
+            <a:picLocks noChangeAspect="1"/>
+          </p:cNvPicPr>
+          <p:nvPr/>
+        </p:nvPicPr>
+        <p:blipFill>
+          <a:blip r:embed="rId3"/>
+          <a:srcRect l="0" r="0" t="0" b="0"/>
+          <a:stretch/>
+        </p:blipFill>
+        <p:spPr>
+          <a:xfrm>
+            <a:off x="6451600" y="3164830"/>
+            <a:ext cx="406400" cy="406400"/>
+          </a:xfrm>
+          <a:prstGeom prst="rect">
+            <a:avLst/>
+          </a:prstGeom>
+        </p:spPr>
+      </p:pic>
+      <p:sp>
+        <p:nvSpPr>
+          <p:cNvPr id="14" name="Text 9"/>
+          <p:cNvSpPr/>
+          <p:nvPr/>
+        </p:nvSpPr>
+        <p:spPr>
+          <a:xfrm>
+            <a:off x="6451600" y="3774430"/>
+            <a:ext cx="2040636" cy="360660"/>
           </a:xfrm>
           <a:prstGeom prst="rect">
             <a:avLst/>
@@ -4065,35 +7453,35 @@
           <a:p>
             <a:pPr algn="l" indent="0" marL="0">
               <a:lnSpc>
-                <a:spcPts val="6600"/>
+                <a:spcPts val="2640"/>
               </a:lnSpc>
               <a:buNone/>
             </a:pPr>
             <a:r>
-              <a:rPr lang="en-US" sz="6000" b="1" dirty="0">
+              <a:rPr lang="en-US" sz="2200" b="1" dirty="0">
                 <a:solidFill>
-                  <a:srgbClr val="006CE6"/>
+                  <a:srgbClr val="002F63"/>
                 </a:solidFill>
                 <a:latin typeface="Merriweather" pitchFamily="18" charset="0"/>
                 <a:ea typeface="Merriweather" pitchFamily="18" charset="-122"/>
                 <a:cs typeface="Merriweather" pitchFamily="18" charset="-120"/>
               </a:rPr>
-              <a:t>227 000 €</a:t>
-            </a:r>
-            <a:endParaRPr lang="en-US" sz="6000" dirty="0"/>
-          </a:p>
-        </p:txBody>
-      </p:sp>
-      <p:sp>
-        <p:nvSpPr>
-          <p:cNvPr id="7" name="Text 5"/>
-          <p:cNvSpPr/>
-          <p:nvPr/>
-        </p:nvSpPr>
-        <p:spPr>
-          <a:xfrm>
-            <a:off x="6400800" y="3983980"/>
-            <a:ext cx="5127752" cy="388590"/>
+              <a:t>Kindlustus</a:t>
+            </a:r>
+            <a:endParaRPr lang="en-US" sz="2200" dirty="0"/>
+          </a:p>
+        </p:txBody>
+      </p:sp>
+      <p:sp>
+        <p:nvSpPr>
+          <p:cNvPr id="15" name="Text 10"/>
+          <p:cNvSpPr/>
+          <p:nvPr/>
+        </p:nvSpPr>
+        <p:spPr>
+          <a:xfrm>
+            <a:off x="6451600" y="4312890"/>
+            <a:ext cx="2040636" cy="238720"/>
           </a:xfrm>
           <a:prstGeom prst="rect">
             <a:avLst/>
@@ -4109,20 +7497,109 @@
           <a:p>
             <a:pPr algn="l" indent="0" marL="0">
               <a:lnSpc>
-                <a:spcPts val="2860"/>
+                <a:spcPts val="1680"/>
               </a:lnSpc>
               <a:buNone/>
             </a:pPr>
             <a:r>
-              <a:rPr lang="en-US" sz="2200" dirty="0">
+              <a:rPr lang="en-US" sz="1200" b="1" spc="100" kern="0" dirty="0">
                 <a:solidFill>
-                  <a:srgbClr val="293036"/>
+                  <a:srgbClr val="6B7074"/>
                 </a:solidFill>
                 <a:latin typeface="Roboto Flex" pitchFamily="34" charset="0"/>
                 <a:ea typeface="Roboto Flex" pitchFamily="34" charset="-122"/>
                 <a:cs typeface="Roboto Flex" pitchFamily="34" charset="-120"/>
               </a:rPr>
-              <a:t>sääst aastas</a:t>
+              <a:t>TULEVIKUS</a:t>
+            </a:r>
+            <a:endParaRPr lang="en-US" sz="1200" dirty="0"/>
+          </a:p>
+        </p:txBody>
+      </p:sp>
+      <p:sp>
+        <p:nvSpPr>
+          <p:cNvPr id="16" name="Shape 11"/>
+          <p:cNvSpPr/>
+          <p:nvPr/>
+        </p:nvSpPr>
+        <p:spPr>
+          <a:xfrm>
+            <a:off x="8890000" y="2910830"/>
+            <a:ext cx="2489200" cy="1869380"/>
+          </a:xfrm>
+          <a:prstGeom prst="roundRect">
+            <a:avLst>
+              <a:gd name="adj" fmla="val 5435"/>
+            </a:avLst>
+          </a:prstGeom>
+          <a:solidFill>
+            <a:srgbClr val="EDF7FD"/>
+          </a:solidFill>
+          <a:ln/>
+        </p:spPr>
+      </p:sp>
+      <p:pic>
+        <p:nvPicPr>
+          <p:cNvPr id="17" name="Image 3" descr="Users">    </p:cNvPr>
+          <p:cNvPicPr>
+            <a:picLocks noChangeAspect="1"/>
+          </p:cNvPicPr>
+          <p:nvPr/>
+        </p:nvPicPr>
+        <p:blipFill>
+          <a:blip r:embed="rId4"/>
+          <a:srcRect l="0" r="0" t="0" b="0"/>
+          <a:stretch/>
+        </p:blipFill>
+        <p:spPr>
+          <a:xfrm>
+            <a:off x="9144000" y="3164830"/>
+            <a:ext cx="406400" cy="406400"/>
+          </a:xfrm>
+          <a:prstGeom prst="rect">
+            <a:avLst/>
+          </a:prstGeom>
+        </p:spPr>
+      </p:pic>
+      <p:sp>
+        <p:nvSpPr>
+          <p:cNvPr id="18" name="Text 12"/>
+          <p:cNvSpPr/>
+          <p:nvPr/>
+        </p:nvSpPr>
+        <p:spPr>
+          <a:xfrm>
+            <a:off x="9144000" y="3774430"/>
+            <a:ext cx="2235200" cy="360660"/>
+          </a:xfrm>
+          <a:prstGeom prst="rect">
+            <a:avLst/>
+          </a:prstGeom>
+          <a:noFill/>
+          <a:ln/>
+        </p:spPr>
+        <p:txBody>
+          <a:bodyPr wrap="square" lIns="0" tIns="0" rIns="0" bIns="0" rtlCol="0" anchor="t">
+            <a:normAutofit/>
+          </a:bodyPr>
+          <a:lstStyle/>
+          <a:p>
+            <a:pPr algn="l" indent="0" marL="0">
+              <a:lnSpc>
+                <a:spcPts val="2640"/>
+              </a:lnSpc>
+              <a:buNone/>
+            </a:pPr>
+            <a:r>
+              <a:rPr lang="en-US" sz="2200" b="1" dirty="0">
+                <a:solidFill>
+                  <a:srgbClr val="002F63"/>
+                </a:solidFill>
+                <a:latin typeface="Merriweather" pitchFamily="18" charset="0"/>
+                <a:ea typeface="Merriweather" pitchFamily="18" charset="-122"/>
+                <a:cs typeface="Merriweather" pitchFamily="18" charset="-120"/>
+              </a:rPr>
+              <a:t>Ühistellimused</a:t>
             </a:r>
             <a:endParaRPr lang="en-US" sz="2200" dirty="0"/>
           </a:p>
@@ -4130,14 +7607,58 @@
       </p:sp>
       <p:sp>
         <p:nvSpPr>
-          <p:cNvPr id="8" name="Text 6"/>
+          <p:cNvPr id="19" name="Text 13"/>
+          <p:cNvSpPr/>
+          <p:nvPr/>
+        </p:nvSpPr>
+        <p:spPr>
+          <a:xfrm>
+            <a:off x="9144000" y="4312890"/>
+            <a:ext cx="2040636" cy="238720"/>
+          </a:xfrm>
+          <a:prstGeom prst="rect">
+            <a:avLst/>
+          </a:prstGeom>
+          <a:noFill/>
+          <a:ln/>
+        </p:spPr>
+        <p:txBody>
+          <a:bodyPr wrap="square" lIns="0" tIns="0" rIns="0" bIns="0" rtlCol="0" anchor="t">
+            <a:normAutofit/>
+          </a:bodyPr>
+          <a:lstStyle/>
+          <a:p>
+            <a:pPr algn="l" indent="0" marL="0">
+              <a:lnSpc>
+                <a:spcPts val="1680"/>
+              </a:lnSpc>
+              <a:buNone/>
+            </a:pPr>
+            <a:r>
+              <a:rPr lang="en-US" sz="1200" b="1" spc="100" kern="0" dirty="0">
+                <a:solidFill>
+                  <a:srgbClr val="6B7074"/>
+                </a:solidFill>
+                <a:latin typeface="Roboto Flex" pitchFamily="34" charset="0"/>
+                <a:ea typeface="Roboto Flex" pitchFamily="34" charset="-122"/>
+                <a:cs typeface="Roboto Flex" pitchFamily="34" charset="-120"/>
+              </a:rPr>
+              <a:t>TULEVIKUS</a:t>
+            </a:r>
+            <a:endParaRPr lang="en-US" sz="1200" dirty="0"/>
+          </a:p>
+        </p:txBody>
+      </p:sp>
+      <p:sp>
+        <p:nvSpPr>
+          <p:cNvPr id="20" name="Text 14"/>
           <p:cNvSpPr/>
           <p:nvPr/>
         </p:nvSpPr>
         <p:spPr>
           <a:xfrm>
             <a:off x="812800" y="6238280"/>
-            <a:ext cx="3201710" cy="238720"/>
+            <a:ext cx="3296305" cy="238720"/>
           </a:xfrm>
           <a:prstGeom prst="rect">
             <a:avLst/>
@@ -4166,7 +7687,7 @@
                 <a:ea typeface="Roboto Flex" pitchFamily="34" charset="-122"/>
                 <a:cs typeface="Roboto Flex" pitchFamily="34" charset="-120"/>
               </a:rPr>
-              <a:t>Aasta pärast · näidis · sääst kuni, hinnang</a:t>
+              <a:t>Visioon · iga valdkond vajab eraldi analüüsi</a:t>
             </a:r>
             <a:endParaRPr lang="en-US" sz="1200" dirty="0"/>
           </a:p>
@@ -4174,7 +7695,7 @@
       </p:sp>
       <p:sp>
         <p:nvSpPr>
-          <p:cNvPr id="9" name="Text 7"/>
+          <p:cNvPr id="21" name="Text 15"/>
           <p:cNvSpPr/>
           <p:nvPr/>
         </p:nvSpPr>
@@ -4288,7 +7809,7 @@
                 <a:ea typeface="Merriweather" pitchFamily="18" charset="-122"/>
                 <a:cs typeface="Merriweather" pitchFamily="18" charset="-120"/>
               </a:rPr>
-              <a:t>Miks see on teistsugune</a:t>
+              <a:t>Mis saab edasi?</a:t>
             </a:r>
             <a:endParaRPr lang="en-US" sz="3600" dirty="0"/>
           </a:p>
@@ -4302,12 +7823,210 @@
         </p:nvSpPr>
         <p:spPr>
           <a:xfrm>
-            <a:off x="812800" y="2926060"/>
-            <a:ext cx="3318917" cy="1554460"/>
+            <a:off x="812800" y="2575570"/>
+            <a:ext cx="5130800" cy="2255441"/>
           </a:xfrm>
           <a:prstGeom prst="roundRect">
             <a:avLst>
-              <a:gd name="adj" fmla="val 6536"/>
+              <a:gd name="adj" fmla="val 4505"/>
+            </a:avLst>
+          </a:prstGeom>
+          <a:solidFill>
+            <a:srgbClr val="002F63"/>
+          </a:solidFill>
+          <a:ln/>
+        </p:spPr>
+      </p:sp>
+      <p:sp>
+        <p:nvSpPr>
+          <p:cNvPr id="4" name="Text 2"/>
+          <p:cNvSpPr/>
+          <p:nvPr/>
+        </p:nvSpPr>
+        <p:spPr>
+          <a:xfrm>
+            <a:off x="1117600" y="2880370"/>
+            <a:ext cx="4656836" cy="360660"/>
+          </a:xfrm>
+          <a:prstGeom prst="rect">
+            <a:avLst/>
+          </a:prstGeom>
+          <a:noFill/>
+          <a:ln/>
+        </p:spPr>
+        <p:txBody>
+          <a:bodyPr wrap="square" lIns="0" tIns="0" rIns="0" bIns="0" rtlCol="0" anchor="t">
+            <a:normAutofit/>
+          </a:bodyPr>
+          <a:lstStyle/>
+          <a:p>
+            <a:pPr algn="l" indent="0" marL="0">
+              <a:lnSpc>
+                <a:spcPts val="2640"/>
+              </a:lnSpc>
+              <a:buNone/>
+            </a:pPr>
+            <a:r>
+              <a:rPr lang="en-US" sz="2200" b="1" dirty="0">
+                <a:solidFill>
+                  <a:srgbClr val="FFFFFF"/>
+                </a:solidFill>
+                <a:latin typeface="Merriweather" pitchFamily="18" charset="0"/>
+                <a:ea typeface="Merriweather" pitchFamily="18" charset="-122"/>
+                <a:cs typeface="Merriweather" pitchFamily="18" charset="-120"/>
+              </a:rPr>
+              <a:t>Esimene samm</a:t>
+            </a:r>
+            <a:endParaRPr lang="en-US" sz="2200" dirty="0"/>
+          </a:p>
+        </p:txBody>
+      </p:sp>
+      <p:sp>
+        <p:nvSpPr>
+          <p:cNvPr id="5" name="Text 3"/>
+          <p:cNvSpPr/>
+          <p:nvPr/>
+        </p:nvSpPr>
+        <p:spPr>
+          <a:xfrm>
+            <a:off x="1117600" y="3368030"/>
+            <a:ext cx="4656836" cy="309860"/>
+          </a:xfrm>
+          <a:prstGeom prst="rect">
+            <a:avLst/>
+          </a:prstGeom>
+          <a:noFill/>
+          <a:ln/>
+        </p:spPr>
+        <p:txBody>
+          <a:bodyPr wrap="square" lIns="0" tIns="0" rIns="0" bIns="0" rtlCol="0" anchor="t">
+            <a:normAutofit/>
+          </a:bodyPr>
+          <a:lstStyle/>
+          <a:p>
+            <a:pPr algn="l" indent="0" marL="0">
+              <a:lnSpc>
+                <a:spcPts val="2240"/>
+              </a:lnSpc>
+              <a:buNone/>
+            </a:pPr>
+            <a:r>
+              <a:rPr lang="en-US" sz="1600" dirty="0">
+                <a:solidFill>
+                  <a:srgbClr val="FFFFFF"/>
+                </a:solidFill>
+                <a:latin typeface="Roboto Flex" pitchFamily="34" charset="0"/>
+                <a:ea typeface="Roboto Flex" pitchFamily="34" charset="-122"/>
+                <a:cs typeface="Roboto Flex" pitchFamily="34" charset="-120"/>
+              </a:rPr>
+              <a:t>1. Registreerumine Tuleva kogukonnas</a:t>
+            </a:r>
+            <a:endParaRPr lang="en-US" sz="1600" dirty="0"/>
+          </a:p>
+        </p:txBody>
+      </p:sp>
+      <p:sp>
+        <p:nvSpPr>
+          <p:cNvPr id="6" name="Text 4"/>
+          <p:cNvSpPr/>
+          <p:nvPr/>
+        </p:nvSpPr>
+        <p:spPr>
+          <a:xfrm>
+            <a:off x="1117600" y="3804890"/>
+            <a:ext cx="4656836" cy="309860"/>
+          </a:xfrm>
+          <a:prstGeom prst="rect">
+            <a:avLst/>
+          </a:prstGeom>
+          <a:noFill/>
+          <a:ln/>
+        </p:spPr>
+        <p:txBody>
+          <a:bodyPr wrap="square" lIns="0" tIns="0" rIns="0" bIns="0" rtlCol="0" anchor="t">
+            <a:normAutofit/>
+          </a:bodyPr>
+          <a:lstStyle/>
+          <a:p>
+            <a:pPr algn="l" indent="0" marL="0">
+              <a:lnSpc>
+                <a:spcPts val="2240"/>
+              </a:lnSpc>
+              <a:buNone/>
+            </a:pPr>
+            <a:r>
+              <a:rPr lang="en-US" sz="1600" dirty="0">
+                <a:solidFill>
+                  <a:srgbClr val="FFFFFF"/>
+                </a:solidFill>
+                <a:latin typeface="Roboto Flex" pitchFamily="34" charset="0"/>
+                <a:ea typeface="Roboto Flex" pitchFamily="34" charset="-122"/>
+                <a:cs typeface="Roboto Flex" pitchFamily="34" charset="-120"/>
+              </a:rPr>
+              <a:t>2. Hankepäring kõigile operaatoritele</a:t>
+            </a:r>
+            <a:endParaRPr lang="en-US" sz="1600" dirty="0"/>
+          </a:p>
+        </p:txBody>
+      </p:sp>
+      <p:sp>
+        <p:nvSpPr>
+          <p:cNvPr id="7" name="Text 5"/>
+          <p:cNvSpPr/>
+          <p:nvPr/>
+        </p:nvSpPr>
+        <p:spPr>
+          <a:xfrm>
+            <a:off x="1117600" y="4241750"/>
+            <a:ext cx="4656836" cy="309860"/>
+          </a:xfrm>
+          <a:prstGeom prst="rect">
+            <a:avLst/>
+          </a:prstGeom>
+          <a:noFill/>
+          <a:ln/>
+        </p:spPr>
+        <p:txBody>
+          <a:bodyPr wrap="square" lIns="0" tIns="0" rIns="0" bIns="0" rtlCol="0" anchor="t">
+            <a:normAutofit/>
+          </a:bodyPr>
+          <a:lstStyle/>
+          <a:p>
+            <a:pPr algn="l" indent="0" marL="0">
+              <a:lnSpc>
+                <a:spcPts val="2240"/>
+              </a:lnSpc>
+              <a:buNone/>
+            </a:pPr>
+            <a:r>
+              <a:rPr lang="en-US" sz="1600" dirty="0">
+                <a:solidFill>
+                  <a:srgbClr val="FFFFFF"/>
+                </a:solidFill>
+                <a:latin typeface="Roboto Flex" pitchFamily="34" charset="0"/>
+                <a:ea typeface="Roboto Flex" pitchFamily="34" charset="-122"/>
+                <a:cs typeface="Roboto Flex" pitchFamily="34" charset="-120"/>
+              </a:rPr>
+              <a:t>3. Esimene hange käsitsi</a:t>
+            </a:r>
+            <a:endParaRPr lang="en-US" sz="1600" dirty="0"/>
+          </a:p>
+        </p:txBody>
+      </p:sp>
+      <p:sp>
+        <p:nvSpPr>
+          <p:cNvPr id="8" name="Shape 6"/>
+          <p:cNvSpPr/>
+          <p:nvPr/>
+        </p:nvSpPr>
+        <p:spPr>
+          <a:xfrm>
+            <a:off x="6248400" y="2575570"/>
+            <a:ext cx="5130800" cy="2255441"/>
+          </a:xfrm>
+          <a:prstGeom prst="roundRect">
+            <a:avLst>
+              <a:gd name="adj" fmla="val 4505"/>
             </a:avLst>
           </a:prstGeom>
           <a:solidFill>
@@ -4316,39 +8035,16 @@
           <a:ln/>
         </p:spPr>
       </p:sp>
-      <p:pic>
-        <p:nvPicPr>
-          <p:cNvPr id="4" name="Image 0" descr="Clock">    </p:cNvPr>
-          <p:cNvPicPr>
-            <a:picLocks noChangeAspect="1"/>
-          </p:cNvPicPr>
-          <p:nvPr/>
-        </p:nvPicPr>
-        <p:blipFill>
-          <a:blip r:embed="rId1"/>
-          <a:srcRect l="0" r="0" t="0" b="0"/>
-          <a:stretch/>
-        </p:blipFill>
-        <p:spPr>
-          <a:xfrm>
-            <a:off x="1117600" y="3230860"/>
-            <a:ext cx="406400" cy="406400"/>
-          </a:xfrm>
-          <a:prstGeom prst="rect">
-            <a:avLst/>
-          </a:prstGeom>
-        </p:spPr>
-      </p:pic>
-      <p:sp>
-        <p:nvSpPr>
-          <p:cNvPr id="5" name="Text 2"/>
-          <p:cNvSpPr/>
-          <p:nvPr/>
-        </p:nvSpPr>
-        <p:spPr>
-          <a:xfrm>
-            <a:off x="1117600" y="3840460"/>
-            <a:ext cx="2790596" cy="360660"/>
+      <p:sp>
+        <p:nvSpPr>
+          <p:cNvPr id="9" name="Text 7"/>
+          <p:cNvSpPr/>
+          <p:nvPr/>
+        </p:nvSpPr>
+        <p:spPr>
+          <a:xfrm>
+            <a:off x="6553200" y="2880370"/>
+            <a:ext cx="4656836" cy="360660"/>
           </a:xfrm>
           <a:prstGeom prst="rect">
             <a:avLst/>
@@ -4377,7 +8073,7 @@
                 <a:ea typeface="Merriweather" pitchFamily="18" charset="-122"/>
                 <a:cs typeface="Merriweather" pitchFamily="18" charset="-120"/>
               </a:rPr>
-              <a:t>Hange igal aastal</a:t>
+              <a:t>Mida vajame</a:t>
             </a:r>
             <a:endParaRPr lang="en-US" sz="2200" dirty="0"/>
           </a:p>
@@ -4385,59 +8081,14 @@
       </p:sp>
       <p:sp>
         <p:nvSpPr>
-          <p:cNvPr id="6" name="Shape 3"/>
-          <p:cNvSpPr/>
-          <p:nvPr/>
-        </p:nvSpPr>
-        <p:spPr>
-          <a:xfrm>
-            <a:off x="4436517" y="2926060"/>
-            <a:ext cx="3318966" cy="1554460"/>
-          </a:xfrm>
-          <a:prstGeom prst="roundRect">
-            <a:avLst>
-              <a:gd name="adj" fmla="val 6536"/>
-            </a:avLst>
-          </a:prstGeom>
-          <a:solidFill>
-            <a:srgbClr val="EDF7FD"/>
-          </a:solidFill>
-          <a:ln/>
-        </p:spPr>
-      </p:sp>
-      <p:pic>
-        <p:nvPicPr>
-          <p:cNvPr id="7" name="Image 1" descr="Check">    </p:cNvPr>
-          <p:cNvPicPr>
-            <a:picLocks noChangeAspect="1"/>
-          </p:cNvPicPr>
-          <p:nvPr/>
-        </p:nvPicPr>
-        <p:blipFill>
-          <a:blip r:embed="rId2"/>
-          <a:srcRect l="0" r="0" t="0" b="0"/>
-          <a:stretch/>
-        </p:blipFill>
-        <p:spPr>
-          <a:xfrm>
-            <a:off x="4741317" y="3230860"/>
-            <a:ext cx="406400" cy="406400"/>
-          </a:xfrm>
-          <a:prstGeom prst="rect">
-            <a:avLst/>
-          </a:prstGeom>
-        </p:spPr>
-      </p:pic>
-      <p:sp>
-        <p:nvSpPr>
-          <p:cNvPr id="8" name="Text 4"/>
-          <p:cNvSpPr/>
-          <p:nvPr/>
-        </p:nvSpPr>
-        <p:spPr>
-          <a:xfrm>
-            <a:off x="4741317" y="3840460"/>
-            <a:ext cx="2790647" cy="360660"/>
+          <p:cNvPr id="10" name="Text 8"/>
+          <p:cNvSpPr/>
+          <p:nvPr/>
+        </p:nvSpPr>
+        <p:spPr>
+          <a:xfrm>
+            <a:off x="6553200" y="3368030"/>
+            <a:ext cx="4656836" cy="309860"/>
           </a:xfrm>
           <a:prstGeom prst="rect">
             <a:avLst/>
@@ -4453,80 +8104,35 @@
           <a:p>
             <a:pPr algn="l" indent="0" marL="0">
               <a:lnSpc>
-                <a:spcPts val="2640"/>
+                <a:spcPts val="2240"/>
               </a:lnSpc>
               <a:buNone/>
             </a:pPr>
             <a:r>
-              <a:rPr lang="en-US" sz="2200" b="1" dirty="0">
+              <a:rPr lang="en-US" sz="1600" dirty="0">
                 <a:solidFill>
-                  <a:srgbClr val="002F63"/>
+                  <a:srgbClr val="293036"/>
                 </a:solidFill>
-                <a:latin typeface="Merriweather" pitchFamily="18" charset="0"/>
-                <a:ea typeface="Merriweather" pitchFamily="18" charset="-122"/>
-                <a:cs typeface="Merriweather" pitchFamily="18" charset="-120"/>
+                <a:latin typeface="Roboto Flex" pitchFamily="34" charset="0"/>
+                <a:ea typeface="Roboto Flex" pitchFamily="34" charset="-122"/>
+                <a:cs typeface="Roboto Flex" pitchFamily="34" charset="-120"/>
               </a:rPr>
-              <a:t>Leping on valmis</a:t>
-            </a:r>
-            <a:endParaRPr lang="en-US" sz="2200" dirty="0"/>
-          </a:p>
-        </p:txBody>
-      </p:sp>
-      <p:sp>
-        <p:nvSpPr>
-          <p:cNvPr id="9" name="Shape 5"/>
-          <p:cNvSpPr/>
-          <p:nvPr/>
-        </p:nvSpPr>
-        <p:spPr>
-          <a:xfrm>
-            <a:off x="8060283" y="2926060"/>
-            <a:ext cx="3318917" cy="1554460"/>
-          </a:xfrm>
-          <a:prstGeom prst="roundRect">
-            <a:avLst>
-              <a:gd name="adj" fmla="val 6536"/>
-            </a:avLst>
-          </a:prstGeom>
-          <a:solidFill>
-            <a:srgbClr val="EDF7FD"/>
-          </a:solidFill>
-          <a:ln/>
-        </p:spPr>
-      </p:sp>
-      <p:pic>
-        <p:nvPicPr>
-          <p:cNvPr id="10" name="Image 2" descr="Trust">    </p:cNvPr>
-          <p:cNvPicPr>
-            <a:picLocks noChangeAspect="1"/>
-          </p:cNvPicPr>
-          <p:nvPr/>
-        </p:nvPicPr>
-        <p:blipFill>
-          <a:blip r:embed="rId3"/>
-          <a:srcRect l="0" r="0" t="0" b="0"/>
-          <a:stretch/>
-        </p:blipFill>
-        <p:spPr>
-          <a:xfrm>
-            <a:off x="8365083" y="3230860"/>
-            <a:ext cx="406400" cy="406400"/>
-          </a:xfrm>
-          <a:prstGeom prst="rect">
-            <a:avLst/>
-          </a:prstGeom>
-        </p:spPr>
-      </p:pic>
-      <p:sp>
-        <p:nvSpPr>
-          <p:cNvPr id="11" name="Text 6"/>
-          <p:cNvSpPr/>
-          <p:nvPr/>
-        </p:nvSpPr>
-        <p:spPr>
-          <a:xfrm>
-            <a:off x="8365083" y="3840460"/>
-            <a:ext cx="2790596" cy="360660"/>
+              <a:t>Tuleva otsus ja üks inimene</a:t>
+            </a:r>
+            <a:endParaRPr lang="en-US" sz="1600" dirty="0"/>
+          </a:p>
+        </p:txBody>
+      </p:sp>
+      <p:sp>
+        <p:nvSpPr>
+          <p:cNvPr id="11" name="Text 9"/>
+          <p:cNvSpPr/>
+          <p:nvPr/>
+        </p:nvSpPr>
+        <p:spPr>
+          <a:xfrm>
+            <a:off x="6553200" y="3804890"/>
+            <a:ext cx="4656836" cy="309860"/>
           </a:xfrm>
           <a:prstGeom prst="rect">
             <a:avLst/>
@@ -4542,35 +8148,79 @@
           <a:p>
             <a:pPr algn="l" indent="0" marL="0">
               <a:lnSpc>
-                <a:spcPts val="2640"/>
+                <a:spcPts val="2240"/>
               </a:lnSpc>
               <a:buNone/>
             </a:pPr>
             <a:r>
-              <a:rPr lang="en-US" sz="2200" b="1" dirty="0">
+              <a:rPr lang="en-US" sz="1600" dirty="0">
                 <a:solidFill>
-                  <a:srgbClr val="002F63"/>
+                  <a:srgbClr val="293036"/>
                 </a:solidFill>
-                <a:latin typeface="Merriweather" pitchFamily="18" charset="0"/>
-                <a:ea typeface="Merriweather" pitchFamily="18" charset="-122"/>
-                <a:cs typeface="Merriweather" pitchFamily="18" charset="-120"/>
+                <a:latin typeface="Roboto Flex" pitchFamily="34" charset="0"/>
+                <a:ea typeface="Roboto Flex" pitchFamily="34" charset="-122"/>
+                <a:cs typeface="Roboto Flex" pitchFamily="34" charset="-120"/>
               </a:rPr>
-              <a:t>Tasu on nähtav</a:t>
-            </a:r>
-            <a:endParaRPr lang="en-US" sz="2200" dirty="0"/>
-          </a:p>
-        </p:txBody>
-      </p:sp>
-      <p:sp>
-        <p:nvSpPr>
-          <p:cNvPr id="12" name="Text 7"/>
+              <a:t>Õigus- ja andmekaitseanalüüs</a:t>
+            </a:r>
+            <a:endParaRPr lang="en-US" sz="1600" dirty="0"/>
+          </a:p>
+        </p:txBody>
+      </p:sp>
+      <p:sp>
+        <p:nvSpPr>
+          <p:cNvPr id="12" name="Text 10"/>
+          <p:cNvSpPr/>
+          <p:nvPr/>
+        </p:nvSpPr>
+        <p:spPr>
+          <a:xfrm>
+            <a:off x="6553200" y="4241750"/>
+            <a:ext cx="4656836" cy="309860"/>
+          </a:xfrm>
+          <a:prstGeom prst="rect">
+            <a:avLst/>
+          </a:prstGeom>
+          <a:noFill/>
+          <a:ln/>
+        </p:spPr>
+        <p:txBody>
+          <a:bodyPr wrap="square" lIns="0" tIns="0" rIns="0" bIns="0" rtlCol="0" anchor="t">
+            <a:normAutofit/>
+          </a:bodyPr>
+          <a:lstStyle/>
+          <a:p>
+            <a:pPr algn="l" indent="0" marL="0">
+              <a:lnSpc>
+                <a:spcPts val="2240"/>
+              </a:lnSpc>
+              <a:buNone/>
+            </a:pPr>
+            <a:r>
+              <a:rPr lang="en-US" sz="1600" dirty="0">
+                <a:solidFill>
+                  <a:srgbClr val="293036"/>
+                </a:solidFill>
+                <a:latin typeface="Roboto Flex" pitchFamily="34" charset="0"/>
+                <a:ea typeface="Roboto Flex" pitchFamily="34" charset="-122"/>
+                <a:cs typeface="Roboto Flex" pitchFamily="34" charset="-120"/>
+              </a:rPr>
+              <a:t>Kontakt operaatoritega</a:t>
+            </a:r>
+            <a:endParaRPr lang="en-US" sz="1600" dirty="0"/>
+          </a:p>
+        </p:txBody>
+      </p:sp>
+      <p:sp>
+        <p:nvSpPr>
+          <p:cNvPr id="13" name="Text 11"/>
           <p:cNvSpPr/>
           <p:nvPr/>
         </p:nvSpPr>
         <p:spPr>
           <a:xfrm>
             <a:off x="812800" y="6238280"/>
-            <a:ext cx="2789813" cy="238720"/>
+            <a:ext cx="5962769" cy="238720"/>
           </a:xfrm>
           <a:prstGeom prst="rect">
             <a:avLst/>
@@ -4599,7 +8249,7 @@
                 <a:ea typeface="Roboto Flex" pitchFamily="34" charset="-122"/>
                 <a:cs typeface="Roboto Flex" pitchFamily="34" charset="-120"/>
               </a:rPr>
-              <a:t>Null infomüra · usaldus · järjekindlus</a:t>
+              <a:t>Esimene hange tabelite ja e-kirjadega, automatiseerime pärast esimest tsüklit</a:t>
             </a:r>
             <a:endParaRPr lang="en-US" sz="1200" dirty="0"/>
           </a:p>
@@ -4607,7 +8257,7 @@
       </p:sp>
       <p:sp>
         <p:nvSpPr>
-          <p:cNvPr id="13" name="Text 8"/>
+          <p:cNvPr id="14" name="Text 12"/>
           <p:cNvSpPr/>
           <p:nvPr/>
         </p:nvSpPr>
@@ -4743,7 +8393,7 @@
                 <a:ea typeface="Merriweather" pitchFamily="18" charset="-122"/>
                 <a:cs typeface="Merriweather" pitchFamily="18" charset="-120"/>
               </a:rPr>
-              <a:t>Tulu katab kulud teisel aastal</a:t>
+              <a:t>5. aastaks katab tulu 96% kuludest</a:t>
             </a:r>
             <a:endParaRPr lang="en-US" sz="3600" dirty="0"/>
           </a:p>
@@ -4787,7 +8437,7 @@
                 <a:ea typeface="Roboto Flex" pitchFamily="34" charset="-122"/>
                 <a:cs typeface="Roboto Flex" pitchFamily="34" charset="-120"/>
               </a:rPr>
-              <a:t>Baasprognoos, Tuleva tasu 1 € kuus lepingu kohta</a:t>
+              <a:t>Baasprognoos, tasu 1 € kuus, kogu töötaja kulu mobiilile</a:t>
             </a:r>
             <a:endParaRPr lang="en-US" sz="1600" dirty="0"/>
           </a:p>
@@ -4933,8 +8583,8 @@
         </p:nvSpPr>
         <p:spPr>
           <a:xfrm>
-            <a:off x="1441450" y="4673600"/>
-            <a:ext cx="635000" cy="533400"/>
+            <a:off x="1441450" y="4699000"/>
+            <a:ext cx="635000" cy="508000"/>
           </a:xfrm>
           <a:custGeom>
             <a:avLst/>
@@ -4943,7 +8593,7 @@
             <a:cxnLst/>
             <a:rect l="l" t="t" r="r" b="b"/>
             <a:pathLst>
-              <a:path w="635000" h="533400">
+              <a:path w="635000" h="508000">
                 <a:moveTo>
                   <a:pt x="50800" y="0"/>
                 </a:moveTo>
@@ -4952,10 +8602,10 @@
                 </a:lnTo>
                 <a:arcTo hR="50800" wR="50800" stAng="16200000" swAng="5400000"/>
                 <a:lnTo>
-                  <a:pt x="635000" y="533400"/>
+                  <a:pt x="635000" y="508000"/>
                 </a:lnTo>
                 <a:lnTo>
-                  <a:pt x="0" y="533400"/>
+                  <a:pt x="0" y="508000"/>
                 </a:lnTo>
                 <a:lnTo>
                   <a:pt x="0" y="50800"/>
@@ -5025,8 +8675,8 @@
         </p:nvSpPr>
         <p:spPr>
           <a:xfrm>
-            <a:off x="3441700" y="3486150"/>
-            <a:ext cx="635000" cy="1720850"/>
+            <a:off x="3441700" y="3562350"/>
+            <a:ext cx="635000" cy="1644650"/>
           </a:xfrm>
           <a:custGeom>
             <a:avLst/>
@@ -5035,7 +8685,7 @@
             <a:cxnLst/>
             <a:rect l="l" t="t" r="r" b="b"/>
             <a:pathLst>
-              <a:path w="635000" h="1720850">
+              <a:path w="635000" h="1644650">
                 <a:moveTo>
                   <a:pt x="50800" y="0"/>
                 </a:moveTo>
@@ -5044,10 +8694,10 @@
                 </a:lnTo>
                 <a:arcTo hR="50800" wR="50800" stAng="16200000" swAng="5400000"/>
                 <a:lnTo>
-                  <a:pt x="635000" y="1720850"/>
+                  <a:pt x="635000" y="1644650"/>
                 </a:lnTo>
                 <a:lnTo>
-                  <a:pt x="0" y="1720850"/>
+                  <a:pt x="0" y="1644650"/>
                 </a:lnTo>
                 <a:lnTo>
                   <a:pt x="0" y="50800"/>
@@ -5071,8 +8721,8 @@
         </p:nvSpPr>
         <p:spPr>
           <a:xfrm>
-            <a:off x="4152900" y="4108450"/>
-            <a:ext cx="635000" cy="1098550"/>
+            <a:off x="4152900" y="3016250"/>
+            <a:ext cx="635000" cy="2190750"/>
           </a:xfrm>
           <a:custGeom>
             <a:avLst/>
@@ -5081,7 +8731,7 @@
             <a:cxnLst/>
             <a:rect l="l" t="t" r="r" b="b"/>
             <a:pathLst>
-              <a:path w="635000" h="1098550">
+              <a:path w="635000" h="2190750">
                 <a:moveTo>
                   <a:pt x="50800" y="0"/>
                 </a:moveTo>
@@ -5090,10 +8740,10 @@
                 </a:lnTo>
                 <a:arcTo hR="50800" wR="50800" stAng="16200000" swAng="5400000"/>
                 <a:lnTo>
-                  <a:pt x="635000" y="1098550"/>
+                  <a:pt x="635000" y="2190750"/>
                 </a:lnTo>
                 <a:lnTo>
-                  <a:pt x="0" y="1098550"/>
+                  <a:pt x="0" y="2190750"/>
                 </a:lnTo>
                 <a:lnTo>
                   <a:pt x="0" y="50800"/>
@@ -5117,8 +8767,8 @@
         </p:nvSpPr>
         <p:spPr>
           <a:xfrm>
-            <a:off x="5441950" y="3009900"/>
-            <a:ext cx="635000" cy="2197100"/>
+            <a:off x="5441950" y="3111500"/>
+            <a:ext cx="635000" cy="2095500"/>
           </a:xfrm>
           <a:custGeom>
             <a:avLst/>
@@ -5127,7 +8777,7 @@
             <a:cxnLst/>
             <a:rect l="l" t="t" r="r" b="b"/>
             <a:pathLst>
-              <a:path w="635000" h="2197100">
+              <a:path w="635000" h="2095500">
                 <a:moveTo>
                   <a:pt x="50800" y="0"/>
                 </a:moveTo>
@@ -5136,10 +8786,10 @@
                 </a:lnTo>
                 <a:arcTo hR="50800" wR="50800" stAng="16200000" swAng="5400000"/>
                 <a:lnTo>
-                  <a:pt x="635000" y="2197100"/>
+                  <a:pt x="635000" y="2095500"/>
                 </a:lnTo>
                 <a:lnTo>
-                  <a:pt x="0" y="2197100"/>
+                  <a:pt x="0" y="2095500"/>
                 </a:lnTo>
                 <a:lnTo>
                   <a:pt x="0" y="50800"/>
@@ -5163,8 +8813,8 @@
         </p:nvSpPr>
         <p:spPr>
           <a:xfrm>
-            <a:off x="6153150" y="4108450"/>
-            <a:ext cx="635000" cy="1098550"/>
+            <a:off x="6153150" y="3016250"/>
+            <a:ext cx="635000" cy="2190750"/>
           </a:xfrm>
           <a:custGeom>
             <a:avLst/>
@@ -5173,7 +8823,7 @@
             <a:cxnLst/>
             <a:rect l="l" t="t" r="r" b="b"/>
             <a:pathLst>
-              <a:path w="635000" h="1098550">
+              <a:path w="635000" h="2190750">
                 <a:moveTo>
                   <a:pt x="50800" y="0"/>
                 </a:moveTo>
@@ -5182,10 +8832,10 @@
                 </a:lnTo>
                 <a:arcTo hR="50800" wR="50800" stAng="16200000" swAng="5400000"/>
                 <a:lnTo>
-                  <a:pt x="635000" y="1098550"/>
+                  <a:pt x="635000" y="2190750"/>
                 </a:lnTo>
                 <a:lnTo>
-                  <a:pt x="0" y="1098550"/>
+                  <a:pt x="0" y="2190750"/>
                 </a:lnTo>
                 <a:lnTo>
                   <a:pt x="0" y="50800"/>
@@ -5229,7 +8879,7 @@
         </p:nvSpPr>
         <p:spPr>
           <a:xfrm>
-            <a:off x="1289050" y="4419600"/>
+            <a:off x="1289050" y="4445000"/>
             <a:ext cx="939800" cy="223490"/>
           </a:xfrm>
           <a:prstGeom prst="rect">
@@ -5259,7 +8909,7 @@
                 <a:ea typeface="Roboto Flex" pitchFamily="34" charset="-122"/>
                 <a:cs typeface="Roboto Flex" pitchFamily="34" charset="-120"/>
               </a:rPr>
-              <a:t>16,8k €</a:t>
+              <a:t>16,0k €</a:t>
             </a:r>
             <a:endParaRPr lang="en-US" sz="1200" dirty="0"/>
           </a:p>
@@ -5317,7 +8967,7 @@
         </p:nvSpPr>
         <p:spPr>
           <a:xfrm>
-            <a:off x="3289300" y="3232150"/>
+            <a:off x="3289300" y="3308350"/>
             <a:ext cx="939800" cy="223490"/>
           </a:xfrm>
           <a:prstGeom prst="rect">
@@ -5347,7 +8997,7 @@
                 <a:ea typeface="Roboto Flex" pitchFamily="34" charset="-122"/>
                 <a:cs typeface="Roboto Flex" pitchFamily="34" charset="-120"/>
               </a:rPr>
-              <a:t>54,2k €</a:t>
+              <a:t>51,9k €</a:t>
             </a:r>
             <a:endParaRPr lang="en-US" sz="1200" dirty="0"/>
           </a:p>
@@ -5361,7 +9011,7 @@
         </p:nvSpPr>
         <p:spPr>
           <a:xfrm>
-            <a:off x="4000500" y="3854450"/>
+            <a:off x="4000500" y="2762250"/>
             <a:ext cx="939800" cy="223490"/>
           </a:xfrm>
           <a:prstGeom prst="rect">
@@ -5391,7 +9041,7 @@
                 <a:ea typeface="Roboto Flex" pitchFamily="34" charset="-122"/>
                 <a:cs typeface="Roboto Flex" pitchFamily="34" charset="-120"/>
               </a:rPr>
-              <a:t>34,5k €</a:t>
+              <a:t>69k €</a:t>
             </a:r>
             <a:endParaRPr lang="en-US" sz="1200" dirty="0"/>
           </a:p>
@@ -5405,7 +9055,7 @@
         </p:nvSpPr>
         <p:spPr>
           <a:xfrm>
-            <a:off x="5289550" y="2755900"/>
+            <a:off x="5289550" y="2857500"/>
             <a:ext cx="939800" cy="223490"/>
           </a:xfrm>
           <a:prstGeom prst="rect">
@@ -5435,7 +9085,7 @@
                 <a:ea typeface="Roboto Flex" pitchFamily="34" charset="-122"/>
                 <a:cs typeface="Roboto Flex" pitchFamily="34" charset="-120"/>
               </a:rPr>
-              <a:t>69,1k €</a:t>
+              <a:t>66,1k €</a:t>
             </a:r>
             <a:endParaRPr lang="en-US" sz="1200" dirty="0"/>
           </a:p>
@@ -5449,7 +9099,7 @@
         </p:nvSpPr>
         <p:spPr>
           <a:xfrm>
-            <a:off x="6000750" y="3854450"/>
+            <a:off x="6000750" y="2762250"/>
             <a:ext cx="939800" cy="223490"/>
           </a:xfrm>
           <a:prstGeom prst="rect">
@@ -5479,7 +9129,7 @@
                 <a:ea typeface="Roboto Flex" pitchFamily="34" charset="-122"/>
                 <a:cs typeface="Roboto Flex" pitchFamily="34" charset="-120"/>
               </a:rPr>
-              <a:t>34,5k €</a:t>
+              <a:t>69k €</a:t>
             </a:r>
             <a:endParaRPr lang="en-US" sz="1200" dirty="0"/>
           </a:p>
@@ -5743,7 +9393,7 @@
                 <a:ea typeface="Merriweather" pitchFamily="18" charset="-122"/>
                 <a:cs typeface="Merriweather" pitchFamily="18" charset="-120"/>
               </a:rPr>
-              <a:t>2 900</a:t>
+              <a:t>5 750</a:t>
             </a:r>
             <a:endParaRPr lang="en-US" sz="6000" dirty="0"/>
           </a:p>
@@ -5787,7 +9437,7 @@
                 <a:ea typeface="Roboto Flex" pitchFamily="34" charset="-122"/>
                 <a:cs typeface="Roboto Flex" pitchFamily="34" charset="-120"/>
               </a:rPr>
-              <a:t>lepingut katab jooksvad kulud</a:t>
+              <a:t>lepingut katab ühe töötaja kulu</a:t>
             </a:r>
             <a:endParaRPr lang="en-US" sz="1600" dirty="0"/>
           </a:p>
@@ -5802,7 +9452,7 @@
         <p:spPr>
           <a:xfrm>
             <a:off x="812800" y="6238280"/>
-            <a:ext cx="7007423" cy="238720"/>
+            <a:ext cx="7107912" cy="238720"/>
           </a:xfrm>
           <a:prstGeom prst="rect">
             <a:avLst/>
@@ -5831,7 +9481,7 @@
                 <a:ea typeface="Roboto Flex" pitchFamily="34" charset="-122"/>
                 <a:cs typeface="Roboto Flex" pitchFamily="34" charset="-120"/>
               </a:rPr>
-              <a:t>Hinnang · kulu 1 töötaja, mobiilile 1. aastal 100%, edasi 50% · kumulatiivselt nullis 4. aastal</a:t>
+              <a:t>Hinnang · Marju prognoos, 9 560 liiget · kulu 1 täiskoht 2× keskmise palgaga, 100% mobiilile</a:t>
             </a:r>
             <a:endParaRPr lang="en-US" sz="1200" dirty="0"/>
           </a:p>
@@ -5953,22 +9603,1462 @@
                 <a:ea typeface="Merriweather" pitchFamily="18" charset="-122"/>
                 <a:cs typeface="Merriweather" pitchFamily="18" charset="-120"/>
               </a:rPr>
-              <a:t>Ühine ostujõud igas valdkonnas</a:t>
+              <a:t>Ärimudel: eeldused ja arvutus</a:t>
             </a:r>
             <a:endParaRPr lang="en-US" sz="3600" dirty="0"/>
           </a:p>
         </p:txBody>
       </p:sp>
-      <p:sp>
-        <p:nvSpPr>
-          <p:cNvPr id="3" name="Text 1"/>
-          <p:cNvSpPr/>
-          <p:nvPr/>
-        </p:nvSpPr>
-        <p:spPr>
-          <a:xfrm>
-            <a:off x="812800" y="1463030"/>
-            <a:ext cx="10883392" cy="309860"/>
+      <p:graphicFrame>
+        <p:nvGraphicFramePr>
+          <p:cNvPr id="3" name="Table 0"/>
+          <p:cNvGraphicFramePr>
+            <a:graphicFrameLocks noGrp="1"/>
+          </p:cNvGraphicFramePr>
+          <p:nvPr>
+            <p:extLst>
+              <p:ext uri="{D42A27DB-BD31-4B8C-83A1-F6EECF244321}">
+                <p14:modId xmlns:p14="http://schemas.microsoft.com/office/powerpoint/2010/main" val="1579011935"/>
+              </p:ext>
+            </p:extLst>
+          </p:nvPr>
+        </p:nvGraphicFramePr>
+        <p:xfrm>
+          <a:off x="825500" y="1577330"/>
+          <a:ext cx="5829300" cy="3962301"/>
+        </p:xfrm>
+        <a:graphic>
+          <a:graphicData uri="http://schemas.openxmlformats.org/drawingml/2006/table">
+            <a:tbl>
+              <a:tblPr/>
+              <a:tblGrid>
+                <a:gridCol w="3206115"/>
+                <a:gridCol w="2623185"/>
+              </a:tblGrid>
+              <a:tr h="396230">
+                <a:tc>
+                  <a:txBody>
+                    <a:bodyPr/>
+                    <a:lstStyle/>
+                    <a:p>
+                      <a:pPr indent="0" marL="0">
+                        <a:lnSpc>
+                          <a:spcPts val="1820"/>
+                        </a:lnSpc>
+                        <a:buNone/>
+                      </a:pPr>
+                      <a:r>
+                        <a:rPr lang="en-US" sz="1300" b="1" dirty="0">
+                          <a:solidFill>
+                            <a:srgbClr val="FFFFFF"/>
+                          </a:solidFill>
+                          <a:latin typeface="Roboto Flex" pitchFamily="34" charset="0"/>
+                          <a:ea typeface="Roboto Flex" pitchFamily="34" charset="-122"/>
+                          <a:cs typeface="Roboto Flex" pitchFamily="34" charset="-120"/>
+                        </a:rPr>
+                        <a:t>Eeldus (baas)</a:t>
+                      </a:r>
+                      <a:endParaRPr lang="en-US" sz="1300" dirty="0">
+                        <a:latin typeface="Roboto Flex" charset="0"/>
+                        <a:ea typeface="Roboto Flex" charset="0"/>
+                        <a:cs typeface="Roboto Flex" charset="0"/>
+                      </a:endParaRPr>
+                    </a:p>
+                  </a:txBody>
+                  <a:tcPr marL="127000" marR="127000" marT="76200" marB="76200" anchor="t">
+                    <a:lnL w="12700" cap="flat" cmpd="sng" algn="ctr">
+                      <a:solidFill>
+                        <a:srgbClr val="CBCBCB"/>
+                      </a:solidFill>
+                      <a:prstDash val="solid"/>
+                      <a:round/>
+                      <a:headEnd type="none" w="med" len="med"/>
+                      <a:tailEnd type="none" w="med" len="med"/>
+                    </a:lnL>
+                    <a:lnR w="12700" cap="flat" cmpd="sng" algn="ctr">
+                      <a:solidFill>
+                        <a:srgbClr val="042951"/>
+                      </a:solidFill>
+                      <a:prstDash val="solid"/>
+                      <a:round/>
+                      <a:headEnd type="none" w="med" len="med"/>
+                      <a:tailEnd type="none" w="med" len="med"/>
+                    </a:lnR>
+                    <a:lnT w="12700" cap="flat" cmpd="sng" algn="ctr">
+                      <a:solidFill>
+                        <a:srgbClr val="CBCBCB"/>
+                      </a:solidFill>
+                      <a:prstDash val="solid"/>
+                      <a:round/>
+                      <a:headEnd type="none" w="med" len="med"/>
+                      <a:tailEnd type="none" w="med" len="med"/>
+                    </a:lnT>
+                    <a:lnB w="12700" cap="flat" cmpd="sng" algn="ctr">
+                      <a:solidFill>
+                        <a:srgbClr val="042951"/>
+                      </a:solidFill>
+                      <a:prstDash val="solid"/>
+                      <a:round/>
+                      <a:headEnd type="none" w="med" len="med"/>
+                      <a:tailEnd type="none" w="med" len="med"/>
+                    </a:lnB>
+                    <a:solidFill>
+                      <a:srgbClr val="002F63"/>
+                    </a:solidFill>
+                  </a:tcPr>
+                </a:tc>
+                <a:tc>
+                  <a:txBody>
+                    <a:bodyPr/>
+                    <a:lstStyle/>
+                    <a:p>
+                      <a:pPr indent="0" marL="0">
+                        <a:lnSpc>
+                          <a:spcPts val="1820"/>
+                        </a:lnSpc>
+                        <a:buNone/>
+                      </a:pPr>
+                      <a:r>
+                        <a:rPr lang="en-US" sz="1300" b="1" dirty="0">
+                          <a:solidFill>
+                            <a:srgbClr val="FFFFFF"/>
+                          </a:solidFill>
+                          <a:latin typeface="Roboto Flex" pitchFamily="34" charset="0"/>
+                          <a:ea typeface="Roboto Flex" pitchFamily="34" charset="-122"/>
+                          <a:cs typeface="Roboto Flex" pitchFamily="34" charset="-120"/>
+                        </a:rPr>
+                        <a:t>Väärtus</a:t>
+                      </a:r>
+                      <a:endParaRPr lang="en-US" sz="1300" dirty="0">
+                        <a:latin typeface="Roboto Flex" charset="0"/>
+                        <a:ea typeface="Roboto Flex" charset="0"/>
+                        <a:cs typeface="Roboto Flex" charset="0"/>
+                      </a:endParaRPr>
+                    </a:p>
+                  </a:txBody>
+                  <a:tcPr marL="127000" marR="127000" marT="76200" marB="76200" anchor="t">
+                    <a:lnL w="12700" cap="flat" cmpd="sng" algn="ctr">
+                      <a:solidFill>
+                        <a:srgbClr val="042951"/>
+                      </a:solidFill>
+                      <a:prstDash val="solid"/>
+                      <a:round/>
+                      <a:headEnd type="none" w="med" len="med"/>
+                      <a:tailEnd type="none" w="med" len="med"/>
+                    </a:lnL>
+                    <a:lnR w="12700" cap="flat" cmpd="sng" algn="ctr">
+                      <a:solidFill>
+                        <a:srgbClr val="042951"/>
+                      </a:solidFill>
+                      <a:prstDash val="solid"/>
+                      <a:round/>
+                      <a:headEnd type="none" w="med" len="med"/>
+                      <a:tailEnd type="none" w="med" len="med"/>
+                    </a:lnR>
+                    <a:lnT w="12700" cap="flat" cmpd="sng" algn="ctr">
+                      <a:solidFill>
+                        <a:srgbClr val="CBCBCB"/>
+                      </a:solidFill>
+                      <a:prstDash val="solid"/>
+                      <a:round/>
+                      <a:headEnd type="none" w="med" len="med"/>
+                      <a:tailEnd type="none" w="med" len="med"/>
+                    </a:lnT>
+                    <a:lnB w="12700" cap="flat" cmpd="sng" algn="ctr">
+                      <a:solidFill>
+                        <a:srgbClr val="042951"/>
+                      </a:solidFill>
+                      <a:prstDash val="solid"/>
+                      <a:round/>
+                      <a:headEnd type="none" w="med" len="med"/>
+                      <a:tailEnd type="none" w="med" len="med"/>
+                    </a:lnB>
+                    <a:solidFill>
+                      <a:srgbClr val="002F63"/>
+                    </a:solidFill>
+                  </a:tcPr>
+                </a:tc>
+              </a:tr>
+              <a:tr h="396230">
+                <a:tc>
+                  <a:txBody>
+                    <a:bodyPr/>
+                    <a:lstStyle/>
+                    <a:p>
+                      <a:pPr indent="0" marL="0">
+                        <a:lnSpc>
+                          <a:spcPts val="1820"/>
+                        </a:lnSpc>
+                        <a:buNone/>
+                      </a:pPr>
+                      <a:r>
+                        <a:rPr lang="en-US" sz="1300" dirty="0">
+                          <a:solidFill>
+                            <a:srgbClr val="293036"/>
+                          </a:solidFill>
+                          <a:latin typeface="Roboto Flex" pitchFamily="34" charset="0"/>
+                          <a:ea typeface="Roboto Flex" pitchFamily="34" charset="-122"/>
+                          <a:cs typeface="Roboto Flex" pitchFamily="34" charset="-120"/>
+                        </a:rPr>
+                        <a:t>Liikmeid</a:t>
+                      </a:r>
+                      <a:endParaRPr lang="en-US" sz="1300" dirty="0">
+                        <a:latin typeface="Roboto Flex" charset="0"/>
+                        <a:ea typeface="Roboto Flex" charset="0"/>
+                        <a:cs typeface="Roboto Flex" charset="0"/>
+                      </a:endParaRPr>
+                    </a:p>
+                  </a:txBody>
+                  <a:tcPr marL="127000" marR="127000" marT="76200" marB="76200" anchor="t">
+                    <a:lnL w="12700" cap="flat" cmpd="sng" algn="ctr">
+                      <a:solidFill>
+                        <a:srgbClr val="CBCBCB"/>
+                      </a:solidFill>
+                      <a:prstDash val="solid"/>
+                      <a:round/>
+                      <a:headEnd type="none" w="med" len="med"/>
+                      <a:tailEnd type="none" w="med" len="med"/>
+                    </a:lnL>
+                    <a:lnR w="12700" cap="flat" cmpd="sng" algn="ctr">
+                      <a:solidFill>
+                        <a:srgbClr val="CBCBCB"/>
+                      </a:solidFill>
+                      <a:prstDash val="solid"/>
+                      <a:round/>
+                      <a:headEnd type="none" w="med" len="med"/>
+                      <a:tailEnd type="none" w="med" len="med"/>
+                    </a:lnR>
+                    <a:lnT w="12700" cap="flat" cmpd="sng" algn="ctr">
+                      <a:solidFill>
+                        <a:srgbClr val="042951"/>
+                      </a:solidFill>
+                      <a:prstDash val="solid"/>
+                      <a:round/>
+                      <a:headEnd type="none" w="med" len="med"/>
+                      <a:tailEnd type="none" w="med" len="med"/>
+                    </a:lnT>
+                    <a:lnB w="12700" cap="flat" cmpd="sng" algn="ctr">
+                      <a:solidFill>
+                        <a:srgbClr val="CBCBCB"/>
+                      </a:solidFill>
+                      <a:prstDash val="solid"/>
+                      <a:round/>
+                      <a:headEnd type="none" w="med" len="med"/>
+                      <a:tailEnd type="none" w="med" len="med"/>
+                    </a:lnB>
+                  </a:tcPr>
+                </a:tc>
+                <a:tc>
+                  <a:txBody>
+                    <a:bodyPr/>
+                    <a:lstStyle/>
+                    <a:p>
+                      <a:pPr indent="0" marL="0">
+                        <a:lnSpc>
+                          <a:spcPts val="1820"/>
+                        </a:lnSpc>
+                        <a:buNone/>
+                      </a:pPr>
+                      <a:r>
+                        <a:rPr lang="en-US" sz="1300" dirty="0">
+                          <a:solidFill>
+                            <a:srgbClr val="293036"/>
+                          </a:solidFill>
+                          <a:latin typeface="Roboto Flex" pitchFamily="34" charset="0"/>
+                          <a:ea typeface="Roboto Flex" pitchFamily="34" charset="-122"/>
+                          <a:cs typeface="Roboto Flex" pitchFamily="34" charset="-120"/>
+                        </a:rPr>
+                        <a:t>9 560</a:t>
+                      </a:r>
+                      <a:endParaRPr lang="en-US" sz="1300" dirty="0">
+                        <a:latin typeface="Roboto Flex" charset="0"/>
+                        <a:ea typeface="Roboto Flex" charset="0"/>
+                        <a:cs typeface="Roboto Flex" charset="0"/>
+                      </a:endParaRPr>
+                    </a:p>
+                  </a:txBody>
+                  <a:tcPr marL="127000" marR="127000" marT="76200" marB="76200" anchor="t">
+                    <a:lnL w="12700" cap="flat" cmpd="sng" algn="ctr">
+                      <a:solidFill>
+                        <a:srgbClr val="CBCBCB"/>
+                      </a:solidFill>
+                      <a:prstDash val="solid"/>
+                      <a:round/>
+                      <a:headEnd type="none" w="med" len="med"/>
+                      <a:tailEnd type="none" w="med" len="med"/>
+                    </a:lnL>
+                    <a:lnR w="12700" cap="flat" cmpd="sng" algn="ctr">
+                      <a:solidFill>
+                        <a:srgbClr val="CBCBCB"/>
+                      </a:solidFill>
+                      <a:prstDash val="solid"/>
+                      <a:round/>
+                      <a:headEnd type="none" w="med" len="med"/>
+                      <a:tailEnd type="none" w="med" len="med"/>
+                    </a:lnR>
+                    <a:lnT w="12700" cap="flat" cmpd="sng" algn="ctr">
+                      <a:solidFill>
+                        <a:srgbClr val="042951"/>
+                      </a:solidFill>
+                      <a:prstDash val="solid"/>
+                      <a:round/>
+                      <a:headEnd type="none" w="med" len="med"/>
+                      <a:tailEnd type="none" w="med" len="med"/>
+                    </a:lnT>
+                    <a:lnB w="12700" cap="flat" cmpd="sng" algn="ctr">
+                      <a:solidFill>
+                        <a:srgbClr val="CBCBCB"/>
+                      </a:solidFill>
+                      <a:prstDash val="solid"/>
+                      <a:round/>
+                      <a:headEnd type="none" w="med" len="med"/>
+                      <a:tailEnd type="none" w="med" len="med"/>
+                    </a:lnB>
+                  </a:tcPr>
+                </a:tc>
+              </a:tr>
+              <a:tr h="396230">
+                <a:tc>
+                  <a:txBody>
+                    <a:bodyPr/>
+                    <a:lstStyle/>
+                    <a:p>
+                      <a:pPr indent="0" marL="0">
+                        <a:lnSpc>
+                          <a:spcPts val="1820"/>
+                        </a:lnSpc>
+                        <a:buNone/>
+                      </a:pPr>
+                      <a:r>
+                        <a:rPr lang="en-US" sz="1300" dirty="0">
+                          <a:solidFill>
+                            <a:srgbClr val="293036"/>
+                          </a:solidFill>
+                          <a:latin typeface="Roboto Flex" pitchFamily="34" charset="0"/>
+                          <a:ea typeface="Roboto Flex" pitchFamily="34" charset="-122"/>
+                          <a:cs typeface="Roboto Flex" pitchFamily="34" charset="-120"/>
+                        </a:rPr>
+                        <a:t>Registreerub liikmetest</a:t>
+                      </a:r>
+                      <a:endParaRPr lang="en-US" sz="1300" dirty="0">
+                        <a:latin typeface="Roboto Flex" charset="0"/>
+                        <a:ea typeface="Roboto Flex" charset="0"/>
+                        <a:cs typeface="Roboto Flex" charset="0"/>
+                      </a:endParaRPr>
+                    </a:p>
+                  </a:txBody>
+                  <a:tcPr marL="127000" marR="127000" marT="76200" marB="76200" anchor="t">
+                    <a:lnL w="12700" cap="flat" cmpd="sng" algn="ctr">
+                      <a:solidFill>
+                        <a:srgbClr val="CBCBCB"/>
+                      </a:solidFill>
+                      <a:prstDash val="solid"/>
+                      <a:round/>
+                      <a:headEnd type="none" w="med" len="med"/>
+                      <a:tailEnd type="none" w="med" len="med"/>
+                    </a:lnL>
+                    <a:lnR w="12700" cap="flat" cmpd="sng" algn="ctr">
+                      <a:solidFill>
+                        <a:srgbClr val="C4C5C6"/>
+                      </a:solidFill>
+                      <a:prstDash val="solid"/>
+                      <a:round/>
+                      <a:headEnd type="none" w="med" len="med"/>
+                      <a:tailEnd type="none" w="med" len="med"/>
+                    </a:lnR>
+                    <a:lnT w="12700" cap="flat" cmpd="sng" algn="ctr">
+                      <a:solidFill>
+                        <a:srgbClr val="CBCBCB"/>
+                      </a:solidFill>
+                      <a:prstDash val="solid"/>
+                      <a:round/>
+                      <a:headEnd type="none" w="med" len="med"/>
+                      <a:tailEnd type="none" w="med" len="med"/>
+                    </a:lnT>
+                    <a:lnB w="12700" cap="flat" cmpd="sng" algn="ctr">
+                      <a:solidFill>
+                        <a:srgbClr val="C4C5C6"/>
+                      </a:solidFill>
+                      <a:prstDash val="solid"/>
+                      <a:round/>
+                      <a:headEnd type="none" w="med" len="med"/>
+                      <a:tailEnd type="none" w="med" len="med"/>
+                    </a:lnB>
+                    <a:solidFill>
+                      <a:srgbClr val="F5F7F9"/>
+                    </a:solidFill>
+                  </a:tcPr>
+                </a:tc>
+                <a:tc>
+                  <a:txBody>
+                    <a:bodyPr/>
+                    <a:lstStyle/>
+                    <a:p>
+                      <a:pPr indent="0" marL="0">
+                        <a:lnSpc>
+                          <a:spcPts val="1820"/>
+                        </a:lnSpc>
+                        <a:buNone/>
+                      </a:pPr>
+                      <a:r>
+                        <a:rPr lang="en-US" sz="1300" dirty="0">
+                          <a:solidFill>
+                            <a:srgbClr val="293036"/>
+                          </a:solidFill>
+                          <a:latin typeface="Roboto Flex" pitchFamily="34" charset="0"/>
+                          <a:ea typeface="Roboto Flex" pitchFamily="34" charset="-122"/>
+                          <a:cs typeface="Roboto Flex" pitchFamily="34" charset="-120"/>
+                        </a:rPr>
+                        <a:t>20%</a:t>
+                      </a:r>
+                      <a:endParaRPr lang="en-US" sz="1300" dirty="0">
+                        <a:latin typeface="Roboto Flex" charset="0"/>
+                        <a:ea typeface="Roboto Flex" charset="0"/>
+                        <a:cs typeface="Roboto Flex" charset="0"/>
+                      </a:endParaRPr>
+                    </a:p>
+                  </a:txBody>
+                  <a:tcPr marL="127000" marR="127000" marT="76200" marB="76200" anchor="t">
+                    <a:lnL w="12700" cap="flat" cmpd="sng" algn="ctr">
+                      <a:solidFill>
+                        <a:srgbClr val="C4C5C6"/>
+                      </a:solidFill>
+                      <a:prstDash val="solid"/>
+                      <a:round/>
+                      <a:headEnd type="none" w="med" len="med"/>
+                      <a:tailEnd type="none" w="med" len="med"/>
+                    </a:lnL>
+                    <a:lnR w="12700" cap="flat" cmpd="sng" algn="ctr">
+                      <a:solidFill>
+                        <a:srgbClr val="C4C5C6"/>
+                      </a:solidFill>
+                      <a:prstDash val="solid"/>
+                      <a:round/>
+                      <a:headEnd type="none" w="med" len="med"/>
+                      <a:tailEnd type="none" w="med" len="med"/>
+                    </a:lnR>
+                    <a:lnT w="12700" cap="flat" cmpd="sng" algn="ctr">
+                      <a:solidFill>
+                        <a:srgbClr val="CBCBCB"/>
+                      </a:solidFill>
+                      <a:prstDash val="solid"/>
+                      <a:round/>
+                      <a:headEnd type="none" w="med" len="med"/>
+                      <a:tailEnd type="none" w="med" len="med"/>
+                    </a:lnT>
+                    <a:lnB w="12700" cap="flat" cmpd="sng" algn="ctr">
+                      <a:solidFill>
+                        <a:srgbClr val="C4C5C6"/>
+                      </a:solidFill>
+                      <a:prstDash val="solid"/>
+                      <a:round/>
+                      <a:headEnd type="none" w="med" len="med"/>
+                      <a:tailEnd type="none" w="med" len="med"/>
+                    </a:lnB>
+                    <a:solidFill>
+                      <a:srgbClr val="F5F7F9"/>
+                    </a:solidFill>
+                  </a:tcPr>
+                </a:tc>
+              </a:tr>
+              <a:tr h="396230">
+                <a:tc>
+                  <a:txBody>
+                    <a:bodyPr/>
+                    <a:lstStyle/>
+                    <a:p>
+                      <a:pPr indent="0" marL="0">
+                        <a:lnSpc>
+                          <a:spcPts val="1820"/>
+                        </a:lnSpc>
+                        <a:buNone/>
+                      </a:pPr>
+                      <a:r>
+                        <a:rPr lang="en-US" sz="1300" dirty="0">
+                          <a:solidFill>
+                            <a:srgbClr val="293036"/>
+                          </a:solidFill>
+                          <a:latin typeface="Roboto Flex" pitchFamily="34" charset="0"/>
+                          <a:ea typeface="Roboto Flex" pitchFamily="34" charset="-122"/>
+                          <a:cs typeface="Roboto Flex" pitchFamily="34" charset="-120"/>
+                        </a:rPr>
+                        <a:t>Registreerunutest vahetab</a:t>
+                      </a:r>
+                      <a:endParaRPr lang="en-US" sz="1300" dirty="0">
+                        <a:latin typeface="Roboto Flex" charset="0"/>
+                        <a:ea typeface="Roboto Flex" charset="0"/>
+                        <a:cs typeface="Roboto Flex" charset="0"/>
+                      </a:endParaRPr>
+                    </a:p>
+                  </a:txBody>
+                  <a:tcPr marL="127000" marR="127000" marT="76200" marB="76200" anchor="t">
+                    <a:lnL w="12700" cap="flat" cmpd="sng" algn="ctr">
+                      <a:solidFill>
+                        <a:srgbClr val="CBCBCB"/>
+                      </a:solidFill>
+                      <a:prstDash val="solid"/>
+                      <a:round/>
+                      <a:headEnd type="none" w="med" len="med"/>
+                      <a:tailEnd type="none" w="med" len="med"/>
+                    </a:lnL>
+                    <a:lnR w="12700" cap="flat" cmpd="sng" algn="ctr">
+                      <a:solidFill>
+                        <a:srgbClr val="CBCBCB"/>
+                      </a:solidFill>
+                      <a:prstDash val="solid"/>
+                      <a:round/>
+                      <a:headEnd type="none" w="med" len="med"/>
+                      <a:tailEnd type="none" w="med" len="med"/>
+                    </a:lnR>
+                    <a:lnT w="12700" cap="flat" cmpd="sng" algn="ctr">
+                      <a:solidFill>
+                        <a:srgbClr val="C4C5C6"/>
+                      </a:solidFill>
+                      <a:prstDash val="solid"/>
+                      <a:round/>
+                      <a:headEnd type="none" w="med" len="med"/>
+                      <a:tailEnd type="none" w="med" len="med"/>
+                    </a:lnT>
+                    <a:lnB w="12700" cap="flat" cmpd="sng" algn="ctr">
+                      <a:solidFill>
+                        <a:srgbClr val="CBCBCB"/>
+                      </a:solidFill>
+                      <a:prstDash val="solid"/>
+                      <a:round/>
+                      <a:headEnd type="none" w="med" len="med"/>
+                      <a:tailEnd type="none" w="med" len="med"/>
+                    </a:lnB>
+                  </a:tcPr>
+                </a:tc>
+                <a:tc>
+                  <a:txBody>
+                    <a:bodyPr/>
+                    <a:lstStyle/>
+                    <a:p>
+                      <a:pPr indent="0" marL="0">
+                        <a:lnSpc>
+                          <a:spcPts val="1820"/>
+                        </a:lnSpc>
+                        <a:buNone/>
+                      </a:pPr>
+                      <a:r>
+                        <a:rPr lang="en-US" sz="1300" dirty="0">
+                          <a:solidFill>
+                            <a:srgbClr val="293036"/>
+                          </a:solidFill>
+                          <a:latin typeface="Roboto Flex" pitchFamily="34" charset="0"/>
+                          <a:ea typeface="Roboto Flex" pitchFamily="34" charset="-122"/>
+                          <a:cs typeface="Roboto Flex" pitchFamily="34" charset="-120"/>
+                        </a:rPr>
+                        <a:t>45%</a:t>
+                      </a:r>
+                      <a:endParaRPr lang="en-US" sz="1300" dirty="0">
+                        <a:latin typeface="Roboto Flex" charset="0"/>
+                        <a:ea typeface="Roboto Flex" charset="0"/>
+                        <a:cs typeface="Roboto Flex" charset="0"/>
+                      </a:endParaRPr>
+                    </a:p>
+                  </a:txBody>
+                  <a:tcPr marL="127000" marR="127000" marT="76200" marB="76200" anchor="t">
+                    <a:lnL w="12700" cap="flat" cmpd="sng" algn="ctr">
+                      <a:solidFill>
+                        <a:srgbClr val="CBCBCB"/>
+                      </a:solidFill>
+                      <a:prstDash val="solid"/>
+                      <a:round/>
+                      <a:headEnd type="none" w="med" len="med"/>
+                      <a:tailEnd type="none" w="med" len="med"/>
+                    </a:lnL>
+                    <a:lnR w="12700" cap="flat" cmpd="sng" algn="ctr">
+                      <a:solidFill>
+                        <a:srgbClr val="CBCBCB"/>
+                      </a:solidFill>
+                      <a:prstDash val="solid"/>
+                      <a:round/>
+                      <a:headEnd type="none" w="med" len="med"/>
+                      <a:tailEnd type="none" w="med" len="med"/>
+                    </a:lnR>
+                    <a:lnT w="12700" cap="flat" cmpd="sng" algn="ctr">
+                      <a:solidFill>
+                        <a:srgbClr val="C4C5C6"/>
+                      </a:solidFill>
+                      <a:prstDash val="solid"/>
+                      <a:round/>
+                      <a:headEnd type="none" w="med" len="med"/>
+                      <a:tailEnd type="none" w="med" len="med"/>
+                    </a:lnT>
+                    <a:lnB w="12700" cap="flat" cmpd="sng" algn="ctr">
+                      <a:solidFill>
+                        <a:srgbClr val="CBCBCB"/>
+                      </a:solidFill>
+                      <a:prstDash val="solid"/>
+                      <a:round/>
+                      <a:headEnd type="none" w="med" len="med"/>
+                      <a:tailEnd type="none" w="med" len="med"/>
+                    </a:lnB>
+                  </a:tcPr>
+                </a:tc>
+              </a:tr>
+              <a:tr h="396230">
+                <a:tc>
+                  <a:txBody>
+                    <a:bodyPr/>
+                    <a:lstStyle/>
+                    <a:p>
+                      <a:pPr indent="0" marL="0">
+                        <a:lnSpc>
+                          <a:spcPts val="1820"/>
+                        </a:lnSpc>
+                        <a:buNone/>
+                      </a:pPr>
+                      <a:r>
+                        <a:rPr lang="en-US" sz="1300" dirty="0">
+                          <a:solidFill>
+                            <a:srgbClr val="293036"/>
+                          </a:solidFill>
+                          <a:latin typeface="Roboto Flex" pitchFamily="34" charset="0"/>
+                          <a:ea typeface="Roboto Flex" pitchFamily="34" charset="-122"/>
+                          <a:cs typeface="Roboto Flex" pitchFamily="34" charset="-120"/>
+                        </a:rPr>
+                        <a:t>Numbreid liikme kohta</a:t>
+                      </a:r>
+                      <a:endParaRPr lang="en-US" sz="1300" dirty="0">
+                        <a:latin typeface="Roboto Flex" charset="0"/>
+                        <a:ea typeface="Roboto Flex" charset="0"/>
+                        <a:cs typeface="Roboto Flex" charset="0"/>
+                      </a:endParaRPr>
+                    </a:p>
+                  </a:txBody>
+                  <a:tcPr marL="127000" marR="127000" marT="76200" marB="76200" anchor="t">
+                    <a:lnL w="12700" cap="flat" cmpd="sng" algn="ctr">
+                      <a:solidFill>
+                        <a:srgbClr val="CBCBCB"/>
+                      </a:solidFill>
+                      <a:prstDash val="solid"/>
+                      <a:round/>
+                      <a:headEnd type="none" w="med" len="med"/>
+                      <a:tailEnd type="none" w="med" len="med"/>
+                    </a:lnL>
+                    <a:lnR w="12700" cap="flat" cmpd="sng" algn="ctr">
+                      <a:solidFill>
+                        <a:srgbClr val="C4C5C6"/>
+                      </a:solidFill>
+                      <a:prstDash val="solid"/>
+                      <a:round/>
+                      <a:headEnd type="none" w="med" len="med"/>
+                      <a:tailEnd type="none" w="med" len="med"/>
+                    </a:lnR>
+                    <a:lnT w="12700" cap="flat" cmpd="sng" algn="ctr">
+                      <a:solidFill>
+                        <a:srgbClr val="CBCBCB"/>
+                      </a:solidFill>
+                      <a:prstDash val="solid"/>
+                      <a:round/>
+                      <a:headEnd type="none" w="med" len="med"/>
+                      <a:tailEnd type="none" w="med" len="med"/>
+                    </a:lnT>
+                    <a:lnB w="12700" cap="flat" cmpd="sng" algn="ctr">
+                      <a:solidFill>
+                        <a:srgbClr val="C4C5C6"/>
+                      </a:solidFill>
+                      <a:prstDash val="solid"/>
+                      <a:round/>
+                      <a:headEnd type="none" w="med" len="med"/>
+                      <a:tailEnd type="none" w="med" len="med"/>
+                    </a:lnB>
+                    <a:solidFill>
+                      <a:srgbClr val="F5F7F9"/>
+                    </a:solidFill>
+                  </a:tcPr>
+                </a:tc>
+                <a:tc>
+                  <a:txBody>
+                    <a:bodyPr/>
+                    <a:lstStyle/>
+                    <a:p>
+                      <a:pPr indent="0" marL="0">
+                        <a:lnSpc>
+                          <a:spcPts val="1820"/>
+                        </a:lnSpc>
+                        <a:buNone/>
+                      </a:pPr>
+                      <a:r>
+                        <a:rPr lang="en-US" sz="1300" dirty="0">
+                          <a:solidFill>
+                            <a:srgbClr val="293036"/>
+                          </a:solidFill>
+                          <a:latin typeface="Roboto Flex" pitchFamily="34" charset="0"/>
+                          <a:ea typeface="Roboto Flex" pitchFamily="34" charset="-122"/>
+                          <a:cs typeface="Roboto Flex" pitchFamily="34" charset="-120"/>
+                        </a:rPr>
+                        <a:t>1,8</a:t>
+                      </a:r>
+                      <a:endParaRPr lang="en-US" sz="1300" dirty="0">
+                        <a:latin typeface="Roboto Flex" charset="0"/>
+                        <a:ea typeface="Roboto Flex" charset="0"/>
+                        <a:cs typeface="Roboto Flex" charset="0"/>
+                      </a:endParaRPr>
+                    </a:p>
+                  </a:txBody>
+                  <a:tcPr marL="127000" marR="127000" marT="76200" marB="76200" anchor="t">
+                    <a:lnL w="12700" cap="flat" cmpd="sng" algn="ctr">
+                      <a:solidFill>
+                        <a:srgbClr val="C4C5C6"/>
+                      </a:solidFill>
+                      <a:prstDash val="solid"/>
+                      <a:round/>
+                      <a:headEnd type="none" w="med" len="med"/>
+                      <a:tailEnd type="none" w="med" len="med"/>
+                    </a:lnL>
+                    <a:lnR w="12700" cap="flat" cmpd="sng" algn="ctr">
+                      <a:solidFill>
+                        <a:srgbClr val="C4C5C6"/>
+                      </a:solidFill>
+                      <a:prstDash val="solid"/>
+                      <a:round/>
+                      <a:headEnd type="none" w="med" len="med"/>
+                      <a:tailEnd type="none" w="med" len="med"/>
+                    </a:lnR>
+                    <a:lnT w="12700" cap="flat" cmpd="sng" algn="ctr">
+                      <a:solidFill>
+                        <a:srgbClr val="CBCBCB"/>
+                      </a:solidFill>
+                      <a:prstDash val="solid"/>
+                      <a:round/>
+                      <a:headEnd type="none" w="med" len="med"/>
+                      <a:tailEnd type="none" w="med" len="med"/>
+                    </a:lnT>
+                    <a:lnB w="12700" cap="flat" cmpd="sng" algn="ctr">
+                      <a:solidFill>
+                        <a:srgbClr val="C4C5C6"/>
+                      </a:solidFill>
+                      <a:prstDash val="solid"/>
+                      <a:round/>
+                      <a:headEnd type="none" w="med" len="med"/>
+                      <a:tailEnd type="none" w="med" len="med"/>
+                    </a:lnB>
+                    <a:solidFill>
+                      <a:srgbClr val="F5F7F9"/>
+                    </a:solidFill>
+                  </a:tcPr>
+                </a:tc>
+              </a:tr>
+              <a:tr h="396230">
+                <a:tc>
+                  <a:txBody>
+                    <a:bodyPr/>
+                    <a:lstStyle/>
+                    <a:p>
+                      <a:pPr indent="0" marL="0">
+                        <a:lnSpc>
+                          <a:spcPts val="1820"/>
+                        </a:lnSpc>
+                        <a:buNone/>
+                      </a:pPr>
+                      <a:r>
+                        <a:rPr lang="en-US" sz="1300" dirty="0">
+                          <a:solidFill>
+                            <a:srgbClr val="293036"/>
+                          </a:solidFill>
+                          <a:latin typeface="Roboto Flex" pitchFamily="34" charset="0"/>
+                          <a:ea typeface="Roboto Flex" pitchFamily="34" charset="-122"/>
+                          <a:cs typeface="Roboto Flex" pitchFamily="34" charset="-120"/>
+                        </a:rPr>
+                        <a:t>Internet või TV juurde</a:t>
+                      </a:r>
+                      <a:endParaRPr lang="en-US" sz="1300" dirty="0">
+                        <a:latin typeface="Roboto Flex" charset="0"/>
+                        <a:ea typeface="Roboto Flex" charset="0"/>
+                        <a:cs typeface="Roboto Flex" charset="0"/>
+                      </a:endParaRPr>
+                    </a:p>
+                  </a:txBody>
+                  <a:tcPr marL="127000" marR="127000" marT="76200" marB="76200" anchor="t">
+                    <a:lnL w="12700" cap="flat" cmpd="sng" algn="ctr">
+                      <a:solidFill>
+                        <a:srgbClr val="CBCBCB"/>
+                      </a:solidFill>
+                      <a:prstDash val="solid"/>
+                      <a:round/>
+                      <a:headEnd type="none" w="med" len="med"/>
+                      <a:tailEnd type="none" w="med" len="med"/>
+                    </a:lnL>
+                    <a:lnR w="12700" cap="flat" cmpd="sng" algn="ctr">
+                      <a:solidFill>
+                        <a:srgbClr val="CBCBCB"/>
+                      </a:solidFill>
+                      <a:prstDash val="solid"/>
+                      <a:round/>
+                      <a:headEnd type="none" w="med" len="med"/>
+                      <a:tailEnd type="none" w="med" len="med"/>
+                    </a:lnR>
+                    <a:lnT w="12700" cap="flat" cmpd="sng" algn="ctr">
+                      <a:solidFill>
+                        <a:srgbClr val="C4C5C6"/>
+                      </a:solidFill>
+                      <a:prstDash val="solid"/>
+                      <a:round/>
+                      <a:headEnd type="none" w="med" len="med"/>
+                      <a:tailEnd type="none" w="med" len="med"/>
+                    </a:lnT>
+                    <a:lnB w="12700" cap="flat" cmpd="sng" algn="ctr">
+                      <a:solidFill>
+                        <a:srgbClr val="CBCBCB"/>
+                      </a:solidFill>
+                      <a:prstDash val="solid"/>
+                      <a:round/>
+                      <a:headEnd type="none" w="med" len="med"/>
+                      <a:tailEnd type="none" w="med" len="med"/>
+                    </a:lnB>
+                  </a:tcPr>
+                </a:tc>
+                <a:tc>
+                  <a:txBody>
+                    <a:bodyPr/>
+                    <a:lstStyle/>
+                    <a:p>
+                      <a:pPr indent="0" marL="0">
+                        <a:lnSpc>
+                          <a:spcPts val="1820"/>
+                        </a:lnSpc>
+                        <a:buNone/>
+                      </a:pPr>
+                      <a:r>
+                        <a:rPr lang="en-US" sz="1300" dirty="0">
+                          <a:solidFill>
+                            <a:srgbClr val="293036"/>
+                          </a:solidFill>
+                          <a:latin typeface="Roboto Flex" pitchFamily="34" charset="0"/>
+                          <a:ea typeface="Roboto Flex" pitchFamily="34" charset="-122"/>
+                          <a:cs typeface="Roboto Flex" pitchFamily="34" charset="-120"/>
+                        </a:rPr>
+                        <a:t>40% × 1,6 teenust</a:t>
+                      </a:r>
+                      <a:endParaRPr lang="en-US" sz="1300" dirty="0">
+                        <a:latin typeface="Roboto Flex" charset="0"/>
+                        <a:ea typeface="Roboto Flex" charset="0"/>
+                        <a:cs typeface="Roboto Flex" charset="0"/>
+                      </a:endParaRPr>
+                    </a:p>
+                  </a:txBody>
+                  <a:tcPr marL="127000" marR="127000" marT="76200" marB="76200" anchor="t">
+                    <a:lnL w="12700" cap="flat" cmpd="sng" algn="ctr">
+                      <a:solidFill>
+                        <a:srgbClr val="CBCBCB"/>
+                      </a:solidFill>
+                      <a:prstDash val="solid"/>
+                      <a:round/>
+                      <a:headEnd type="none" w="med" len="med"/>
+                      <a:tailEnd type="none" w="med" len="med"/>
+                    </a:lnL>
+                    <a:lnR w="12700" cap="flat" cmpd="sng" algn="ctr">
+                      <a:solidFill>
+                        <a:srgbClr val="CBCBCB"/>
+                      </a:solidFill>
+                      <a:prstDash val="solid"/>
+                      <a:round/>
+                      <a:headEnd type="none" w="med" len="med"/>
+                      <a:tailEnd type="none" w="med" len="med"/>
+                    </a:lnR>
+                    <a:lnT w="12700" cap="flat" cmpd="sng" algn="ctr">
+                      <a:solidFill>
+                        <a:srgbClr val="C4C5C6"/>
+                      </a:solidFill>
+                      <a:prstDash val="solid"/>
+                      <a:round/>
+                      <a:headEnd type="none" w="med" len="med"/>
+                      <a:tailEnd type="none" w="med" len="med"/>
+                    </a:lnT>
+                    <a:lnB w="12700" cap="flat" cmpd="sng" algn="ctr">
+                      <a:solidFill>
+                        <a:srgbClr val="CBCBCB"/>
+                      </a:solidFill>
+                      <a:prstDash val="solid"/>
+                      <a:round/>
+                      <a:headEnd type="none" w="med" len="med"/>
+                      <a:tailEnd type="none" w="med" len="med"/>
+                    </a:lnB>
+                  </a:tcPr>
+                </a:tc>
+              </a:tr>
+              <a:tr h="396230">
+                <a:tc>
+                  <a:txBody>
+                    <a:bodyPr/>
+                    <a:lstStyle/>
+                    <a:p>
+                      <a:pPr indent="0" marL="0">
+                        <a:lnSpc>
+                          <a:spcPts val="1820"/>
+                        </a:lnSpc>
+                        <a:buNone/>
+                      </a:pPr>
+                      <a:r>
+                        <a:rPr lang="en-US" sz="1300" dirty="0">
+                          <a:solidFill>
+                            <a:srgbClr val="293036"/>
+                          </a:solidFill>
+                          <a:latin typeface="Roboto Flex" pitchFamily="34" charset="0"/>
+                          <a:ea typeface="Roboto Flex" pitchFamily="34" charset="-122"/>
+                          <a:cs typeface="Roboto Flex" pitchFamily="34" charset="-120"/>
+                        </a:rPr>
+                        <a:t>Ettevõtteid</a:t>
+                      </a:r>
+                      <a:endParaRPr lang="en-US" sz="1300" dirty="0">
+                        <a:latin typeface="Roboto Flex" charset="0"/>
+                        <a:ea typeface="Roboto Flex" charset="0"/>
+                        <a:cs typeface="Roboto Flex" charset="0"/>
+                      </a:endParaRPr>
+                    </a:p>
+                  </a:txBody>
+                  <a:tcPr marL="127000" marR="127000" marT="76200" marB="76200" anchor="t">
+                    <a:lnL w="12700" cap="flat" cmpd="sng" algn="ctr">
+                      <a:solidFill>
+                        <a:srgbClr val="CBCBCB"/>
+                      </a:solidFill>
+                      <a:prstDash val="solid"/>
+                      <a:round/>
+                      <a:headEnd type="none" w="med" len="med"/>
+                      <a:tailEnd type="none" w="med" len="med"/>
+                    </a:lnL>
+                    <a:lnR w="12700" cap="flat" cmpd="sng" algn="ctr">
+                      <a:solidFill>
+                        <a:srgbClr val="C4C5C6"/>
+                      </a:solidFill>
+                      <a:prstDash val="solid"/>
+                      <a:round/>
+                      <a:headEnd type="none" w="med" len="med"/>
+                      <a:tailEnd type="none" w="med" len="med"/>
+                    </a:lnR>
+                    <a:lnT w="12700" cap="flat" cmpd="sng" algn="ctr">
+                      <a:solidFill>
+                        <a:srgbClr val="CBCBCB"/>
+                      </a:solidFill>
+                      <a:prstDash val="solid"/>
+                      <a:round/>
+                      <a:headEnd type="none" w="med" len="med"/>
+                      <a:tailEnd type="none" w="med" len="med"/>
+                    </a:lnT>
+                    <a:lnB w="12700" cap="flat" cmpd="sng" algn="ctr">
+                      <a:solidFill>
+                        <a:srgbClr val="C4C5C6"/>
+                      </a:solidFill>
+                      <a:prstDash val="solid"/>
+                      <a:round/>
+                      <a:headEnd type="none" w="med" len="med"/>
+                      <a:tailEnd type="none" w="med" len="med"/>
+                    </a:lnB>
+                    <a:solidFill>
+                      <a:srgbClr val="F5F7F9"/>
+                    </a:solidFill>
+                  </a:tcPr>
+                </a:tc>
+                <a:tc>
+                  <a:txBody>
+                    <a:bodyPr/>
+                    <a:lstStyle/>
+                    <a:p>
+                      <a:pPr indent="0" marL="0">
+                        <a:lnSpc>
+                          <a:spcPts val="1820"/>
+                        </a:lnSpc>
+                        <a:buNone/>
+                      </a:pPr>
+                      <a:r>
+                        <a:rPr lang="en-US" sz="1300" dirty="0">
+                          <a:solidFill>
+                            <a:srgbClr val="293036"/>
+                          </a:solidFill>
+                          <a:latin typeface="Roboto Flex" pitchFamily="34" charset="0"/>
+                          <a:ea typeface="Roboto Flex" pitchFamily="34" charset="-122"/>
+                          <a:cs typeface="Roboto Flex" pitchFamily="34" charset="-120"/>
+                        </a:rPr>
+                        <a:t>143 × 4 numbrit</a:t>
+                      </a:r>
+                      <a:endParaRPr lang="en-US" sz="1300" dirty="0">
+                        <a:latin typeface="Roboto Flex" charset="0"/>
+                        <a:ea typeface="Roboto Flex" charset="0"/>
+                        <a:cs typeface="Roboto Flex" charset="0"/>
+                      </a:endParaRPr>
+                    </a:p>
+                  </a:txBody>
+                  <a:tcPr marL="127000" marR="127000" marT="76200" marB="76200" anchor="t">
+                    <a:lnL w="12700" cap="flat" cmpd="sng" algn="ctr">
+                      <a:solidFill>
+                        <a:srgbClr val="C4C5C6"/>
+                      </a:solidFill>
+                      <a:prstDash val="solid"/>
+                      <a:round/>
+                      <a:headEnd type="none" w="med" len="med"/>
+                      <a:tailEnd type="none" w="med" len="med"/>
+                    </a:lnL>
+                    <a:lnR w="12700" cap="flat" cmpd="sng" algn="ctr">
+                      <a:solidFill>
+                        <a:srgbClr val="C4C5C6"/>
+                      </a:solidFill>
+                      <a:prstDash val="solid"/>
+                      <a:round/>
+                      <a:headEnd type="none" w="med" len="med"/>
+                      <a:tailEnd type="none" w="med" len="med"/>
+                    </a:lnR>
+                    <a:lnT w="12700" cap="flat" cmpd="sng" algn="ctr">
+                      <a:solidFill>
+                        <a:srgbClr val="CBCBCB"/>
+                      </a:solidFill>
+                      <a:prstDash val="solid"/>
+                      <a:round/>
+                      <a:headEnd type="none" w="med" len="med"/>
+                      <a:tailEnd type="none" w="med" len="med"/>
+                    </a:lnT>
+                    <a:lnB w="12700" cap="flat" cmpd="sng" algn="ctr">
+                      <a:solidFill>
+                        <a:srgbClr val="C4C5C6"/>
+                      </a:solidFill>
+                      <a:prstDash val="solid"/>
+                      <a:round/>
+                      <a:headEnd type="none" w="med" len="med"/>
+                      <a:tailEnd type="none" w="med" len="med"/>
+                    </a:lnB>
+                    <a:solidFill>
+                      <a:srgbClr val="F5F7F9"/>
+                    </a:solidFill>
+                  </a:tcPr>
+                </a:tc>
+              </a:tr>
+              <a:tr h="396230">
+                <a:tc>
+                  <a:txBody>
+                    <a:bodyPr/>
+                    <a:lstStyle/>
+                    <a:p>
+                      <a:pPr indent="0" marL="0">
+                        <a:lnSpc>
+                          <a:spcPts val="1820"/>
+                        </a:lnSpc>
+                        <a:buNone/>
+                      </a:pPr>
+                      <a:r>
+                        <a:rPr lang="en-US" sz="1300" dirty="0">
+                          <a:solidFill>
+                            <a:srgbClr val="293036"/>
+                          </a:solidFill>
+                          <a:latin typeface="Roboto Flex" pitchFamily="34" charset="0"/>
+                          <a:ea typeface="Roboto Flex" pitchFamily="34" charset="-122"/>
+                          <a:cs typeface="Roboto Flex" pitchFamily="34" charset="-120"/>
+                        </a:rPr>
+                        <a:t>Lepingutest säilib aastas</a:t>
+                      </a:r>
+                      <a:endParaRPr lang="en-US" sz="1300" dirty="0">
+                        <a:latin typeface="Roboto Flex" charset="0"/>
+                        <a:ea typeface="Roboto Flex" charset="0"/>
+                        <a:cs typeface="Roboto Flex" charset="0"/>
+                      </a:endParaRPr>
+                    </a:p>
+                  </a:txBody>
+                  <a:tcPr marL="127000" marR="127000" marT="76200" marB="76200" anchor="t">
+                    <a:lnL w="12700" cap="flat" cmpd="sng" algn="ctr">
+                      <a:solidFill>
+                        <a:srgbClr val="CBCBCB"/>
+                      </a:solidFill>
+                      <a:prstDash val="solid"/>
+                      <a:round/>
+                      <a:headEnd type="none" w="med" len="med"/>
+                      <a:tailEnd type="none" w="med" len="med"/>
+                    </a:lnL>
+                    <a:lnR w="12700" cap="flat" cmpd="sng" algn="ctr">
+                      <a:solidFill>
+                        <a:srgbClr val="CBCBCB"/>
+                      </a:solidFill>
+                      <a:prstDash val="solid"/>
+                      <a:round/>
+                      <a:headEnd type="none" w="med" len="med"/>
+                      <a:tailEnd type="none" w="med" len="med"/>
+                    </a:lnR>
+                    <a:lnT w="12700" cap="flat" cmpd="sng" algn="ctr">
+                      <a:solidFill>
+                        <a:srgbClr val="C4C5C6"/>
+                      </a:solidFill>
+                      <a:prstDash val="solid"/>
+                      <a:round/>
+                      <a:headEnd type="none" w="med" len="med"/>
+                      <a:tailEnd type="none" w="med" len="med"/>
+                    </a:lnT>
+                    <a:lnB w="12700" cap="flat" cmpd="sng" algn="ctr">
+                      <a:solidFill>
+                        <a:srgbClr val="CBCBCB"/>
+                      </a:solidFill>
+                      <a:prstDash val="solid"/>
+                      <a:round/>
+                      <a:headEnd type="none" w="med" len="med"/>
+                      <a:tailEnd type="none" w="med" len="med"/>
+                    </a:lnB>
+                  </a:tcPr>
+                </a:tc>
+                <a:tc>
+                  <a:txBody>
+                    <a:bodyPr/>
+                    <a:lstStyle/>
+                    <a:p>
+                      <a:pPr indent="0" marL="0">
+                        <a:lnSpc>
+                          <a:spcPts val="1820"/>
+                        </a:lnSpc>
+                        <a:buNone/>
+                      </a:pPr>
+                      <a:r>
+                        <a:rPr lang="en-US" sz="1300" dirty="0">
+                          <a:solidFill>
+                            <a:srgbClr val="293036"/>
+                          </a:solidFill>
+                          <a:latin typeface="Roboto Flex" pitchFamily="34" charset="0"/>
+                          <a:ea typeface="Roboto Flex" pitchFamily="34" charset="-122"/>
+                          <a:cs typeface="Roboto Flex" pitchFamily="34" charset="-120"/>
+                        </a:rPr>
+                        <a:t>85%</a:t>
+                      </a:r>
+                      <a:endParaRPr lang="en-US" sz="1300" dirty="0">
+                        <a:latin typeface="Roboto Flex" charset="0"/>
+                        <a:ea typeface="Roboto Flex" charset="0"/>
+                        <a:cs typeface="Roboto Flex" charset="0"/>
+                      </a:endParaRPr>
+                    </a:p>
+                  </a:txBody>
+                  <a:tcPr marL="127000" marR="127000" marT="76200" marB="76200" anchor="t">
+                    <a:lnL w="12700" cap="flat" cmpd="sng" algn="ctr">
+                      <a:solidFill>
+                        <a:srgbClr val="CBCBCB"/>
+                      </a:solidFill>
+                      <a:prstDash val="solid"/>
+                      <a:round/>
+                      <a:headEnd type="none" w="med" len="med"/>
+                      <a:tailEnd type="none" w="med" len="med"/>
+                    </a:lnL>
+                    <a:lnR w="12700" cap="flat" cmpd="sng" algn="ctr">
+                      <a:solidFill>
+                        <a:srgbClr val="CBCBCB"/>
+                      </a:solidFill>
+                      <a:prstDash val="solid"/>
+                      <a:round/>
+                      <a:headEnd type="none" w="med" len="med"/>
+                      <a:tailEnd type="none" w="med" len="med"/>
+                    </a:lnR>
+                    <a:lnT w="12700" cap="flat" cmpd="sng" algn="ctr">
+                      <a:solidFill>
+                        <a:srgbClr val="C4C5C6"/>
+                      </a:solidFill>
+                      <a:prstDash val="solid"/>
+                      <a:round/>
+                      <a:headEnd type="none" w="med" len="med"/>
+                      <a:tailEnd type="none" w="med" len="med"/>
+                    </a:lnT>
+                    <a:lnB w="12700" cap="flat" cmpd="sng" algn="ctr">
+                      <a:solidFill>
+                        <a:srgbClr val="CBCBCB"/>
+                      </a:solidFill>
+                      <a:prstDash val="solid"/>
+                      <a:round/>
+                      <a:headEnd type="none" w="med" len="med"/>
+                      <a:tailEnd type="none" w="med" len="med"/>
+                    </a:lnB>
+                  </a:tcPr>
+                </a:tc>
+              </a:tr>
+              <a:tr h="396230">
+                <a:tc>
+                  <a:txBody>
+                    <a:bodyPr/>
+                    <a:lstStyle/>
+                    <a:p>
+                      <a:pPr indent="0" marL="0">
+                        <a:lnSpc>
+                          <a:spcPts val="1820"/>
+                        </a:lnSpc>
+                        <a:buNone/>
+                      </a:pPr>
+                      <a:r>
+                        <a:rPr lang="en-US" sz="1300" dirty="0">
+                          <a:solidFill>
+                            <a:srgbClr val="293036"/>
+                          </a:solidFill>
+                          <a:latin typeface="Roboto Flex" pitchFamily="34" charset="0"/>
+                          <a:ea typeface="Roboto Flex" pitchFamily="34" charset="-122"/>
+                          <a:cs typeface="Roboto Flex" pitchFamily="34" charset="-120"/>
+                        </a:rPr>
+                        <a:t>Tuleva tasu lepingult</a:t>
+                      </a:r>
+                      <a:endParaRPr lang="en-US" sz="1300" dirty="0">
+                        <a:latin typeface="Roboto Flex" charset="0"/>
+                        <a:ea typeface="Roboto Flex" charset="0"/>
+                        <a:cs typeface="Roboto Flex" charset="0"/>
+                      </a:endParaRPr>
+                    </a:p>
+                  </a:txBody>
+                  <a:tcPr marL="127000" marR="127000" marT="76200" marB="76200" anchor="t">
+                    <a:lnL w="12700" cap="flat" cmpd="sng" algn="ctr">
+                      <a:solidFill>
+                        <a:srgbClr val="CBCBCB"/>
+                      </a:solidFill>
+                      <a:prstDash val="solid"/>
+                      <a:round/>
+                      <a:headEnd type="none" w="med" len="med"/>
+                      <a:tailEnd type="none" w="med" len="med"/>
+                    </a:lnL>
+                    <a:lnR w="12700" cap="flat" cmpd="sng" algn="ctr">
+                      <a:solidFill>
+                        <a:srgbClr val="C4C5C6"/>
+                      </a:solidFill>
+                      <a:prstDash val="solid"/>
+                      <a:round/>
+                      <a:headEnd type="none" w="med" len="med"/>
+                      <a:tailEnd type="none" w="med" len="med"/>
+                    </a:lnR>
+                    <a:lnT w="12700" cap="flat" cmpd="sng" algn="ctr">
+                      <a:solidFill>
+                        <a:srgbClr val="CBCBCB"/>
+                      </a:solidFill>
+                      <a:prstDash val="solid"/>
+                      <a:round/>
+                      <a:headEnd type="none" w="med" len="med"/>
+                      <a:tailEnd type="none" w="med" len="med"/>
+                    </a:lnT>
+                    <a:lnB w="12700" cap="flat" cmpd="sng" algn="ctr">
+                      <a:solidFill>
+                        <a:srgbClr val="C4C5C6"/>
+                      </a:solidFill>
+                      <a:prstDash val="solid"/>
+                      <a:round/>
+                      <a:headEnd type="none" w="med" len="med"/>
+                      <a:tailEnd type="none" w="med" len="med"/>
+                    </a:lnB>
+                    <a:solidFill>
+                      <a:srgbClr val="F5F7F9"/>
+                    </a:solidFill>
+                  </a:tcPr>
+                </a:tc>
+                <a:tc>
+                  <a:txBody>
+                    <a:bodyPr/>
+                    <a:lstStyle/>
+                    <a:p>
+                      <a:pPr indent="0" marL="0">
+                        <a:lnSpc>
+                          <a:spcPts val="1820"/>
+                        </a:lnSpc>
+                        <a:buNone/>
+                      </a:pPr>
+                      <a:r>
+                        <a:rPr lang="en-US" sz="1300" dirty="0">
+                          <a:solidFill>
+                            <a:srgbClr val="293036"/>
+                          </a:solidFill>
+                          <a:latin typeface="Roboto Flex" pitchFamily="34" charset="0"/>
+                          <a:ea typeface="Roboto Flex" pitchFamily="34" charset="-122"/>
+                          <a:cs typeface="Roboto Flex" pitchFamily="34" charset="-120"/>
+                        </a:rPr>
+                        <a:t>1 € kuus</a:t>
+                      </a:r>
+                      <a:endParaRPr lang="en-US" sz="1300" dirty="0">
+                        <a:latin typeface="Roboto Flex" charset="0"/>
+                        <a:ea typeface="Roboto Flex" charset="0"/>
+                        <a:cs typeface="Roboto Flex" charset="0"/>
+                      </a:endParaRPr>
+                    </a:p>
+                  </a:txBody>
+                  <a:tcPr marL="127000" marR="127000" marT="76200" marB="76200" anchor="t">
+                    <a:lnL w="12700" cap="flat" cmpd="sng" algn="ctr">
+                      <a:solidFill>
+                        <a:srgbClr val="C4C5C6"/>
+                      </a:solidFill>
+                      <a:prstDash val="solid"/>
+                      <a:round/>
+                      <a:headEnd type="none" w="med" len="med"/>
+                      <a:tailEnd type="none" w="med" len="med"/>
+                    </a:lnL>
+                    <a:lnR w="12700" cap="flat" cmpd="sng" algn="ctr">
+                      <a:solidFill>
+                        <a:srgbClr val="C4C5C6"/>
+                      </a:solidFill>
+                      <a:prstDash val="solid"/>
+                      <a:round/>
+                      <a:headEnd type="none" w="med" len="med"/>
+                      <a:tailEnd type="none" w="med" len="med"/>
+                    </a:lnR>
+                    <a:lnT w="12700" cap="flat" cmpd="sng" algn="ctr">
+                      <a:solidFill>
+                        <a:srgbClr val="CBCBCB"/>
+                      </a:solidFill>
+                      <a:prstDash val="solid"/>
+                      <a:round/>
+                      <a:headEnd type="none" w="med" len="med"/>
+                      <a:tailEnd type="none" w="med" len="med"/>
+                    </a:lnT>
+                    <a:lnB w="12700" cap="flat" cmpd="sng" algn="ctr">
+                      <a:solidFill>
+                        <a:srgbClr val="C4C5C6"/>
+                      </a:solidFill>
+                      <a:prstDash val="solid"/>
+                      <a:round/>
+                      <a:headEnd type="none" w="med" len="med"/>
+                      <a:tailEnd type="none" w="med" len="med"/>
+                    </a:lnB>
+                    <a:solidFill>
+                      <a:srgbClr val="F5F7F9"/>
+                    </a:solidFill>
+                  </a:tcPr>
+                </a:tc>
+              </a:tr>
+              <a:tr h="396230">
+                <a:tc>
+                  <a:txBody>
+                    <a:bodyPr/>
+                    <a:lstStyle/>
+                    <a:p>
+                      <a:pPr indent="0" marL="0">
+                        <a:lnSpc>
+                          <a:spcPts val="1820"/>
+                        </a:lnSpc>
+                        <a:buNone/>
+                      </a:pPr>
+                      <a:r>
+                        <a:rPr lang="en-US" sz="1300" dirty="0">
+                          <a:solidFill>
+                            <a:srgbClr val="293036"/>
+                          </a:solidFill>
+                          <a:latin typeface="Roboto Flex" pitchFamily="34" charset="0"/>
+                          <a:ea typeface="Roboto Flex" pitchFamily="34" charset="-122"/>
+                          <a:cs typeface="Roboto Flex" pitchFamily="34" charset="-120"/>
+                        </a:rPr>
+                        <a:t>Kulu: 1 täiskoht</a:t>
+                      </a:r>
+                      <a:endParaRPr lang="en-US" sz="1300" dirty="0">
+                        <a:latin typeface="Roboto Flex" charset="0"/>
+                        <a:ea typeface="Roboto Flex" charset="0"/>
+                        <a:cs typeface="Roboto Flex" charset="0"/>
+                      </a:endParaRPr>
+                    </a:p>
+                  </a:txBody>
+                  <a:tcPr marL="127000" marR="127000" marT="76200" marB="76200" anchor="t">
+                    <a:lnL w="12700" cap="flat" cmpd="sng" algn="ctr">
+                      <a:solidFill>
+                        <a:srgbClr val="CBCBCB"/>
+                      </a:solidFill>
+                      <a:prstDash val="solid"/>
+                      <a:round/>
+                      <a:headEnd type="none" w="med" len="med"/>
+                      <a:tailEnd type="none" w="med" len="med"/>
+                    </a:lnL>
+                    <a:lnR w="12700" cap="flat" cmpd="sng" algn="ctr">
+                      <a:solidFill>
+                        <a:srgbClr val="CBCBCB"/>
+                      </a:solidFill>
+                      <a:prstDash val="solid"/>
+                      <a:round/>
+                      <a:headEnd type="none" w="med" len="med"/>
+                      <a:tailEnd type="none" w="med" len="med"/>
+                    </a:lnR>
+                    <a:lnT w="12700" cap="flat" cmpd="sng" algn="ctr">
+                      <a:solidFill>
+                        <a:srgbClr val="C4C5C6"/>
+                      </a:solidFill>
+                      <a:prstDash val="solid"/>
+                      <a:round/>
+                      <a:headEnd type="none" w="med" len="med"/>
+                      <a:tailEnd type="none" w="med" len="med"/>
+                    </a:lnT>
+                    <a:lnB w="12700" cap="flat" cmpd="sng" algn="ctr">
+                      <a:solidFill>
+                        <a:srgbClr val="CBCBCB"/>
+                      </a:solidFill>
+                      <a:prstDash val="solid"/>
+                      <a:round/>
+                      <a:headEnd type="none" w="med" len="med"/>
+                      <a:tailEnd type="none" w="med" len="med"/>
+                    </a:lnB>
+                  </a:tcPr>
+                </a:tc>
+                <a:tc>
+                  <a:txBody>
+                    <a:bodyPr/>
+                    <a:lstStyle/>
+                    <a:p>
+                      <a:pPr indent="0" marL="0">
+                        <a:lnSpc>
+                          <a:spcPts val="1820"/>
+                        </a:lnSpc>
+                        <a:buNone/>
+                      </a:pPr>
+                      <a:r>
+                        <a:rPr lang="en-US" sz="1300" dirty="0">
+                          <a:solidFill>
+                            <a:srgbClr val="293036"/>
+                          </a:solidFill>
+                          <a:latin typeface="Roboto Flex" pitchFamily="34" charset="0"/>
+                          <a:ea typeface="Roboto Flex" pitchFamily="34" charset="-122"/>
+                          <a:cs typeface="Roboto Flex" pitchFamily="34" charset="-120"/>
+                        </a:rPr>
+                        <a:t>69 000 € aastas</a:t>
+                      </a:r>
+                      <a:endParaRPr lang="en-US" sz="1300" dirty="0">
+                        <a:latin typeface="Roboto Flex" charset="0"/>
+                        <a:ea typeface="Roboto Flex" charset="0"/>
+                        <a:cs typeface="Roboto Flex" charset="0"/>
+                      </a:endParaRPr>
+                    </a:p>
+                  </a:txBody>
+                  <a:tcPr marL="127000" marR="127000" marT="76200" marB="76200" anchor="t">
+                    <a:lnL w="12700" cap="flat" cmpd="sng" algn="ctr">
+                      <a:solidFill>
+                        <a:srgbClr val="CBCBCB"/>
+                      </a:solidFill>
+                      <a:prstDash val="solid"/>
+                      <a:round/>
+                      <a:headEnd type="none" w="med" len="med"/>
+                      <a:tailEnd type="none" w="med" len="med"/>
+                    </a:lnL>
+                    <a:lnR w="12700" cap="flat" cmpd="sng" algn="ctr">
+                      <a:solidFill>
+                        <a:srgbClr val="CBCBCB"/>
+                      </a:solidFill>
+                      <a:prstDash val="solid"/>
+                      <a:round/>
+                      <a:headEnd type="none" w="med" len="med"/>
+                      <a:tailEnd type="none" w="med" len="med"/>
+                    </a:lnR>
+                    <a:lnT w="12700" cap="flat" cmpd="sng" algn="ctr">
+                      <a:solidFill>
+                        <a:srgbClr val="C4C5C6"/>
+                      </a:solidFill>
+                      <a:prstDash val="solid"/>
+                      <a:round/>
+                      <a:headEnd type="none" w="med" len="med"/>
+                      <a:tailEnd type="none" w="med" len="med"/>
+                    </a:lnT>
+                    <a:lnB w="12700" cap="flat" cmpd="sng" algn="ctr">
+                      <a:solidFill>
+                        <a:srgbClr val="CBCBCB"/>
+                      </a:solidFill>
+                      <a:prstDash val="solid"/>
+                      <a:round/>
+                      <a:headEnd type="none" w="med" len="med"/>
+                      <a:tailEnd type="none" w="med" len="med"/>
+                    </a:lnB>
+                  </a:tcPr>
+                </a:tc>
+              </a:tr>
+            </a:tbl>
+          </a:graphicData>
+        </a:graphic>
+      </p:graphicFrame>
+      <p:sp>
+        <p:nvSpPr>
+          <p:cNvPr id="4" name="Text 1"/>
+          <p:cNvSpPr/>
+          <p:nvPr/>
+        </p:nvSpPr>
+        <p:spPr>
+          <a:xfrm>
+            <a:off x="7061200" y="1564630"/>
+            <a:ext cx="4447540" cy="360660"/>
           </a:xfrm>
           <a:prstGeom prst="rect">
             <a:avLst/>
@@ -5984,12 +11074,56 @@
           <a:p>
             <a:pPr algn="l" indent="0" marL="0">
               <a:lnSpc>
-                <a:spcPts val="2240"/>
+                <a:spcPts val="2640"/>
               </a:lnSpc>
               <a:buNone/>
             </a:pPr>
             <a:r>
-              <a:rPr lang="en-US" sz="1600" dirty="0">
+              <a:rPr lang="en-US" sz="2200" b="1" dirty="0">
+                <a:solidFill>
+                  <a:srgbClr val="006CE6"/>
+                </a:solidFill>
+                <a:latin typeface="Merriweather" pitchFamily="18" charset="0"/>
+                <a:ea typeface="Merriweather" pitchFamily="18" charset="-122"/>
+                <a:cs typeface="Merriweather" pitchFamily="18" charset="-120"/>
+              </a:rPr>
+              <a:t>860 vahetajat</a:t>
+            </a:r>
+            <a:endParaRPr lang="en-US" sz="2200" dirty="0"/>
+          </a:p>
+        </p:txBody>
+      </p:sp>
+      <p:sp>
+        <p:nvSpPr>
+          <p:cNvPr id="5" name="Text 2"/>
+          <p:cNvSpPr/>
+          <p:nvPr/>
+        </p:nvSpPr>
+        <p:spPr>
+          <a:xfrm>
+            <a:off x="7061200" y="1925290"/>
+            <a:ext cx="4447540" cy="238720"/>
+          </a:xfrm>
+          <a:prstGeom prst="rect">
+            <a:avLst/>
+          </a:prstGeom>
+          <a:noFill/>
+          <a:ln/>
+        </p:spPr>
+        <p:txBody>
+          <a:bodyPr wrap="square" lIns="0" tIns="0" rIns="0" bIns="0" rtlCol="0" anchor="t">
+            <a:normAutofit/>
+          </a:bodyPr>
+          <a:lstStyle/>
+          <a:p>
+            <a:pPr algn="l" indent="0" marL="0">
+              <a:lnSpc>
+                <a:spcPts val="1680"/>
+              </a:lnSpc>
+              <a:buNone/>
+            </a:pPr>
+            <a:r>
+              <a:rPr lang="en-US" sz="1200" dirty="0">
                 <a:solidFill>
                   <a:srgbClr val="6B7074"/>
                 </a:solidFill>
@@ -5997,57 +11131,12 @@
                 <a:ea typeface="Roboto Flex" pitchFamily="34" charset="-122"/>
                 <a:cs typeface="Roboto Flex" pitchFamily="34" charset="-120"/>
               </a:rPr>
-              <a:t>Mobiilside on esimene</a:t>
-            </a:r>
-            <a:endParaRPr lang="en-US" sz="1600" dirty="0"/>
-          </a:p>
-        </p:txBody>
-      </p:sp>
-      <p:sp>
-        <p:nvSpPr>
-          <p:cNvPr id="4" name="Shape 2"/>
-          <p:cNvSpPr/>
-          <p:nvPr/>
-        </p:nvSpPr>
-        <p:spPr>
-          <a:xfrm>
-            <a:off x="812800" y="2910830"/>
-            <a:ext cx="2489200" cy="1869380"/>
-          </a:xfrm>
-          <a:prstGeom prst="roundRect">
-            <a:avLst>
-              <a:gd name="adj" fmla="val 5435"/>
-            </a:avLst>
-          </a:prstGeom>
-          <a:solidFill>
-            <a:srgbClr val="002F63"/>
-          </a:solidFill>
-          <a:ln/>
-        </p:spPr>
-      </p:sp>
-      <p:pic>
-        <p:nvPicPr>
-          <p:cNvPr id="5" name="Image 0" descr="Chat">    </p:cNvPr>
-          <p:cNvPicPr>
-            <a:picLocks noChangeAspect="1"/>
-          </p:cNvPicPr>
-          <p:nvPr/>
-        </p:nvPicPr>
-        <p:blipFill>
-          <a:blip r:embed="rId1"/>
-          <a:srcRect l="0" r="0" t="0" b="0"/>
-          <a:stretch/>
-        </p:blipFill>
-        <p:spPr>
-          <a:xfrm>
-            <a:off x="1066800" y="3164830"/>
-            <a:ext cx="406400" cy="406400"/>
-          </a:xfrm>
-          <a:prstGeom prst="rect">
-            <a:avLst/>
-          </a:prstGeom>
-        </p:spPr>
-      </p:pic>
+              <a:t>9 560 × 20% × 45%</a:t>
+            </a:r>
+            <a:endParaRPr lang="en-US" sz="1200" dirty="0"/>
+          </a:p>
+        </p:txBody>
+      </p:sp>
       <p:sp>
         <p:nvSpPr>
           <p:cNvPr id="6" name="Text 3"/>
@@ -6056,8 +11145,8 @@
         </p:nvSpPr>
         <p:spPr>
           <a:xfrm>
-            <a:off x="1066800" y="3774430"/>
-            <a:ext cx="2040636" cy="360660"/>
+            <a:off x="7061200" y="2316411"/>
+            <a:ext cx="4447540" cy="360660"/>
           </a:xfrm>
           <a:prstGeom prst="rect">
             <a:avLst/>
@@ -6080,13 +11169,13 @@
             <a:r>
               <a:rPr lang="en-US" sz="2200" b="1" dirty="0">
                 <a:solidFill>
-                  <a:srgbClr val="FFFFFF"/>
+                  <a:srgbClr val="006CE6"/>
                 </a:solidFill>
                 <a:latin typeface="Merriweather" pitchFamily="18" charset="0"/>
                 <a:ea typeface="Merriweather" pitchFamily="18" charset="-122"/>
                 <a:cs typeface="Merriweather" pitchFamily="18" charset="-120"/>
               </a:rPr>
-              <a:t>Mobiilside</a:t>
+              <a:t>2 670 lepingut</a:t>
             </a:r>
             <a:endParaRPr lang="en-US" sz="2200" dirty="0"/>
           </a:p>
@@ -6100,8 +11189,8 @@
         </p:nvSpPr>
         <p:spPr>
           <a:xfrm>
-            <a:off x="1066800" y="4312890"/>
-            <a:ext cx="2040636" cy="238720"/>
+            <a:off x="7061200" y="2677071"/>
+            <a:ext cx="4447540" cy="452041"/>
           </a:xfrm>
           <a:prstGeom prst="rect">
             <a:avLst/>
@@ -6122,15 +11211,15 @@
               <a:buNone/>
             </a:pPr>
             <a:r>
-              <a:rPr lang="en-US" sz="1200" b="1" spc="100" kern="0" dirty="0">
+              <a:rPr lang="en-US" sz="1200" dirty="0">
                 <a:solidFill>
-                  <a:srgbClr val="A9C6E2"/>
+                  <a:srgbClr val="6B7074"/>
                 </a:solidFill>
                 <a:latin typeface="Roboto Flex" pitchFamily="34" charset="0"/>
                 <a:ea typeface="Roboto Flex" pitchFamily="34" charset="-122"/>
                 <a:cs typeface="Roboto Flex" pitchFamily="34" charset="-120"/>
               </a:rPr>
-              <a:t>TÄNA</a:t>
+              <a:t>1. aasta lõpus: 1 548 numbrit + 550 lisateenust + 572 ettevõtte numbrit</a:t>
             </a:r>
             <a:endParaRPr lang="en-US" sz="1200" dirty="0"/>
           </a:p>
@@ -6138,59 +11227,102 @@
       </p:sp>
       <p:sp>
         <p:nvSpPr>
-          <p:cNvPr id="8" name="Shape 5"/>
-          <p:cNvSpPr/>
-          <p:nvPr/>
-        </p:nvSpPr>
-        <p:spPr>
-          <a:xfrm>
-            <a:off x="3505200" y="2910830"/>
-            <a:ext cx="2489200" cy="1869380"/>
-          </a:xfrm>
-          <a:prstGeom prst="roundRect">
-            <a:avLst>
-              <a:gd name="adj" fmla="val 5435"/>
-            </a:avLst>
-          </a:prstGeom>
-          <a:solidFill>
-            <a:srgbClr val="EDF7FD"/>
-          </a:solidFill>
-          <a:ln/>
-        </p:spPr>
-      </p:sp>
-      <p:pic>
-        <p:nvPicPr>
-          <p:cNvPr id="9" name="Image 1" descr="Lightning">    </p:cNvPr>
-          <p:cNvPicPr>
-            <a:picLocks noChangeAspect="1"/>
-          </p:cNvPicPr>
-          <p:nvPr/>
-        </p:nvPicPr>
-        <p:blipFill>
-          <a:blip r:embed="rId2"/>
-          <a:srcRect l="0" r="0" t="0" b="0"/>
-          <a:stretch/>
-        </p:blipFill>
-        <p:spPr>
-          <a:xfrm>
-            <a:off x="3759200" y="3164830"/>
-            <a:ext cx="406400" cy="406400"/>
+          <p:cNvPr id="8" name="Text 5"/>
+          <p:cNvSpPr/>
+          <p:nvPr/>
+        </p:nvSpPr>
+        <p:spPr>
+          <a:xfrm>
+            <a:off x="7061200" y="3281511"/>
+            <a:ext cx="4447540" cy="360660"/>
           </a:xfrm>
           <a:prstGeom prst="rect">
             <a:avLst/>
           </a:prstGeom>
-        </p:spPr>
-      </p:pic>
-      <p:sp>
-        <p:nvSpPr>
-          <p:cNvPr id="10" name="Text 6"/>
-          <p:cNvSpPr/>
-          <p:nvPr/>
-        </p:nvSpPr>
-        <p:spPr>
-          <a:xfrm>
-            <a:off x="3759200" y="3774430"/>
-            <a:ext cx="2040636" cy="360660"/>
+          <a:noFill/>
+          <a:ln/>
+        </p:spPr>
+        <p:txBody>
+          <a:bodyPr wrap="square" lIns="0" tIns="0" rIns="0" bIns="0" rtlCol="0" anchor="t">
+            <a:normAutofit/>
+          </a:bodyPr>
+          <a:lstStyle/>
+          <a:p>
+            <a:pPr algn="l" indent="0" marL="0">
+              <a:lnSpc>
+                <a:spcPts val="2640"/>
+              </a:lnSpc>
+              <a:buNone/>
+            </a:pPr>
+            <a:r>
+              <a:rPr lang="en-US" sz="2200" b="1" dirty="0">
+                <a:solidFill>
+                  <a:srgbClr val="006CE6"/>
+                </a:solidFill>
+                <a:latin typeface="Merriweather" pitchFamily="18" charset="0"/>
+                <a:ea typeface="Merriweather" pitchFamily="18" charset="-122"/>
+                <a:cs typeface="Merriweather" pitchFamily="18" charset="-120"/>
+              </a:rPr>
+              <a:t>16 000 € tulu</a:t>
+            </a:r>
+            <a:endParaRPr lang="en-US" sz="2200" dirty="0"/>
+          </a:p>
+        </p:txBody>
+      </p:sp>
+      <p:sp>
+        <p:nvSpPr>
+          <p:cNvPr id="9" name="Text 6"/>
+          <p:cNvSpPr/>
+          <p:nvPr/>
+        </p:nvSpPr>
+        <p:spPr>
+          <a:xfrm>
+            <a:off x="7061200" y="3642171"/>
+            <a:ext cx="4447540" cy="238720"/>
+          </a:xfrm>
+          <a:prstGeom prst="rect">
+            <a:avLst/>
+          </a:prstGeom>
+          <a:noFill/>
+          <a:ln/>
+        </p:spPr>
+        <p:txBody>
+          <a:bodyPr wrap="square" lIns="0" tIns="0" rIns="0" bIns="0" rtlCol="0" anchor="t">
+            <a:normAutofit/>
+          </a:bodyPr>
+          <a:lstStyle/>
+          <a:p>
+            <a:pPr algn="l" indent="0" marL="0">
+              <a:lnSpc>
+                <a:spcPts val="1680"/>
+              </a:lnSpc>
+              <a:buNone/>
+            </a:pPr>
+            <a:r>
+              <a:rPr lang="en-US" sz="1200" dirty="0">
+                <a:solidFill>
+                  <a:srgbClr val="6B7074"/>
+                </a:solidFill>
+                <a:latin typeface="Roboto Flex" pitchFamily="34" charset="0"/>
+                <a:ea typeface="Roboto Flex" pitchFamily="34" charset="-122"/>
+                <a:cs typeface="Roboto Flex" pitchFamily="34" charset="-120"/>
+              </a:rPr>
+              <a:t>1. aastal, liitujad ühtlaselt üle aasta · 3. a 51 900 €, 5. a 66 100 €</a:t>
+            </a:r>
+            <a:endParaRPr lang="en-US" sz="1200" dirty="0"/>
+          </a:p>
+        </p:txBody>
+      </p:sp>
+      <p:sp>
+        <p:nvSpPr>
+          <p:cNvPr id="10" name="Text 7"/>
+          <p:cNvSpPr/>
+          <p:nvPr/>
+        </p:nvSpPr>
+        <p:spPr>
+          <a:xfrm>
+            <a:off x="7061200" y="4033292"/>
+            <a:ext cx="4447540" cy="360660"/>
           </a:xfrm>
           <a:prstGeom prst="rect">
             <a:avLst/>
@@ -6219,7 +11351,7 @@
                 <a:ea typeface="Merriweather" pitchFamily="18" charset="-122"/>
                 <a:cs typeface="Merriweather" pitchFamily="18" charset="-120"/>
               </a:rPr>
-              <a:t>Elekter</a:t>
+              <a:t>5 750 lepingut</a:t>
             </a:r>
             <a:endParaRPr lang="en-US" sz="2200" dirty="0"/>
           </a:p>
@@ -6227,324 +11359,14 @@
       </p:sp>
       <p:sp>
         <p:nvSpPr>
-          <p:cNvPr id="11" name="Text 7"/>
-          <p:cNvSpPr/>
-          <p:nvPr/>
-        </p:nvSpPr>
-        <p:spPr>
-          <a:xfrm>
-            <a:off x="3759200" y="4312890"/>
-            <a:ext cx="2040636" cy="238720"/>
-          </a:xfrm>
-          <a:prstGeom prst="rect">
-            <a:avLst/>
-          </a:prstGeom>
-          <a:noFill/>
-          <a:ln/>
-        </p:spPr>
-        <p:txBody>
-          <a:bodyPr wrap="square" lIns="0" tIns="0" rIns="0" bIns="0" rtlCol="0" anchor="t">
-            <a:normAutofit/>
-          </a:bodyPr>
-          <a:lstStyle/>
-          <a:p>
-            <a:pPr algn="l" indent="0" marL="0">
-              <a:lnSpc>
-                <a:spcPts val="1680"/>
-              </a:lnSpc>
-              <a:buNone/>
-            </a:pPr>
-            <a:r>
-              <a:rPr lang="en-US" sz="1200" b="1" spc="100" kern="0" dirty="0">
-                <a:solidFill>
-                  <a:srgbClr val="6B7074"/>
-                </a:solidFill>
-                <a:latin typeface="Roboto Flex" pitchFamily="34" charset="0"/>
-                <a:ea typeface="Roboto Flex" pitchFamily="34" charset="-122"/>
-                <a:cs typeface="Roboto Flex" pitchFamily="34" charset="-120"/>
-              </a:rPr>
-              <a:t>TULEVIKUS</a:t>
-            </a:r>
-            <a:endParaRPr lang="en-US" sz="1200" dirty="0"/>
-          </a:p>
-        </p:txBody>
-      </p:sp>
-      <p:sp>
-        <p:nvSpPr>
-          <p:cNvPr id="12" name="Shape 8"/>
-          <p:cNvSpPr/>
-          <p:nvPr/>
-        </p:nvSpPr>
-        <p:spPr>
-          <a:xfrm>
-            <a:off x="6197600" y="2910830"/>
-            <a:ext cx="2489200" cy="1869380"/>
-          </a:xfrm>
-          <a:prstGeom prst="roundRect">
-            <a:avLst>
-              <a:gd name="adj" fmla="val 5435"/>
-            </a:avLst>
-          </a:prstGeom>
-          <a:solidFill>
-            <a:srgbClr val="EDF7FD"/>
-          </a:solidFill>
-          <a:ln/>
-        </p:spPr>
-      </p:sp>
-      <p:pic>
-        <p:nvPicPr>
-          <p:cNvPr id="13" name="Image 2" descr="Trust">    </p:cNvPr>
-          <p:cNvPicPr>
-            <a:picLocks noChangeAspect="1"/>
-          </p:cNvPicPr>
-          <p:nvPr/>
-        </p:nvPicPr>
-        <p:blipFill>
-          <a:blip r:embed="rId3"/>
-          <a:srcRect l="0" r="0" t="0" b="0"/>
-          <a:stretch/>
-        </p:blipFill>
-        <p:spPr>
-          <a:xfrm>
-            <a:off x="6451600" y="3164830"/>
-            <a:ext cx="406400" cy="406400"/>
-          </a:xfrm>
-          <a:prstGeom prst="rect">
-            <a:avLst/>
-          </a:prstGeom>
-        </p:spPr>
-      </p:pic>
-      <p:sp>
-        <p:nvSpPr>
-          <p:cNvPr id="14" name="Text 9"/>
-          <p:cNvSpPr/>
-          <p:nvPr/>
-        </p:nvSpPr>
-        <p:spPr>
-          <a:xfrm>
-            <a:off x="6451600" y="3774430"/>
-            <a:ext cx="2040636" cy="360660"/>
-          </a:xfrm>
-          <a:prstGeom prst="rect">
-            <a:avLst/>
-          </a:prstGeom>
-          <a:noFill/>
-          <a:ln/>
-        </p:spPr>
-        <p:txBody>
-          <a:bodyPr wrap="square" lIns="0" tIns="0" rIns="0" bIns="0" rtlCol="0" anchor="t">
-            <a:normAutofit/>
-          </a:bodyPr>
-          <a:lstStyle/>
-          <a:p>
-            <a:pPr algn="l" indent="0" marL="0">
-              <a:lnSpc>
-                <a:spcPts val="2640"/>
-              </a:lnSpc>
-              <a:buNone/>
-            </a:pPr>
-            <a:r>
-              <a:rPr lang="en-US" sz="2200" b="1" dirty="0">
-                <a:solidFill>
-                  <a:srgbClr val="002F63"/>
-                </a:solidFill>
-                <a:latin typeface="Merriweather" pitchFamily="18" charset="0"/>
-                <a:ea typeface="Merriweather" pitchFamily="18" charset="-122"/>
-                <a:cs typeface="Merriweather" pitchFamily="18" charset="-120"/>
-              </a:rPr>
-              <a:t>Kindlustus</a:t>
-            </a:r>
-            <a:endParaRPr lang="en-US" sz="2200" dirty="0"/>
-          </a:p>
-        </p:txBody>
-      </p:sp>
-      <p:sp>
-        <p:nvSpPr>
-          <p:cNvPr id="15" name="Text 10"/>
-          <p:cNvSpPr/>
-          <p:nvPr/>
-        </p:nvSpPr>
-        <p:spPr>
-          <a:xfrm>
-            <a:off x="6451600" y="4312890"/>
-            <a:ext cx="2040636" cy="238720"/>
-          </a:xfrm>
-          <a:prstGeom prst="rect">
-            <a:avLst/>
-          </a:prstGeom>
-          <a:noFill/>
-          <a:ln/>
-        </p:spPr>
-        <p:txBody>
-          <a:bodyPr wrap="square" lIns="0" tIns="0" rIns="0" bIns="0" rtlCol="0" anchor="t">
-            <a:normAutofit/>
-          </a:bodyPr>
-          <a:lstStyle/>
-          <a:p>
-            <a:pPr algn="l" indent="0" marL="0">
-              <a:lnSpc>
-                <a:spcPts val="1680"/>
-              </a:lnSpc>
-              <a:buNone/>
-            </a:pPr>
-            <a:r>
-              <a:rPr lang="en-US" sz="1200" b="1" spc="100" kern="0" dirty="0">
-                <a:solidFill>
-                  <a:srgbClr val="6B7074"/>
-                </a:solidFill>
-                <a:latin typeface="Roboto Flex" pitchFamily="34" charset="0"/>
-                <a:ea typeface="Roboto Flex" pitchFamily="34" charset="-122"/>
-                <a:cs typeface="Roboto Flex" pitchFamily="34" charset="-120"/>
-              </a:rPr>
-              <a:t>TULEVIKUS</a:t>
-            </a:r>
-            <a:endParaRPr lang="en-US" sz="1200" dirty="0"/>
-          </a:p>
-        </p:txBody>
-      </p:sp>
-      <p:sp>
-        <p:nvSpPr>
-          <p:cNvPr id="16" name="Shape 11"/>
-          <p:cNvSpPr/>
-          <p:nvPr/>
-        </p:nvSpPr>
-        <p:spPr>
-          <a:xfrm>
-            <a:off x="8890000" y="2910830"/>
-            <a:ext cx="2489200" cy="1869380"/>
-          </a:xfrm>
-          <a:prstGeom prst="roundRect">
-            <a:avLst>
-              <a:gd name="adj" fmla="val 5435"/>
-            </a:avLst>
-          </a:prstGeom>
-          <a:solidFill>
-            <a:srgbClr val="EDF7FD"/>
-          </a:solidFill>
-          <a:ln/>
-        </p:spPr>
-      </p:sp>
-      <p:pic>
-        <p:nvPicPr>
-          <p:cNvPr id="17" name="Image 3" descr="Book">    </p:cNvPr>
-          <p:cNvPicPr>
-            <a:picLocks noChangeAspect="1"/>
-          </p:cNvPicPr>
-          <p:nvPr/>
-        </p:nvPicPr>
-        <p:blipFill>
-          <a:blip r:embed="rId4"/>
-          <a:srcRect l="0" r="0" t="0" b="0"/>
-          <a:stretch/>
-        </p:blipFill>
-        <p:spPr>
-          <a:xfrm>
-            <a:off x="9144000" y="3164830"/>
-            <a:ext cx="406400" cy="406400"/>
-          </a:xfrm>
-          <a:prstGeom prst="rect">
-            <a:avLst/>
-          </a:prstGeom>
-        </p:spPr>
-      </p:pic>
-      <p:sp>
-        <p:nvSpPr>
-          <p:cNvPr id="18" name="Text 12"/>
-          <p:cNvSpPr/>
-          <p:nvPr/>
-        </p:nvSpPr>
-        <p:spPr>
-          <a:xfrm>
-            <a:off x="9144000" y="3774430"/>
-            <a:ext cx="2040636" cy="360660"/>
-          </a:xfrm>
-          <a:prstGeom prst="rect">
-            <a:avLst/>
-          </a:prstGeom>
-          <a:noFill/>
-          <a:ln/>
-        </p:spPr>
-        <p:txBody>
-          <a:bodyPr wrap="square" lIns="0" tIns="0" rIns="0" bIns="0" rtlCol="0" anchor="t">
-            <a:normAutofit/>
-          </a:bodyPr>
-          <a:lstStyle/>
-          <a:p>
-            <a:pPr algn="l" indent="0" marL="0">
-              <a:lnSpc>
-                <a:spcPts val="2640"/>
-              </a:lnSpc>
-              <a:buNone/>
-            </a:pPr>
-            <a:r>
-              <a:rPr lang="en-US" sz="2200" b="1" dirty="0">
-                <a:solidFill>
-                  <a:srgbClr val="002F63"/>
-                </a:solidFill>
-                <a:latin typeface="Merriweather" pitchFamily="18" charset="0"/>
-                <a:ea typeface="Merriweather" pitchFamily="18" charset="-122"/>
-                <a:cs typeface="Merriweather" pitchFamily="18" charset="-120"/>
-              </a:rPr>
-              <a:t>Uudised</a:t>
-            </a:r>
-            <a:endParaRPr lang="en-US" sz="2200" dirty="0"/>
-          </a:p>
-        </p:txBody>
-      </p:sp>
-      <p:sp>
-        <p:nvSpPr>
-          <p:cNvPr id="19" name="Text 13"/>
-          <p:cNvSpPr/>
-          <p:nvPr/>
-        </p:nvSpPr>
-        <p:spPr>
-          <a:xfrm>
-            <a:off x="9144000" y="4312890"/>
-            <a:ext cx="2040636" cy="238720"/>
-          </a:xfrm>
-          <a:prstGeom prst="rect">
-            <a:avLst/>
-          </a:prstGeom>
-          <a:noFill/>
-          <a:ln/>
-        </p:spPr>
-        <p:txBody>
-          <a:bodyPr wrap="square" lIns="0" tIns="0" rIns="0" bIns="0" rtlCol="0" anchor="t">
-            <a:normAutofit/>
-          </a:bodyPr>
-          <a:lstStyle/>
-          <a:p>
-            <a:pPr algn="l" indent="0" marL="0">
-              <a:lnSpc>
-                <a:spcPts val="1680"/>
-              </a:lnSpc>
-              <a:buNone/>
-            </a:pPr>
-            <a:r>
-              <a:rPr lang="en-US" sz="1200" b="1" spc="100" kern="0" dirty="0">
-                <a:solidFill>
-                  <a:srgbClr val="6B7074"/>
-                </a:solidFill>
-                <a:latin typeface="Roboto Flex" pitchFamily="34" charset="0"/>
-                <a:ea typeface="Roboto Flex" pitchFamily="34" charset="-122"/>
-                <a:cs typeface="Roboto Flex" pitchFamily="34" charset="-120"/>
-              </a:rPr>
-              <a:t>TULEVIKUS</a:t>
-            </a:r>
-            <a:endParaRPr lang="en-US" sz="1200" dirty="0"/>
-          </a:p>
-        </p:txBody>
-      </p:sp>
-      <p:sp>
-        <p:nvSpPr>
-          <p:cNvPr id="20" name="Text 14"/>
-          <p:cNvSpPr/>
-          <p:nvPr/>
-        </p:nvSpPr>
-        <p:spPr>
-          <a:xfrm>
-            <a:off x="812800" y="6238280"/>
-            <a:ext cx="5464016" cy="238720"/>
+          <p:cNvPr id="11" name="Text 8"/>
+          <p:cNvSpPr/>
+          <p:nvPr/>
+        </p:nvSpPr>
+        <p:spPr>
+          <a:xfrm>
+            <a:off x="7061200" y="4393952"/>
+            <a:ext cx="4447540" cy="238720"/>
           </a:xfrm>
           <a:prstGeom prst="rect">
             <a:avLst/>
@@ -6573,7 +11395,7 @@
                 <a:ea typeface="Roboto Flex" pitchFamily="34" charset="-122"/>
                 <a:cs typeface="Roboto Flex" pitchFamily="34" charset="-120"/>
               </a:rPr>
-              <a:t>Visioon · uudiste ja muud tellimused, iga valdkond vajab eraldi analüüsi</a:t>
+              <a:t>katab kulu: 69 000 € ÷ 12 € · baas jõuab sinna umbes 5. aastal</a:t>
             </a:r>
             <a:endParaRPr lang="en-US" sz="1200" dirty="0"/>
           </a:p>
@@ -6581,7 +11403,51 @@
       </p:sp>
       <p:sp>
         <p:nvSpPr>
-          <p:cNvPr id="21" name="Text 15"/>
+          <p:cNvPr id="12" name="Text 9"/>
+          <p:cNvSpPr/>
+          <p:nvPr/>
+        </p:nvSpPr>
+        <p:spPr>
+          <a:xfrm>
+            <a:off x="812800" y="6238280"/>
+            <a:ext cx="7309425" cy="238720"/>
+          </a:xfrm>
+          <a:prstGeom prst="rect">
+            <a:avLst/>
+          </a:prstGeom>
+          <a:noFill/>
+          <a:ln/>
+        </p:spPr>
+        <p:txBody>
+          <a:bodyPr wrap="square" lIns="0" tIns="0" rIns="0" bIns="0" rtlCol="0" anchor="t">
+            <a:normAutofit/>
+          </a:bodyPr>
+          <a:lstStyle/>
+          <a:p>
+            <a:pPr algn="l" indent="0" marL="0">
+              <a:lnSpc>
+                <a:spcPts val="1680"/>
+              </a:lnSpc>
+              <a:buNone/>
+            </a:pPr>
+            <a:r>
+              <a:rPr lang="en-US" sz="1200" dirty="0">
+                <a:solidFill>
+                  <a:srgbClr val="6B7074"/>
+                </a:solidFill>
+                <a:latin typeface="Roboto Flex" pitchFamily="34" charset="0"/>
+                <a:ea typeface="Roboto Flex" pitchFamily="34" charset="-122"/>
+                <a:cs typeface="Roboto Flex" pitchFamily="34" charset="-120"/>
+              </a:rPr>
+              <a:t>Hinnang · Marju prognoos 10.10.2026, baasstsenaarium (docs/13) · kogu töötaja kulu mobiilile</a:t>
+            </a:r>
+            <a:endParaRPr lang="en-US" sz="1200" dirty="0"/>
+          </a:p>
+        </p:txBody>
+      </p:sp>
+      <p:sp>
+        <p:nvSpPr>
+          <p:cNvPr id="13" name="Text 10"/>
           <p:cNvSpPr/>
           <p:nvPr/>
         </p:nvSpPr>
@@ -6648,22 +11514,22 @@
         <a:srgbClr val="E6EAEF"/>
       </a:lt2>
       <a:accent1>
-        <a:srgbClr val="008300"/>
+        <a:srgbClr val="006CE6"/>
       </a:accent1>
       <a:accent2>
-        <a:srgbClr val="DB2200"/>
+        <a:srgbClr val="008300"/>
       </a:accent2>
       <a:accent3>
-        <a:srgbClr val="006CE6"/>
+        <a:srgbClr val="DB2200"/>
       </a:accent3>
       <a:accent4>
         <a:srgbClr val="00AEEA"/>
       </a:accent4>
       <a:accent5>
-        <a:srgbClr val="CCEDFA"/>
+        <a:srgbClr val="A9C6E2"/>
       </a:accent5>
       <a:accent6>
-        <a:srgbClr val="A9C6E2"/>
+        <a:srgbClr val="8FADCA"/>
       </a:accent6>
       <a:hlink>
         <a:srgbClr val="0563C1"/>
